--- a/docs/lecture_slides/Week 10/2026/Week10_Lecture22_Slides_10_26_2026.pptx
+++ b/docs/lecture_slides/Week 10/2026/Week10_Lecture22_Slides_10_26_2026.pptx
@@ -4010,7 +4010,7 @@
     </p:spTree>
     <p:extLst>
       <p:ext uri="{BB962C8B-B14F-4D97-AF65-F5344CB8AC3E}">
-        <p14:creationId xmlns:p14="http://schemas.microsoft.com/office/powerpoint/2010/main" val="332857856"/>
+        <p14:creationId xmlns:p14="http://schemas.microsoft.com/office/powerpoint/2010/main" val="2408036258"/>
       </p:ext>
     </p:extLst>
   </p:cSld>
@@ -5012,7 +5012,7 @@
     </p:spTree>
     <p:extLst>
       <p:ext uri="{BB962C8B-B14F-4D97-AF65-F5344CB8AC3E}">
-        <p14:creationId xmlns:p14="http://schemas.microsoft.com/office/powerpoint/2010/main" val="3988451518"/>
+        <p14:creationId xmlns:p14="http://schemas.microsoft.com/office/powerpoint/2010/main" val="3007873360"/>
       </p:ext>
     </p:extLst>
   </p:cSld>
@@ -5700,7 +5700,7 @@
     </p:spTree>
     <p:extLst>
       <p:ext uri="{BB962C8B-B14F-4D97-AF65-F5344CB8AC3E}">
-        <p14:creationId xmlns:p14="http://schemas.microsoft.com/office/powerpoint/2010/main" val="1875864399"/>
+        <p14:creationId xmlns:p14="http://schemas.microsoft.com/office/powerpoint/2010/main" val="3372870117"/>
       </p:ext>
     </p:extLst>
   </p:cSld>
@@ -6713,7 +6713,7 @@
     </p:spTree>
     <p:extLst>
       <p:ext uri="{BB962C8B-B14F-4D97-AF65-F5344CB8AC3E}">
-        <p14:creationId xmlns:p14="http://schemas.microsoft.com/office/powerpoint/2010/main" val="261816030"/>
+        <p14:creationId xmlns:p14="http://schemas.microsoft.com/office/powerpoint/2010/main" val="94102795"/>
       </p:ext>
     </p:extLst>
   </p:cSld>
@@ -6964,105 +6964,6 @@
         <p:spPr>
           <a:xfrm>
             <a:off x="762000" y="1879600"/>
-            <a:ext cx="10668000" cy="381000"/>
-          </a:xfrm>
-          <a:prstGeom prst="rect">
-            <a:avLst/>
-          </a:prstGeom>
-          <a:noFill/>
-        </p:spPr>
-        <p:txBody>
-          <a:bodyPr vert="horz" wrap="square" rtlCol="0">
-            <a:spAutoFit/>
-          </a:bodyPr>
-          <a:lstStyle/>
-          <a:p>
-            <a:pPr>
-              <a:spcAft>
-                <a:spcPts val="200"/>
-              </a:spcAft>
-            </a:pPr>
-            <a:r>
-              <a:rPr lang="en-US">
-                <a:solidFill>
-                  <a:srgbClr val="000000"/>
-                </a:solidFill>
-                <a:latin typeface="Calibri" panose="020F0502020204030204" pitchFamily="34" charset="0"/>
-              </a:rPr>
-              <a:t>If H</a:t>
-            </a:r>
-            <a:r>
-              <a:rPr lang="en-US" baseline="-25000">
-                <a:solidFill>
-                  <a:srgbClr val="000000"/>
-                </a:solidFill>
-                <a:latin typeface="Calibri" panose="020F0502020204030204" pitchFamily="34" charset="0"/>
-              </a:rPr>
-              <a:t>0</a:t>
-            </a:r>
-            <a:r>
-              <a:rPr lang="en-US">
-                <a:solidFill>
-                  <a:srgbClr val="000000"/>
-                </a:solidFill>
-                <a:latin typeface="Calibri" panose="020F0502020204030204" pitchFamily="34" charset="0"/>
-              </a:rPr>
-              <a:t> is true, z</a:t>
-            </a:r>
-            <a:r>
-              <a:rPr lang="en-US" baseline="-25000">
-                <a:solidFill>
-                  <a:srgbClr val="000000"/>
-                </a:solidFill>
-                <a:latin typeface="Calibri" panose="020F0502020204030204" pitchFamily="34" charset="0"/>
-              </a:rPr>
-              <a:t>obs</a:t>
-            </a:r>
-            <a:r>
-              <a:rPr lang="en-US">
-                <a:solidFill>
-                  <a:srgbClr val="000000"/>
-                </a:solidFill>
-                <a:latin typeface="Calibri" panose="020F0502020204030204" pitchFamily="34" charset="0"/>
-              </a:rPr>
-              <a:t> comes from N(0, 1).  Each curve marks a z</a:t>
-            </a:r>
-            <a:r>
-              <a:rPr lang="en-US" baseline="-25000">
-                <a:solidFill>
-                  <a:srgbClr val="000000"/>
-                </a:solidFill>
-                <a:latin typeface="Calibri" panose="020F0502020204030204" pitchFamily="34" charset="0"/>
-              </a:rPr>
-              <a:t>obs</a:t>
-            </a:r>
-            <a:r>
-              <a:rPr lang="en-US">
-                <a:solidFill>
-                  <a:srgbClr val="000000"/>
-                </a:solidFill>
-                <a:latin typeface="Calibri" panose="020F0502020204030204" pitchFamily="34" charset="0"/>
-              </a:rPr>
-              <a:t>;  the shaded area is the P-value.</a:t>
-            </a:r>
-          </a:p>
-        </p:txBody>
-      </p:sp>
-      <p:sp>
-        <p:nvSpPr>
-          <p:cNvPr id="10" name="Question">
-            <a:extLst>
-              <a:ext uri="{FF2B5EF4-FFF2-40B4-BE49-F238E27FC236}">
-                <a16:creationId xmlns:a16="http://schemas.microsoft.com/office/drawing/2014/main" id="{B31E395F-B84E-D1E9-D22A-222467FC4105}"/>
-              </a:ext>
-            </a:extLst>
-          </p:cNvPr>
-          <p:cNvSpPr txBox="1"/>
-          <p:nvPr/>
-        </p:nvSpPr>
-        <p:spPr>
-          <a:xfrm>
-            <a:off x="762000" y="2286000"/>
             <a:ext cx="10668000" cy="369332"/>
           </a:xfrm>
           <a:prstGeom prst="rect">
@@ -7082,13 +6983,130 @@
               </a:spcAft>
             </a:pPr>
             <a:r>
+              <a:rPr lang="en-US">
+                <a:solidFill>
+                  <a:srgbClr val="000000"/>
+                </a:solidFill>
+                <a:latin typeface="Calibri" panose="020F0502020204030204" pitchFamily="34" charset="0"/>
+              </a:rPr>
+              <a:t>Polls put Candidate X at 52%.  Our poll of 1,000 likely voters finds 49.0%, so testing H</a:t>
+            </a:r>
+            <a:r>
+              <a:rPr lang="en-US" baseline="-25000">
+                <a:solidFill>
+                  <a:srgbClr val="000000"/>
+                </a:solidFill>
+                <a:latin typeface="Calibri" panose="020F0502020204030204" pitchFamily="34" charset="0"/>
+              </a:rPr>
+              <a:t>0</a:t>
+            </a:r>
+            <a:r>
+              <a:rPr lang="en-US">
+                <a:solidFill>
+                  <a:srgbClr val="000000"/>
+                </a:solidFill>
+                <a:latin typeface="Calibri" panose="020F0502020204030204" pitchFamily="34" charset="0"/>
+              </a:rPr>
+              <a:t>: p = 0.52 gives z</a:t>
+            </a:r>
+            <a:r>
+              <a:rPr lang="en-US" baseline="-25000">
+                <a:solidFill>
+                  <a:srgbClr val="000000"/>
+                </a:solidFill>
+                <a:latin typeface="Calibri" panose="020F0502020204030204" pitchFamily="34" charset="0"/>
+              </a:rPr>
+              <a:t>obs</a:t>
+            </a:r>
+            <a:r>
+              <a:rPr lang="en-US">
+                <a:solidFill>
+                  <a:srgbClr val="000000"/>
+                </a:solidFill>
+                <a:latin typeface="Calibri" panose="020F0502020204030204" pitchFamily="34" charset="0"/>
+              </a:rPr>
+              <a:t> = −1.90.</a:t>
+            </a:r>
+          </a:p>
+        </p:txBody>
+      </p:sp>
+      <p:sp>
+        <p:nvSpPr>
+          <p:cNvPr id="10" name="Question">
+            <a:extLst>
+              <a:ext uri="{FF2B5EF4-FFF2-40B4-BE49-F238E27FC236}">
+                <a16:creationId xmlns:a16="http://schemas.microsoft.com/office/drawing/2014/main" id="{B31E395F-B84E-D1E9-D22A-222467FC4105}"/>
+              </a:ext>
+            </a:extLst>
+          </p:cNvPr>
+          <p:cNvSpPr txBox="1"/>
+          <p:nvPr/>
+        </p:nvSpPr>
+        <p:spPr>
+          <a:xfrm>
+            <a:off x="762000" y="2274332"/>
+            <a:ext cx="10668000" cy="369332"/>
+          </a:xfrm>
+          <a:prstGeom prst="rect">
+            <a:avLst/>
+          </a:prstGeom>
+          <a:noFill/>
+        </p:spPr>
+        <p:txBody>
+          <a:bodyPr vert="horz" wrap="square" rtlCol="0">
+            <a:spAutoFit/>
+          </a:bodyPr>
+          <a:lstStyle/>
+          <a:p>
+            <a:pPr>
+              <a:spcAft>
+                <a:spcPts val="200"/>
+              </a:spcAft>
+            </a:pPr>
+            <a:r>
               <a:rPr lang="en-US" b="1">
                 <a:solidFill>
                   <a:srgbClr val="C00000"/>
                 </a:solidFill>
                 <a:latin typeface="Calibri" panose="020F0502020204030204" pitchFamily="34" charset="0"/>
               </a:rPr>
-              <a:t>What is each P-value?  Which are significant at α = 0.05?</a:t>
+              <a:t>What is the P-value under each H</a:t>
+            </a:r>
+            <a:r>
+              <a:rPr lang="en-US" b="1" baseline="-25000">
+                <a:solidFill>
+                  <a:srgbClr val="C00000"/>
+                </a:solidFill>
+                <a:latin typeface="Calibri" panose="020F0502020204030204" pitchFamily="34" charset="0"/>
+              </a:rPr>
+              <a:t>A</a:t>
+            </a:r>
+            <a:r>
+              <a:rPr lang="en-US" b="1">
+                <a:solidFill>
+                  <a:srgbClr val="C00000"/>
+                </a:solidFill>
+                <a:latin typeface="Calibri" panose="020F0502020204030204" pitchFamily="34" charset="0"/>
+              </a:rPr>
+              <a:t>?  Which ones reject H</a:t>
+            </a:r>
+            <a:r>
+              <a:rPr lang="en-US" b="1" baseline="-25000">
+                <a:solidFill>
+                  <a:srgbClr val="C00000"/>
+                </a:solidFill>
+                <a:latin typeface="Calibri" panose="020F0502020204030204" pitchFamily="34" charset="0"/>
+              </a:rPr>
+              <a:t>0</a:t>
+            </a:r>
+            <a:r>
+              <a:rPr lang="en-US" b="1">
+                <a:solidFill>
+                  <a:srgbClr val="C00000"/>
+                </a:solidFill>
+                <a:latin typeface="Calibri" panose="020F0502020204030204" pitchFamily="34" charset="0"/>
+              </a:rPr>
+              <a:t> at α = 0.05?</a:t>
             </a:r>
           </a:p>
         </p:txBody>
@@ -7107,7 +7125,7 @@
         </p:nvSpPr>
         <p:spPr>
           <a:xfrm>
-            <a:off x="762000" y="5296932"/>
+            <a:off x="762000" y="5285264"/>
             <a:ext cx="10668000" cy="774700"/>
           </a:xfrm>
           <a:prstGeom prst="roundRect">
@@ -7153,7 +7171,7 @@
                 </a:solidFill>
                 <a:latin typeface="Calibri" panose="020F0502020204030204" pitchFamily="34" charset="0"/>
               </a:rPr>
-              <a:t>upper:  P(Z ≥ 1.80) = 0.036      lower:  P(Z ≤ −1.80) = 0.036      two:  2 × 0.036 = 0.072</a:t>
+              <a:t>upper:  P(Z ≥ −1.90) = 0.971      lower:  P(Z ≤ −1.90) = 0.029      two:  2 × 0.029 = 0.057</a:t>
             </a:r>
           </a:p>
           <a:p>
@@ -7164,17 +7182,53 @@
                 </a:solidFill>
                 <a:latin typeface="Calibri" panose="020F0502020204030204" pitchFamily="34" charset="0"/>
               </a:rPr>
-              <a:t>Significant for the one-sided tests, not the two-sided one:  0.072 ≥ 0.05</a:t>
+              <a:t>Only the lower-tailed test rejects H</a:t>
+            </a:r>
+            <a:r>
+              <a:rPr lang="en-US" sz="2000" b="1" baseline="-25000">
+                <a:solidFill>
+                  <a:srgbClr val="C00000"/>
+                </a:solidFill>
+                <a:latin typeface="Calibri" panose="020F0502020204030204" pitchFamily="34" charset="0"/>
+              </a:rPr>
+              <a:t>0</a:t>
+            </a:r>
+            <a:r>
+              <a:rPr lang="en-US" sz="2000" b="1">
+                <a:solidFill>
+                  <a:srgbClr val="C00000"/>
+                </a:solidFill>
+                <a:latin typeface="Calibri" panose="020F0502020204030204" pitchFamily="34" charset="0"/>
+              </a:rPr>
+              <a:t>:  H</a:t>
+            </a:r>
+            <a:r>
+              <a:rPr lang="en-US" sz="2000" b="1" baseline="-25000">
+                <a:solidFill>
+                  <a:srgbClr val="C00000"/>
+                </a:solidFill>
+                <a:latin typeface="Calibri" panose="020F0502020204030204" pitchFamily="34" charset="0"/>
+              </a:rPr>
+              <a:t>A</a:t>
+            </a:r>
+            <a:r>
+              <a:rPr lang="en-US" sz="2000" b="1">
+                <a:solidFill>
+                  <a:srgbClr val="C00000"/>
+                </a:solidFill>
+                <a:latin typeface="Calibri" panose="020F0502020204030204" pitchFamily="34" charset="0"/>
+              </a:rPr>
+              <a:t> must be set before seeing the data</a:t>
             </a:r>
           </a:p>
         </p:txBody>
       </p:sp>
       <p:pic>
         <p:nvPicPr>
-          <p:cNvPr id="6" name="l22_tails.png" descr="Three standard normal curves. Left, for the alternative p greater than p0: z = 1.80 marked, upper tail shaded. Middle, p less than p0: z = -1.80 marked, lower tail shaded. Right, p not equal to p0: both -1.80 and 1.80 marked, both tails shaded.">
-            <a:extLst>
-              <a:ext uri="{FF2B5EF4-FFF2-40B4-BE49-F238E27FC236}">
-                <a16:creationId xmlns:a16="http://schemas.microsoft.com/office/drawing/2014/main" id="{8C34C4C7-6C4B-EC25-75AC-97C7FFD719A1}"/>
+          <p:cNvPr id="6" name="l22_tails.png" descr="Three standard normal curves, each with the poll z observed of -1.90 marked. Left, for the alternative p greater than 0.52: everything above -1.90 is shaded, almost the whole curve. Middle, p less than 0.52: the small lower tail below -1.90 is shaded. Right, p not equal to 0.52: both tails beyond -1.90 and 1.90 are shaded.">
+            <a:extLst>
+              <a:ext uri="{FF2B5EF4-FFF2-40B4-BE49-F238E27FC236}">
+                <a16:creationId xmlns:a16="http://schemas.microsoft.com/office/drawing/2014/main" id="{86ACFF03-76A9-D68A-F87A-420449EBAC2B}"/>
               </a:ext>
             </a:extLst>
           </p:cNvPr>
@@ -7197,7 +7251,7 @@
         </p:blipFill>
         <p:spPr>
           <a:xfrm>
-            <a:off x="762000" y="2706132"/>
+            <a:off x="762000" y="2694464"/>
             <a:ext cx="10668000" cy="2540000"/>
           </a:xfrm>
           <a:prstGeom prst="rect">
@@ -7208,7 +7262,7 @@
     </p:spTree>
     <p:extLst>
       <p:ext uri="{BB962C8B-B14F-4D97-AF65-F5344CB8AC3E}">
-        <p14:creationId xmlns:p14="http://schemas.microsoft.com/office/powerpoint/2010/main" val="2805909233"/>
+        <p14:creationId xmlns:p14="http://schemas.microsoft.com/office/powerpoint/2010/main" val="802648944"/>
       </p:ext>
     </p:extLst>
   </p:cSld>
@@ -7594,7 +7648,7 @@
           <p:nvPr>
             <p:extLst>
               <p:ext uri="{D42A27DB-BD31-4B8C-83A1-F6EECF244321}">
-                <p14:modId xmlns:p14="http://schemas.microsoft.com/office/powerpoint/2010/main" val="2842829003"/>
+                <p14:modId xmlns:p14="http://schemas.microsoft.com/office/powerpoint/2010/main" val="1258285308"/>
               </p:ext>
             </p:extLst>
           </p:nvPr>
@@ -7827,7 +7881,7 @@
     </p:spTree>
     <p:extLst>
       <p:ext uri="{BB962C8B-B14F-4D97-AF65-F5344CB8AC3E}">
-        <p14:creationId xmlns:p14="http://schemas.microsoft.com/office/powerpoint/2010/main" val="1766470048"/>
+        <p14:creationId xmlns:p14="http://schemas.microsoft.com/office/powerpoint/2010/main" val="480451647"/>
       </p:ext>
     </p:extLst>
   </p:cSld>
@@ -8451,7 +8505,7 @@
     </p:spTree>
     <p:extLst>
       <p:ext uri="{BB962C8B-B14F-4D97-AF65-F5344CB8AC3E}">
-        <p14:creationId xmlns:p14="http://schemas.microsoft.com/office/powerpoint/2010/main" val="2676468317"/>
+        <p14:creationId xmlns:p14="http://schemas.microsoft.com/office/powerpoint/2010/main" val="126512286"/>
       </p:ext>
     </p:extLst>
   </p:cSld>
@@ -13730,7 +13784,7 @@
     </p:spTree>
     <p:extLst>
       <p:ext uri="{BB962C8B-B14F-4D97-AF65-F5344CB8AC3E}">
-        <p14:creationId xmlns:p14="http://schemas.microsoft.com/office/powerpoint/2010/main" val="884053825"/>
+        <p14:creationId xmlns:p14="http://schemas.microsoft.com/office/powerpoint/2010/main" val="1726921116"/>
       </p:ext>
     </p:extLst>
   </p:cSld>
@@ -14223,7 +14277,7 @@
     </p:spTree>
     <p:extLst>
       <p:ext uri="{BB962C8B-B14F-4D97-AF65-F5344CB8AC3E}">
-        <p14:creationId xmlns:p14="http://schemas.microsoft.com/office/powerpoint/2010/main" val="708044290"/>
+        <p14:creationId xmlns:p14="http://schemas.microsoft.com/office/powerpoint/2010/main" val="4264443962"/>
       </p:ext>
     </p:extLst>
   </p:cSld>
@@ -14794,7 +14848,7 @@
     </p:spTree>
     <p:extLst>
       <p:ext uri="{BB962C8B-B14F-4D97-AF65-F5344CB8AC3E}">
-        <p14:creationId xmlns:p14="http://schemas.microsoft.com/office/powerpoint/2010/main" val="1927341877"/>
+        <p14:creationId xmlns:p14="http://schemas.microsoft.com/office/powerpoint/2010/main" val="3884269920"/>
       </p:ext>
     </p:extLst>
   </p:cSld>

--- a/docs/lecture_slides/Week 10/2026/Week10_Lecture22_Slides_10_26_2026.pptx
+++ b/docs/lecture_slides/Week 10/2026/Week10_Lecture22_Slides_10_26_2026.pptx
@@ -13,15 +13,6 @@
     <p:sldId id="456" r:id="rId7"/>
     <p:sldId id="466" r:id="rId8"/>
     <p:sldId id="457" r:id="rId9"/>
-    <p:sldId id="458" r:id="rId10"/>
-    <p:sldId id="459" r:id="rId11"/>
-    <p:sldId id="460" r:id="rId12"/>
-    <p:sldId id="461" r:id="rId13"/>
-    <p:sldId id="462" r:id="rId14"/>
-    <p:sldId id="463" r:id="rId15"/>
-    <p:sldId id="464" r:id="rId16"/>
-    <p:sldId id="465" r:id="rId17"/>
-    <p:sldId id="454" r:id="rId18"/>
   </p:sldIdLst>
   <p:sldSz cx="12192000" cy="6858000"/>
   <p:notesSz cx="6858000" cy="9144000"/>
@@ -275,7 +266,7 @@
           <a:p>
             <a:fld id="{06882561-BD16-4A95-ACA1-5204E478F2FE}" type="datetimeFigureOut">
               <a:rPr lang="en-US" smtClean="0"/>
-              <a:t>10/26/2026</a:t>
+              <a:t>10/28/2026</a:t>
             </a:fld>
             <a:endParaRPr lang="en-US"/>
           </a:p>
@@ -473,7 +464,7 @@
           <a:p>
             <a:fld id="{06882561-BD16-4A95-ACA1-5204E478F2FE}" type="datetimeFigureOut">
               <a:rPr lang="en-US" smtClean="0"/>
-              <a:t>10/26/2026</a:t>
+              <a:t>10/28/2026</a:t>
             </a:fld>
             <a:endParaRPr lang="en-US"/>
           </a:p>
@@ -681,7 +672,7 @@
           <a:p>
             <a:fld id="{06882561-BD16-4A95-ACA1-5204E478F2FE}" type="datetimeFigureOut">
               <a:rPr lang="en-US" smtClean="0"/>
-              <a:t>10/26/2026</a:t>
+              <a:t>10/28/2026</a:t>
             </a:fld>
             <a:endParaRPr lang="en-US"/>
           </a:p>
@@ -879,7 +870,7 @@
           <a:p>
             <a:fld id="{06882561-BD16-4A95-ACA1-5204E478F2FE}" type="datetimeFigureOut">
               <a:rPr lang="en-US" smtClean="0"/>
-              <a:t>10/26/2026</a:t>
+              <a:t>10/28/2026</a:t>
             </a:fld>
             <a:endParaRPr lang="en-US"/>
           </a:p>
@@ -1154,7 +1145,7 @@
           <a:p>
             <a:fld id="{06882561-BD16-4A95-ACA1-5204E478F2FE}" type="datetimeFigureOut">
               <a:rPr lang="en-US" smtClean="0"/>
-              <a:t>10/26/2026</a:t>
+              <a:t>10/28/2026</a:t>
             </a:fld>
             <a:endParaRPr lang="en-US"/>
           </a:p>
@@ -1419,7 +1410,7 @@
           <a:p>
             <a:fld id="{06882561-BD16-4A95-ACA1-5204E478F2FE}" type="datetimeFigureOut">
               <a:rPr lang="en-US" smtClean="0"/>
-              <a:t>10/26/2026</a:t>
+              <a:t>10/28/2026</a:t>
             </a:fld>
             <a:endParaRPr lang="en-US"/>
           </a:p>
@@ -1831,7 +1822,7 @@
           <a:p>
             <a:fld id="{06882561-BD16-4A95-ACA1-5204E478F2FE}" type="datetimeFigureOut">
               <a:rPr lang="en-US" smtClean="0"/>
-              <a:t>10/26/2026</a:t>
+              <a:t>10/28/2026</a:t>
             </a:fld>
             <a:endParaRPr lang="en-US"/>
           </a:p>
@@ -1972,7 +1963,7 @@
           <a:p>
             <a:fld id="{06882561-BD16-4A95-ACA1-5204E478F2FE}" type="datetimeFigureOut">
               <a:rPr lang="en-US" smtClean="0"/>
-              <a:t>10/26/2026</a:t>
+              <a:t>10/28/2026</a:t>
             </a:fld>
             <a:endParaRPr lang="en-US"/>
           </a:p>
@@ -2085,7 +2076,7 @@
           <a:p>
             <a:fld id="{06882561-BD16-4A95-ACA1-5204E478F2FE}" type="datetimeFigureOut">
               <a:rPr lang="en-US" smtClean="0"/>
-              <a:t>10/26/2026</a:t>
+              <a:t>10/28/2026</a:t>
             </a:fld>
             <a:endParaRPr lang="en-US"/>
           </a:p>
@@ -2396,7 +2387,7 @@
           <a:p>
             <a:fld id="{06882561-BD16-4A95-ACA1-5204E478F2FE}" type="datetimeFigureOut">
               <a:rPr lang="en-US" smtClean="0"/>
-              <a:t>10/26/2026</a:t>
+              <a:t>10/28/2026</a:t>
             </a:fld>
             <a:endParaRPr lang="en-US"/>
           </a:p>
@@ -2684,7 +2675,7 @@
           <a:p>
             <a:fld id="{06882561-BD16-4A95-ACA1-5204E478F2FE}" type="datetimeFigureOut">
               <a:rPr lang="en-US" smtClean="0"/>
-              <a:t>10/26/2026</a:t>
+              <a:t>10/28/2026</a:t>
             </a:fld>
             <a:endParaRPr lang="en-US"/>
           </a:p>
@@ -2925,7 +2916,7 @@
           <a:p>
             <a:fld id="{06882561-BD16-4A95-ACA1-5204E478F2FE}" type="datetimeFigureOut">
               <a:rPr lang="en-US" smtClean="0"/>
-              <a:t>10/26/2026</a:t>
+              <a:t>10/28/2026</a:t>
             </a:fld>
             <a:endParaRPr lang="en-US"/>
           </a:p>
@@ -3392,7 +3383,7 @@
                   <a:srgbClr val="1F3864"/>
                 </a:solidFill>
               </a:rPr>
-              <a:t>Significance and P-values</a:t>
+              <a:t>Sample Size and Chance</a:t>
             </a:r>
             <a:endParaRPr lang="en-US" dirty="0">
               <a:solidFill>
@@ -3412,6275 +3403,6 @@
   <p:clrMapOvr>
     <a:masterClrMapping/>
   </p:clrMapOvr>
-</p:sld>
-</file>
-
-<file path=ppt/slides/slide10.xml><?xml version="1.0" encoding="utf-8"?>
-<p:sld xmlns:a="http://schemas.openxmlformats.org/drawingml/2006/main" xmlns:r="http://schemas.openxmlformats.org/officeDocument/2006/relationships" xmlns:p="http://schemas.openxmlformats.org/presentationml/2006/main">
-  <p:cSld>
-    <p:spTree>
-      <p:nvGrpSpPr>
-        <p:cNvPr id="1" name=""/>
-        <p:cNvGrpSpPr/>
-        <p:nvPr/>
-      </p:nvGrpSpPr>
-      <p:grpSpPr>
-        <a:xfrm>
-          <a:off x="0" y="0"/>
-          <a:ext cx="0" cy="0"/>
-          <a:chOff x="0" y="0"/>
-          <a:chExt cx="0" cy="0"/>
-        </a:xfrm>
-      </p:grpSpPr>
-      <p:sp>
-        <p:nvSpPr>
-          <p:cNvPr id="2" name="Title 1">
-            <a:extLst>
-              <a:ext uri="{FF2B5EF4-FFF2-40B4-BE49-F238E27FC236}">
-                <a16:creationId xmlns:a16="http://schemas.microsoft.com/office/drawing/2014/main" id="{D617AB41-6AD1-9EF2-7F95-46A904399681}"/>
-              </a:ext>
-            </a:extLst>
-          </p:cNvPr>
-          <p:cNvSpPr>
-            <a:spLocks noGrp="1"/>
-          </p:cNvSpPr>
-          <p:nvPr>
-            <p:ph type="title"/>
-          </p:nvPr>
-        </p:nvSpPr>
-        <p:spPr/>
-        <p:txBody>
-          <a:bodyPr>
-            <a:noAutofit/>
-          </a:bodyPr>
-          <a:lstStyle/>
-          <a:p>
-            <a:r>
-              <a:rPr lang="en-US">
-                <a:solidFill>
-                  <a:srgbClr val="1F3864"/>
-                </a:solidFill>
-              </a:rPr>
-              <a:t>Writing the hypotheses</a:t>
-            </a:r>
-          </a:p>
-        </p:txBody>
-      </p:sp>
-      <p:sp>
-        <p:nvSpPr>
-          <p:cNvPr id="4" name="Slide Number Placeholder 3">
-            <a:extLst>
-              <a:ext uri="{FF2B5EF4-FFF2-40B4-BE49-F238E27FC236}">
-                <a16:creationId xmlns:a16="http://schemas.microsoft.com/office/drawing/2014/main" id="{97D44AE5-98B5-B840-6B8A-D345C7C2E2F0}"/>
-              </a:ext>
-            </a:extLst>
-          </p:cNvPr>
-          <p:cNvSpPr>
-            <a:spLocks noGrp="1"/>
-          </p:cNvSpPr>
-          <p:nvPr>
-            <p:ph type="sldNum" sz="quarter" idx="12"/>
-          </p:nvPr>
-        </p:nvSpPr>
-        <p:spPr/>
-        <p:txBody>
-          <a:bodyPr/>
-          <a:lstStyle/>
-          <a:p>
-            <a:fld id="{A80A81DD-F10A-4B1C-963A-0ABBB4865886}" type="slidenum">
-              <a:rPr lang="en-US" sz="1600" smtClean="0"/>
-              <a:t>10</a:t>
-            </a:fld>
-            <a:endParaRPr lang="en-US" sz="1600"/>
-          </a:p>
-        </p:txBody>
-      </p:sp>
-      <p:sp>
-        <p:nvSpPr>
-          <p:cNvPr id="5" name="TextBox 4">
-            <a:extLst>
-              <a:ext uri="{FF2B5EF4-FFF2-40B4-BE49-F238E27FC236}">
-                <a16:creationId xmlns:a16="http://schemas.microsoft.com/office/drawing/2014/main" id="{A34AAE17-27CE-D7A3-C663-11BB48ACBF5B}"/>
-              </a:ext>
-            </a:extLst>
-          </p:cNvPr>
-          <p:cNvSpPr txBox="1"/>
-          <p:nvPr/>
-        </p:nvSpPr>
-        <p:spPr>
-          <a:xfrm>
-            <a:off x="762000" y="1879600"/>
-            <a:ext cx="10668000" cy="345440"/>
-          </a:xfrm>
-          <a:prstGeom prst="rect">
-            <a:avLst/>
-          </a:prstGeom>
-          <a:noFill/>
-        </p:spPr>
-        <p:txBody>
-          <a:bodyPr vert="horz" wrap="square" rtlCol="0">
-            <a:spAutoFit/>
-          </a:bodyPr>
-          <a:lstStyle/>
-          <a:p>
-            <a:pPr marL="304800" indent="-304800"/>
-            <a:r>
-              <a:rPr lang="en-US" sz="1600">
-                <a:solidFill>
-                  <a:srgbClr val="000000"/>
-                </a:solidFill>
-              </a:rPr>
-              <a:t>θ  and  θ</a:t>
-            </a:r>
-            <a:r>
-              <a:rPr lang="en-US" sz="1600" baseline="-25000">
-                <a:solidFill>
-                  <a:srgbClr val="000000"/>
-                </a:solidFill>
-              </a:rPr>
-              <a:t>0</a:t>
-            </a:r>
-            <a:r>
-              <a:rPr lang="en-US" sz="1600">
-                <a:solidFill>
-                  <a:srgbClr val="000000"/>
-                </a:solidFill>
-              </a:rPr>
-              <a:t>  (“theta” and “theta-naught”)</a:t>
-            </a:r>
-          </a:p>
-        </p:txBody>
-      </p:sp>
-      <p:sp>
-        <p:nvSpPr>
-          <p:cNvPr id="6" name="TextBox 5">
-            <a:extLst>
-              <a:ext uri="{FF2B5EF4-FFF2-40B4-BE49-F238E27FC236}">
-                <a16:creationId xmlns:a16="http://schemas.microsoft.com/office/drawing/2014/main" id="{E410A0F8-5E1E-9A1D-B64C-50827EE6C9B2}"/>
-              </a:ext>
-            </a:extLst>
-          </p:cNvPr>
-          <p:cNvSpPr txBox="1"/>
-          <p:nvPr/>
-        </p:nvSpPr>
-        <p:spPr>
-          <a:xfrm>
-            <a:off x="1117600" y="2225040"/>
-            <a:ext cx="10312400" cy="338554"/>
-          </a:xfrm>
-          <a:prstGeom prst="rect">
-            <a:avLst/>
-          </a:prstGeom>
-          <a:noFill/>
-        </p:spPr>
-        <p:txBody>
-          <a:bodyPr vert="horz" wrap="square" rtlCol="0">
-            <a:spAutoFit/>
-          </a:bodyPr>
-          <a:lstStyle/>
-          <a:p>
-            <a:r>
-              <a:rPr lang="en-US" sz="1600" b="1">
-                <a:solidFill>
-                  <a:srgbClr val="C00000"/>
-                </a:solidFill>
-              </a:rPr>
-              <a:t>θ is the parameter (p or μ);  θ</a:t>
-            </a:r>
-            <a:r>
-              <a:rPr lang="en-US" sz="1600" b="1" baseline="-25000">
-                <a:solidFill>
-                  <a:srgbClr val="C00000"/>
-                </a:solidFill>
-              </a:rPr>
-              <a:t>0</a:t>
-            </a:r>
-            <a:r>
-              <a:rPr lang="en-US" sz="1600" b="1">
-                <a:solidFill>
-                  <a:srgbClr val="C00000"/>
-                </a:solidFill>
-              </a:rPr>
-              <a:t> is the value H</a:t>
-            </a:r>
-            <a:r>
-              <a:rPr lang="en-US" sz="1600" b="1" baseline="-25000">
-                <a:solidFill>
-                  <a:srgbClr val="C00000"/>
-                </a:solidFill>
-              </a:rPr>
-              <a:t>0</a:t>
-            </a:r>
-            <a:r>
-              <a:rPr lang="en-US" sz="1600" b="1">
-                <a:solidFill>
-                  <a:srgbClr val="C00000"/>
-                </a:solidFill>
-              </a:rPr>
-              <a:t> claims, e.g. p</a:t>
-            </a:r>
-            <a:r>
-              <a:rPr lang="en-US" sz="1600" b="1" baseline="-25000">
-                <a:solidFill>
-                  <a:srgbClr val="C00000"/>
-                </a:solidFill>
-              </a:rPr>
-              <a:t>0</a:t>
-            </a:r>
-            <a:r>
-              <a:rPr lang="en-US" sz="1600" b="1">
-                <a:solidFill>
-                  <a:srgbClr val="C00000"/>
-                </a:solidFill>
-              </a:rPr>
-              <a:t> = 0.5</a:t>
-            </a:r>
-          </a:p>
-        </p:txBody>
-      </p:sp>
-      <p:sp>
-        <p:nvSpPr>
-          <p:cNvPr id="7" name="TextBox 6">
-            <a:extLst>
-              <a:ext uri="{FF2B5EF4-FFF2-40B4-BE49-F238E27FC236}">
-                <a16:creationId xmlns:a16="http://schemas.microsoft.com/office/drawing/2014/main" id="{47D3CD95-D52E-5227-B663-7C0A72677B6E}"/>
-              </a:ext>
-            </a:extLst>
-          </p:cNvPr>
-          <p:cNvSpPr txBox="1"/>
-          <p:nvPr/>
-        </p:nvSpPr>
-        <p:spPr>
-          <a:xfrm>
-            <a:off x="762000" y="2741394"/>
-            <a:ext cx="10668000" cy="345440"/>
-          </a:xfrm>
-          <a:prstGeom prst="rect">
-            <a:avLst/>
-          </a:prstGeom>
-          <a:noFill/>
-        </p:spPr>
-        <p:txBody>
-          <a:bodyPr vert="horz" wrap="square" rtlCol="0">
-            <a:spAutoFit/>
-          </a:bodyPr>
-          <a:lstStyle/>
-          <a:p>
-            <a:pPr marL="304800" indent="-304800"/>
-            <a:r>
-              <a:rPr lang="en-US" sz="1600">
-                <a:solidFill>
-                  <a:srgbClr val="000000"/>
-                </a:solidFill>
-              </a:rPr>
-              <a:t>H</a:t>
-            </a:r>
-            <a:r>
-              <a:rPr lang="en-US" sz="1600" baseline="-25000">
-                <a:solidFill>
-                  <a:srgbClr val="000000"/>
-                </a:solidFill>
-              </a:rPr>
-              <a:t>0</a:t>
-            </a:r>
-            <a:r>
-              <a:rPr lang="en-US" sz="1600">
-                <a:solidFill>
-                  <a:srgbClr val="000000"/>
-                </a:solidFill>
-              </a:rPr>
-              <a:t>: </a:t>
-            </a:r>
-            <a:r>
-              <a:rPr lang="el-GR" sz="1600">
-                <a:solidFill>
-                  <a:srgbClr val="000000"/>
-                </a:solidFill>
-              </a:rPr>
-              <a:t>θ = θ</a:t>
-            </a:r>
-            <a:r>
-              <a:rPr lang="el-GR" sz="1600" baseline="-25000">
-                <a:solidFill>
-                  <a:srgbClr val="000000"/>
-                </a:solidFill>
-              </a:rPr>
-              <a:t>0</a:t>
-            </a:r>
-            <a:endParaRPr lang="en-US" sz="1600" baseline="-25000">
-              <a:solidFill>
-                <a:srgbClr val="000000"/>
-              </a:solidFill>
-            </a:endParaRPr>
-          </a:p>
-        </p:txBody>
-      </p:sp>
-      <p:sp>
-        <p:nvSpPr>
-          <p:cNvPr id="8" name="TextBox 7">
-            <a:extLst>
-              <a:ext uri="{FF2B5EF4-FFF2-40B4-BE49-F238E27FC236}">
-                <a16:creationId xmlns:a16="http://schemas.microsoft.com/office/drawing/2014/main" id="{1CE3E601-601D-C6B1-8265-C079CB8C9269}"/>
-              </a:ext>
-            </a:extLst>
-          </p:cNvPr>
-          <p:cNvSpPr txBox="1"/>
-          <p:nvPr/>
-        </p:nvSpPr>
-        <p:spPr>
-          <a:xfrm>
-            <a:off x="1117600" y="3086834"/>
-            <a:ext cx="10312400" cy="338554"/>
-          </a:xfrm>
-          <a:prstGeom prst="rect">
-            <a:avLst/>
-          </a:prstGeom>
-          <a:noFill/>
-        </p:spPr>
-        <p:txBody>
-          <a:bodyPr vert="horz" wrap="square" rtlCol="0">
-            <a:spAutoFit/>
-          </a:bodyPr>
-          <a:lstStyle/>
-          <a:p>
-            <a:r>
-              <a:rPr lang="en-US" sz="1600" b="1">
-                <a:solidFill>
-                  <a:srgbClr val="C00000"/>
-                </a:solidFill>
-              </a:rPr>
-              <a:t>H</a:t>
-            </a:r>
-            <a:r>
-              <a:rPr lang="en-US" sz="1600" b="1" baseline="-25000">
-                <a:solidFill>
-                  <a:srgbClr val="C00000"/>
-                </a:solidFill>
-              </a:rPr>
-              <a:t>0</a:t>
-            </a:r>
-            <a:r>
-              <a:rPr lang="en-US" sz="1600" b="1">
-                <a:solidFill>
-                  <a:srgbClr val="C00000"/>
-                </a:solidFill>
-              </a:rPr>
-              <a:t> always has the = sign, and is about a parameter, never p̂ or x̄</a:t>
-            </a:r>
-          </a:p>
-        </p:txBody>
-      </p:sp>
-      <p:sp>
-        <p:nvSpPr>
-          <p:cNvPr id="9" name="TextBox 8">
-            <a:extLst>
-              <a:ext uri="{FF2B5EF4-FFF2-40B4-BE49-F238E27FC236}">
-                <a16:creationId xmlns:a16="http://schemas.microsoft.com/office/drawing/2014/main" id="{FB002BF4-8037-2F73-E27A-7A453477E389}"/>
-              </a:ext>
-            </a:extLst>
-          </p:cNvPr>
-          <p:cNvSpPr txBox="1"/>
-          <p:nvPr/>
-        </p:nvSpPr>
-        <p:spPr>
-          <a:xfrm>
-            <a:off x="762000" y="3603188"/>
-            <a:ext cx="10668000" cy="345440"/>
-          </a:xfrm>
-          <a:prstGeom prst="rect">
-            <a:avLst/>
-          </a:prstGeom>
-          <a:noFill/>
-        </p:spPr>
-        <p:txBody>
-          <a:bodyPr vert="horz" wrap="square" rtlCol="0">
-            <a:spAutoFit/>
-          </a:bodyPr>
-          <a:lstStyle/>
-          <a:p>
-            <a:pPr marL="304800" indent="-304800"/>
-            <a:r>
-              <a:rPr lang="en-US" sz="1600">
-                <a:solidFill>
-                  <a:srgbClr val="000000"/>
-                </a:solidFill>
-              </a:rPr>
-              <a:t>H</a:t>
-            </a:r>
-            <a:r>
-              <a:rPr lang="en-US" sz="1600" baseline="-25000">
-                <a:solidFill>
-                  <a:srgbClr val="000000"/>
-                </a:solidFill>
-              </a:rPr>
-              <a:t>A</a:t>
-            </a:r>
-            <a:r>
-              <a:rPr lang="en-US" sz="1600">
-                <a:solidFill>
-                  <a:srgbClr val="000000"/>
-                </a:solidFill>
-              </a:rPr>
-              <a:t>: </a:t>
-            </a:r>
-            <a:r>
-              <a:rPr lang="el-GR" sz="1600">
-                <a:solidFill>
-                  <a:srgbClr val="000000"/>
-                </a:solidFill>
-              </a:rPr>
-              <a:t>θ &gt; θ</a:t>
-            </a:r>
-            <a:r>
-              <a:rPr lang="el-GR" sz="1600" baseline="-25000">
-                <a:solidFill>
-                  <a:srgbClr val="000000"/>
-                </a:solidFill>
-              </a:rPr>
-              <a:t>0</a:t>
-            </a:r>
-            <a:r>
-              <a:rPr lang="el-GR" sz="1600">
-                <a:solidFill>
-                  <a:srgbClr val="000000"/>
-                </a:solidFill>
-              </a:rPr>
-              <a:t>,  θ &lt; θ</a:t>
-            </a:r>
-            <a:r>
-              <a:rPr lang="el-GR" sz="1600" baseline="-25000">
-                <a:solidFill>
-                  <a:srgbClr val="000000"/>
-                </a:solidFill>
-              </a:rPr>
-              <a:t>0</a:t>
-            </a:r>
-            <a:r>
-              <a:rPr lang="el-GR" sz="1600">
-                <a:solidFill>
-                  <a:srgbClr val="000000"/>
-                </a:solidFill>
-              </a:rPr>
-              <a:t>  </a:t>
-            </a:r>
-            <a:r>
-              <a:rPr lang="en-US" sz="1600">
-                <a:solidFill>
-                  <a:srgbClr val="000000"/>
-                </a:solidFill>
-              </a:rPr>
-              <a:t>or  </a:t>
-            </a:r>
-            <a:r>
-              <a:rPr lang="el-GR" sz="1600">
-                <a:solidFill>
-                  <a:srgbClr val="000000"/>
-                </a:solidFill>
-              </a:rPr>
-              <a:t>θ ≠ θ</a:t>
-            </a:r>
-            <a:r>
-              <a:rPr lang="el-GR" sz="1600" baseline="-25000">
-                <a:solidFill>
-                  <a:srgbClr val="000000"/>
-                </a:solidFill>
-              </a:rPr>
-              <a:t>0</a:t>
-            </a:r>
-            <a:endParaRPr lang="en-US" sz="1600" baseline="-25000">
-              <a:solidFill>
-                <a:srgbClr val="000000"/>
-              </a:solidFill>
-            </a:endParaRPr>
-          </a:p>
-        </p:txBody>
-      </p:sp>
-      <p:sp>
-        <p:nvSpPr>
-          <p:cNvPr id="10" name="TextBox 9">
-            <a:extLst>
-              <a:ext uri="{FF2B5EF4-FFF2-40B4-BE49-F238E27FC236}">
-                <a16:creationId xmlns:a16="http://schemas.microsoft.com/office/drawing/2014/main" id="{10F3B3E3-D27C-E008-C93E-ED70BD2A4754}"/>
-              </a:ext>
-            </a:extLst>
-          </p:cNvPr>
-          <p:cNvSpPr txBox="1"/>
-          <p:nvPr/>
-        </p:nvSpPr>
-        <p:spPr>
-          <a:xfrm>
-            <a:off x="1117600" y="3948628"/>
-            <a:ext cx="10312400" cy="338554"/>
-          </a:xfrm>
-          <a:prstGeom prst="rect">
-            <a:avLst/>
-          </a:prstGeom>
-          <a:noFill/>
-        </p:spPr>
-        <p:txBody>
-          <a:bodyPr vert="horz" wrap="square" rtlCol="0">
-            <a:spAutoFit/>
-          </a:bodyPr>
-          <a:lstStyle/>
-          <a:p>
-            <a:r>
-              <a:rPr lang="en-US" sz="1600" b="1">
-                <a:solidFill>
-                  <a:srgbClr val="C00000"/>
-                </a:solidFill>
-              </a:rPr>
-              <a:t>upper-tailed, lower-tailed (one-sided)  or  two-sided;  set before seeing data</a:t>
-            </a:r>
-            <a:endParaRPr lang="en-US" sz="1600" b="1" dirty="0">
-              <a:solidFill>
-                <a:srgbClr val="C00000"/>
-              </a:solidFill>
-            </a:endParaRPr>
-          </a:p>
-        </p:txBody>
-      </p:sp>
-      <p:sp>
-        <p:nvSpPr>
-          <p:cNvPr id="3" name="Title rule">
-            <a:extLst>
-              <a:ext uri="{FF2B5EF4-FFF2-40B4-BE49-F238E27FC236}">
-                <a16:creationId xmlns:a16="http://schemas.microsoft.com/office/drawing/2014/main" id="{B469CAAB-2B69-6863-7C28-0C5959E5734B}"/>
-              </a:ext>
-            </a:extLst>
-          </p:cNvPr>
-          <p:cNvSpPr/>
-          <p:nvPr/>
-        </p:nvSpPr>
-        <p:spPr>
-          <a:xfrm>
-            <a:off x="838200" y="1600200"/>
-            <a:ext cx="10515600" cy="38100"/>
-          </a:xfrm>
-          <a:prstGeom prst="rect">
-            <a:avLst/>
-          </a:prstGeom>
-          <a:solidFill>
-            <a:srgbClr val="4472C4"/>
-          </a:solidFill>
-          <a:ln w="12700" cap="flat" cmpd="sng" algn="ctr">
-            <a:noFill/>
-            <a:prstDash val="solid"/>
-            <a:miter lim="800000"/>
-          </a:ln>
-          <a:effectLst/>
-          <a:extLst>
-            <a:ext uri="{91240B29-F687-4F45-9708-019B960494DF}">
-              <a14:hiddenLine xmlns:a14="http://schemas.microsoft.com/office/drawing/2010/main" w="12700" cap="flat" cmpd="sng" algn="ctr">
-                <a:solidFill>
-                  <a:schemeClr val="accent1">
-                    <a:shade val="15000"/>
-                  </a:schemeClr>
-                </a:solidFill>
-                <a:prstDash val="solid"/>
-                <a:miter lim="800000"/>
-              </a14:hiddenLine>
-            </a:ext>
-          </a:extLst>
-        </p:spPr>
-        <p:style>
-          <a:lnRef idx="2">
-            <a:schemeClr val="accent1">
-              <a:shade val="15000"/>
-            </a:schemeClr>
-          </a:lnRef>
-          <a:fillRef idx="1">
-            <a:schemeClr val="accent1"/>
-          </a:fillRef>
-          <a:effectRef idx="0">
-            <a:schemeClr val="accent1"/>
-          </a:effectRef>
-          <a:fontRef idx="minor">
-            <a:schemeClr val="lt1"/>
-          </a:fontRef>
-        </p:style>
-        <p:txBody>
-          <a:bodyPr rtlCol="0" anchor="ctr"/>
-          <a:lstStyle/>
-          <a:p>
-            <a:pPr algn="ctr"/>
-            <a:endParaRPr lang="en-US"/>
-          </a:p>
-        </p:txBody>
-      </p:sp>
-    </p:spTree>
-    <p:extLst>
-      <p:ext uri="{BB962C8B-B14F-4D97-AF65-F5344CB8AC3E}">
-        <p14:creationId xmlns:p14="http://schemas.microsoft.com/office/powerpoint/2010/main" val="2408036258"/>
-      </p:ext>
-    </p:extLst>
-  </p:cSld>
-  <p:clrMapOvr>
-    <a:masterClrMapping/>
-  </p:clrMapOvr>
-  <p:timing>
-    <p:tnLst>
-      <p:par>
-        <p:cTn id="1" dur="indefinite" restart="never" nodeType="tmRoot">
-          <p:childTnLst>
-            <p:seq concurrent="1" nextAc="seek">
-              <p:cTn id="2" dur="indefinite" nodeType="mainSeq">
-                <p:childTnLst>
-                  <p:par>
-                    <p:cTn id="3" fill="hold">
-                      <p:stCondLst>
-                        <p:cond delay="indefinite"/>
-                      </p:stCondLst>
-                      <p:childTnLst>
-                        <p:par>
-                          <p:cTn id="4" fill="hold">
-                            <p:stCondLst>
-                              <p:cond delay="0"/>
-                            </p:stCondLst>
-                            <p:childTnLst>
-                              <p:par>
-                                <p:cTn id="5" presetID="34" presetClass="entr" presetSubtype="0" fill="hold" grpId="0" nodeType="clickEffect">
-                                  <p:stCondLst>
-                                    <p:cond delay="0"/>
-                                  </p:stCondLst>
-                                  <p:childTnLst>
-                                    <p:set>
-                                      <p:cBhvr>
-                                        <p:cTn id="6" dur="1" fill="hold">
-                                          <p:stCondLst>
-                                            <p:cond delay="0"/>
-                                          </p:stCondLst>
-                                        </p:cTn>
-                                        <p:tgtEl>
-                                          <p:spTgt spid="6"/>
-                                        </p:tgtEl>
-                                        <p:attrNameLst>
-                                          <p:attrName>style.visibility</p:attrName>
-                                        </p:attrNameLst>
-                                      </p:cBhvr>
-                                      <p:to>
-                                        <p:strVal val="visible"/>
-                                      </p:to>
-                                    </p:set>
-                                    <p:anim from="(-#ppt_w/2)" to="(#ppt_x)" calcmode="lin" valueType="num">
-                                      <p:cBhvr>
-                                        <p:cTn id="7" dur="600" fill="hold">
-                                          <p:stCondLst>
-                                            <p:cond delay="0"/>
-                                          </p:stCondLst>
-                                        </p:cTn>
-                                        <p:tgtEl>
-                                          <p:spTgt spid="6"/>
-                                        </p:tgtEl>
-                                        <p:attrNameLst>
-                                          <p:attrName>ppt_x</p:attrName>
-                                        </p:attrNameLst>
-                                      </p:cBhvr>
-                                    </p:anim>
-                                    <p:anim from="0" to="-1.0" calcmode="lin" valueType="num">
-                                      <p:cBhvr>
-                                        <p:cTn id="8" dur="200" decel="50000" autoRev="1" fill="hold">
-                                          <p:stCondLst>
-                                            <p:cond delay="600"/>
-                                          </p:stCondLst>
-                                        </p:cTn>
-                                        <p:tgtEl>
-                                          <p:spTgt spid="6"/>
-                                        </p:tgtEl>
-                                        <p:attrNameLst>
-                                          <p:attrName>xshear</p:attrName>
-                                        </p:attrNameLst>
-                                      </p:cBhvr>
-                                    </p:anim>
-                                    <p:animScale>
-                                      <p:cBhvr>
-                                        <p:cTn id="9" dur="200" decel="100000" autoRev="1" fill="hold">
-                                          <p:stCondLst>
-                                            <p:cond delay="600"/>
-                                          </p:stCondLst>
-                                        </p:cTn>
-                                        <p:tgtEl>
-                                          <p:spTgt spid="6"/>
-                                        </p:tgtEl>
-                                      </p:cBhvr>
-                                      <p:from x="100000" y="100000"/>
-                                      <p:to x="80000" y="100000"/>
-                                    </p:animScale>
-                                    <p:anim by="(#ppt_h/3+#ppt_w*0.1)" calcmode="lin" valueType="num">
-                                      <p:cBhvr additive="sum">
-                                        <p:cTn id="10" dur="200" decel="100000" autoRev="1" fill="hold">
-                                          <p:stCondLst>
-                                            <p:cond delay="600"/>
-                                          </p:stCondLst>
-                                        </p:cTn>
-                                        <p:tgtEl>
-                                          <p:spTgt spid="6"/>
-                                        </p:tgtEl>
-                                        <p:attrNameLst>
-                                          <p:attrName>ppt_x</p:attrName>
-                                        </p:attrNameLst>
-                                      </p:cBhvr>
-                                    </p:anim>
-                                  </p:childTnLst>
-                                </p:cTn>
-                              </p:par>
-                            </p:childTnLst>
-                          </p:cTn>
-                        </p:par>
-                      </p:childTnLst>
-                    </p:cTn>
-                  </p:par>
-                  <p:par>
-                    <p:cTn id="11" fill="hold">
-                      <p:stCondLst>
-                        <p:cond delay="indefinite"/>
-                      </p:stCondLst>
-                      <p:childTnLst>
-                        <p:par>
-                          <p:cTn id="12" fill="hold">
-                            <p:stCondLst>
-                              <p:cond delay="0"/>
-                            </p:stCondLst>
-                            <p:childTnLst>
-                              <p:par>
-                                <p:cTn id="13" presetID="34" presetClass="entr" presetSubtype="0" fill="hold" grpId="0" nodeType="clickEffect">
-                                  <p:stCondLst>
-                                    <p:cond delay="0"/>
-                                  </p:stCondLst>
-                                  <p:childTnLst>
-                                    <p:set>
-                                      <p:cBhvr>
-                                        <p:cTn id="14" dur="1" fill="hold">
-                                          <p:stCondLst>
-                                            <p:cond delay="0"/>
-                                          </p:stCondLst>
-                                        </p:cTn>
-                                        <p:tgtEl>
-                                          <p:spTgt spid="8"/>
-                                        </p:tgtEl>
-                                        <p:attrNameLst>
-                                          <p:attrName>style.visibility</p:attrName>
-                                        </p:attrNameLst>
-                                      </p:cBhvr>
-                                      <p:to>
-                                        <p:strVal val="visible"/>
-                                      </p:to>
-                                    </p:set>
-                                    <p:anim from="(-#ppt_w/2)" to="(#ppt_x)" calcmode="lin" valueType="num">
-                                      <p:cBhvr>
-                                        <p:cTn id="15" dur="600" fill="hold">
-                                          <p:stCondLst>
-                                            <p:cond delay="0"/>
-                                          </p:stCondLst>
-                                        </p:cTn>
-                                        <p:tgtEl>
-                                          <p:spTgt spid="8"/>
-                                        </p:tgtEl>
-                                        <p:attrNameLst>
-                                          <p:attrName>ppt_x</p:attrName>
-                                        </p:attrNameLst>
-                                      </p:cBhvr>
-                                    </p:anim>
-                                    <p:anim from="0" to="-1.0" calcmode="lin" valueType="num">
-                                      <p:cBhvr>
-                                        <p:cTn id="16" dur="200" decel="50000" autoRev="1" fill="hold">
-                                          <p:stCondLst>
-                                            <p:cond delay="600"/>
-                                          </p:stCondLst>
-                                        </p:cTn>
-                                        <p:tgtEl>
-                                          <p:spTgt spid="8"/>
-                                        </p:tgtEl>
-                                        <p:attrNameLst>
-                                          <p:attrName>xshear</p:attrName>
-                                        </p:attrNameLst>
-                                      </p:cBhvr>
-                                    </p:anim>
-                                    <p:animScale>
-                                      <p:cBhvr>
-                                        <p:cTn id="17" dur="200" decel="100000" autoRev="1" fill="hold">
-                                          <p:stCondLst>
-                                            <p:cond delay="600"/>
-                                          </p:stCondLst>
-                                        </p:cTn>
-                                        <p:tgtEl>
-                                          <p:spTgt spid="8"/>
-                                        </p:tgtEl>
-                                      </p:cBhvr>
-                                      <p:from x="100000" y="100000"/>
-                                      <p:to x="80000" y="100000"/>
-                                    </p:animScale>
-                                    <p:anim by="(#ppt_h/3+#ppt_w*0.1)" calcmode="lin" valueType="num">
-                                      <p:cBhvr additive="sum">
-                                        <p:cTn id="18" dur="200" decel="100000" autoRev="1" fill="hold">
-                                          <p:stCondLst>
-                                            <p:cond delay="600"/>
-                                          </p:stCondLst>
-                                        </p:cTn>
-                                        <p:tgtEl>
-                                          <p:spTgt spid="8"/>
-                                        </p:tgtEl>
-                                        <p:attrNameLst>
-                                          <p:attrName>ppt_x</p:attrName>
-                                        </p:attrNameLst>
-                                      </p:cBhvr>
-                                    </p:anim>
-                                  </p:childTnLst>
-                                </p:cTn>
-                              </p:par>
-                            </p:childTnLst>
-                          </p:cTn>
-                        </p:par>
-                      </p:childTnLst>
-                    </p:cTn>
-                  </p:par>
-                  <p:par>
-                    <p:cTn id="19" fill="hold">
-                      <p:stCondLst>
-                        <p:cond delay="indefinite"/>
-                      </p:stCondLst>
-                      <p:childTnLst>
-                        <p:par>
-                          <p:cTn id="20" fill="hold">
-                            <p:stCondLst>
-                              <p:cond delay="0"/>
-                            </p:stCondLst>
-                            <p:childTnLst>
-                              <p:par>
-                                <p:cTn id="21" presetID="34" presetClass="entr" presetSubtype="0" fill="hold" grpId="0" nodeType="clickEffect">
-                                  <p:stCondLst>
-                                    <p:cond delay="0"/>
-                                  </p:stCondLst>
-                                  <p:childTnLst>
-                                    <p:set>
-                                      <p:cBhvr>
-                                        <p:cTn id="22" dur="1" fill="hold">
-                                          <p:stCondLst>
-                                            <p:cond delay="0"/>
-                                          </p:stCondLst>
-                                        </p:cTn>
-                                        <p:tgtEl>
-                                          <p:spTgt spid="10"/>
-                                        </p:tgtEl>
-                                        <p:attrNameLst>
-                                          <p:attrName>style.visibility</p:attrName>
-                                        </p:attrNameLst>
-                                      </p:cBhvr>
-                                      <p:to>
-                                        <p:strVal val="visible"/>
-                                      </p:to>
-                                    </p:set>
-                                    <p:anim from="(-#ppt_w/2)" to="(#ppt_x)" calcmode="lin" valueType="num">
-                                      <p:cBhvr>
-                                        <p:cTn id="23" dur="600" fill="hold">
-                                          <p:stCondLst>
-                                            <p:cond delay="0"/>
-                                          </p:stCondLst>
-                                        </p:cTn>
-                                        <p:tgtEl>
-                                          <p:spTgt spid="10"/>
-                                        </p:tgtEl>
-                                        <p:attrNameLst>
-                                          <p:attrName>ppt_x</p:attrName>
-                                        </p:attrNameLst>
-                                      </p:cBhvr>
-                                    </p:anim>
-                                    <p:anim from="0" to="-1.0" calcmode="lin" valueType="num">
-                                      <p:cBhvr>
-                                        <p:cTn id="24" dur="200" decel="50000" autoRev="1" fill="hold">
-                                          <p:stCondLst>
-                                            <p:cond delay="600"/>
-                                          </p:stCondLst>
-                                        </p:cTn>
-                                        <p:tgtEl>
-                                          <p:spTgt spid="10"/>
-                                        </p:tgtEl>
-                                        <p:attrNameLst>
-                                          <p:attrName>xshear</p:attrName>
-                                        </p:attrNameLst>
-                                      </p:cBhvr>
-                                    </p:anim>
-                                    <p:animScale>
-                                      <p:cBhvr>
-                                        <p:cTn id="25" dur="200" decel="100000" autoRev="1" fill="hold">
-                                          <p:stCondLst>
-                                            <p:cond delay="600"/>
-                                          </p:stCondLst>
-                                        </p:cTn>
-                                        <p:tgtEl>
-                                          <p:spTgt spid="10"/>
-                                        </p:tgtEl>
-                                      </p:cBhvr>
-                                      <p:from x="100000" y="100000"/>
-                                      <p:to x="80000" y="100000"/>
-                                    </p:animScale>
-                                    <p:anim by="(#ppt_h/3+#ppt_w*0.1)" calcmode="lin" valueType="num">
-                                      <p:cBhvr additive="sum">
-                                        <p:cTn id="26" dur="200" decel="100000" autoRev="1" fill="hold">
-                                          <p:stCondLst>
-                                            <p:cond delay="600"/>
-                                          </p:stCondLst>
-                                        </p:cTn>
-                                        <p:tgtEl>
-                                          <p:spTgt spid="10"/>
-                                        </p:tgtEl>
-                                        <p:attrNameLst>
-                                          <p:attrName>ppt_x</p:attrName>
-                                        </p:attrNameLst>
-                                      </p:cBhvr>
-                                    </p:anim>
-                                  </p:childTnLst>
-                                </p:cTn>
-                              </p:par>
-                            </p:childTnLst>
-                          </p:cTn>
-                        </p:par>
-                      </p:childTnLst>
-                    </p:cTn>
-                  </p:par>
-                </p:childTnLst>
-              </p:cTn>
-              <p:prevCondLst>
-                <p:cond evt="onPrev" delay="0">
-                  <p:tgtEl>
-                    <p:sldTgt/>
-                  </p:tgtEl>
-                </p:cond>
-              </p:prevCondLst>
-              <p:nextCondLst>
-                <p:cond evt="onNext" delay="0">
-                  <p:tgtEl>
-                    <p:sldTgt/>
-                  </p:tgtEl>
-                </p:cond>
-              </p:nextCondLst>
-            </p:seq>
-          </p:childTnLst>
-        </p:cTn>
-      </p:par>
-    </p:tnLst>
-    <p:bldLst>
-      <p:bldP spid="6" grpId="0"/>
-      <p:bldP spid="8" grpId="0"/>
-      <p:bldP spid="10" grpId="0"/>
-    </p:bldLst>
-  </p:timing>
-</p:sld>
-</file>
-
-<file path=ppt/slides/slide11.xml><?xml version="1.0" encoding="utf-8"?>
-<p:sld xmlns:a="http://schemas.openxmlformats.org/drawingml/2006/main" xmlns:r="http://schemas.openxmlformats.org/officeDocument/2006/relationships" xmlns:p="http://schemas.openxmlformats.org/presentationml/2006/main">
-  <p:cSld>
-    <p:spTree>
-      <p:nvGrpSpPr>
-        <p:cNvPr id="1" name=""/>
-        <p:cNvGrpSpPr/>
-        <p:nvPr/>
-      </p:nvGrpSpPr>
-      <p:grpSpPr>
-        <a:xfrm>
-          <a:off x="0" y="0"/>
-          <a:ext cx="0" cy="0"/>
-          <a:chOff x="0" y="0"/>
-          <a:chExt cx="0" cy="0"/>
-        </a:xfrm>
-      </p:grpSpPr>
-      <p:sp>
-        <p:nvSpPr>
-          <p:cNvPr id="2" name="Title 1">
-            <a:extLst>
-              <a:ext uri="{FF2B5EF4-FFF2-40B4-BE49-F238E27FC236}">
-                <a16:creationId xmlns:a16="http://schemas.microsoft.com/office/drawing/2014/main" id="{C08D30B1-1864-30EF-7EAB-9BEE656C0012}"/>
-              </a:ext>
-            </a:extLst>
-          </p:cNvPr>
-          <p:cNvSpPr>
-            <a:spLocks noGrp="1"/>
-          </p:cNvSpPr>
-          <p:nvPr>
-            <p:ph type="title"/>
-          </p:nvPr>
-        </p:nvSpPr>
-        <p:spPr/>
-        <p:txBody>
-          <a:bodyPr>
-            <a:noAutofit/>
-          </a:bodyPr>
-          <a:lstStyle/>
-          <a:p>
-            <a:r>
-              <a:rPr lang="en-US">
-                <a:solidFill>
-                  <a:srgbClr val="1F3864"/>
-                </a:solidFill>
-              </a:rPr>
-              <a:t>Example: stating hypotheses</a:t>
-            </a:r>
-          </a:p>
-        </p:txBody>
-      </p:sp>
-      <p:sp>
-        <p:nvSpPr>
-          <p:cNvPr id="4" name="Slide Number Placeholder 3">
-            <a:extLst>
-              <a:ext uri="{FF2B5EF4-FFF2-40B4-BE49-F238E27FC236}">
-                <a16:creationId xmlns:a16="http://schemas.microsoft.com/office/drawing/2014/main" id="{3F875068-D051-44AE-498E-1BEBEDE3A7C8}"/>
-              </a:ext>
-            </a:extLst>
-          </p:cNvPr>
-          <p:cNvSpPr>
-            <a:spLocks noGrp="1"/>
-          </p:cNvSpPr>
-          <p:nvPr>
-            <p:ph type="sldNum" sz="quarter" idx="12"/>
-          </p:nvPr>
-        </p:nvSpPr>
-        <p:spPr/>
-        <p:txBody>
-          <a:bodyPr/>
-          <a:lstStyle/>
-          <a:p>
-            <a:fld id="{A80A81DD-F10A-4B1C-963A-0ABBB4865886}" type="slidenum">
-              <a:rPr lang="en-US" sz="1600" smtClean="0"/>
-              <a:t>11</a:t>
-            </a:fld>
-            <a:endParaRPr lang="en-US" sz="1600"/>
-          </a:p>
-        </p:txBody>
-      </p:sp>
-      <p:sp>
-        <p:nvSpPr>
-          <p:cNvPr id="3" name="Title rule">
-            <a:extLst>
-              <a:ext uri="{FF2B5EF4-FFF2-40B4-BE49-F238E27FC236}">
-                <a16:creationId xmlns:a16="http://schemas.microsoft.com/office/drawing/2014/main" id="{30656AA8-9645-F028-C769-A313710853CC}"/>
-              </a:ext>
-            </a:extLst>
-          </p:cNvPr>
-          <p:cNvSpPr/>
-          <p:nvPr/>
-        </p:nvSpPr>
-        <p:spPr>
-          <a:xfrm>
-            <a:off x="838200" y="1600200"/>
-            <a:ext cx="10515600" cy="38100"/>
-          </a:xfrm>
-          <a:prstGeom prst="rect">
-            <a:avLst/>
-          </a:prstGeom>
-          <a:solidFill>
-            <a:srgbClr val="4472C4"/>
-          </a:solidFill>
-          <a:ln w="12700" cap="flat" cmpd="sng" algn="ctr">
-            <a:noFill/>
-            <a:prstDash val="solid"/>
-            <a:miter lim="800000"/>
-          </a:ln>
-          <a:effectLst/>
-          <a:extLst>
-            <a:ext uri="{91240B29-F687-4F45-9708-019B960494DF}">
-              <a14:hiddenLine xmlns:a14="http://schemas.microsoft.com/office/drawing/2010/main" w="12700" cap="flat" cmpd="sng" algn="ctr">
-                <a:solidFill>
-                  <a:schemeClr val="accent1">
-                    <a:shade val="15000"/>
-                  </a:schemeClr>
-                </a:solidFill>
-                <a:prstDash val="solid"/>
-                <a:miter lim="800000"/>
-              </a14:hiddenLine>
-            </a:ext>
-          </a:extLst>
-        </p:spPr>
-        <p:style>
-          <a:lnRef idx="2">
-            <a:schemeClr val="accent1">
-              <a:shade val="15000"/>
-            </a:schemeClr>
-          </a:lnRef>
-          <a:fillRef idx="1">
-            <a:schemeClr val="accent1"/>
-          </a:fillRef>
-          <a:effectRef idx="0">
-            <a:schemeClr val="accent1"/>
-          </a:effectRef>
-          <a:fontRef idx="minor">
-            <a:schemeClr val="lt1"/>
-          </a:fontRef>
-        </p:style>
-        <p:txBody>
-          <a:bodyPr rtlCol="0" anchor="ctr"/>
-          <a:lstStyle/>
-          <a:p>
-            <a:pPr algn="ctr"/>
-            <a:endParaRPr lang="en-US"/>
-          </a:p>
-        </p:txBody>
-      </p:sp>
-      <p:sp>
-        <p:nvSpPr>
-          <p:cNvPr id="8" name="Context">
-            <a:extLst>
-              <a:ext uri="{FF2B5EF4-FFF2-40B4-BE49-F238E27FC236}">
-                <a16:creationId xmlns:a16="http://schemas.microsoft.com/office/drawing/2014/main" id="{71E3EA8C-31B4-DAD4-BC4A-65D72E59AD46}"/>
-              </a:ext>
-            </a:extLst>
-          </p:cNvPr>
-          <p:cNvSpPr txBox="1"/>
-          <p:nvPr/>
-        </p:nvSpPr>
-        <p:spPr>
-          <a:xfrm>
-            <a:off x="762000" y="1879600"/>
-            <a:ext cx="10668000" cy="381000"/>
-          </a:xfrm>
-          <a:prstGeom prst="rect">
-            <a:avLst/>
-          </a:prstGeom>
-          <a:noFill/>
-        </p:spPr>
-        <p:txBody>
-          <a:bodyPr vert="horz" wrap="square" rtlCol="0">
-            <a:spAutoFit/>
-          </a:bodyPr>
-          <a:lstStyle/>
-          <a:p>
-            <a:pPr>
-              <a:spcAft>
-                <a:spcPts val="200"/>
-              </a:spcAft>
-            </a:pPr>
-            <a:r>
-              <a:rPr lang="en-US">
-                <a:solidFill>
-                  <a:srgbClr val="000000"/>
-                </a:solidFill>
-                <a:latin typeface="Calibri" panose="020F0502020204030204" pitchFamily="34" charset="0"/>
-              </a:rPr>
-              <a:t>For each question, write H</a:t>
-            </a:r>
-            <a:r>
-              <a:rPr lang="en-US" baseline="-25000">
-                <a:solidFill>
-                  <a:srgbClr val="000000"/>
-                </a:solidFill>
-                <a:latin typeface="Calibri" panose="020F0502020204030204" pitchFamily="34" charset="0"/>
-              </a:rPr>
-              <a:t>A</a:t>
-            </a:r>
-            <a:r>
-              <a:rPr lang="en-US">
-                <a:solidFill>
-                  <a:srgbClr val="000000"/>
-                </a:solidFill>
-                <a:latin typeface="Calibri" panose="020F0502020204030204" pitchFamily="34" charset="0"/>
-              </a:rPr>
-              <a:t> first (the suspicion), then H</a:t>
-            </a:r>
-            <a:r>
-              <a:rPr lang="en-US" baseline="-25000">
-                <a:solidFill>
-                  <a:srgbClr val="000000"/>
-                </a:solidFill>
-                <a:latin typeface="Calibri" panose="020F0502020204030204" pitchFamily="34" charset="0"/>
-              </a:rPr>
-              <a:t>0</a:t>
-            </a:r>
-            <a:r>
-              <a:rPr lang="en-US">
-                <a:solidFill>
-                  <a:srgbClr val="000000"/>
-                </a:solidFill>
-                <a:latin typeface="Calibri" panose="020F0502020204030204" pitchFamily="34" charset="0"/>
-              </a:rPr>
-              <a:t> (no effect).  Give θ</a:t>
-            </a:r>
-            <a:r>
-              <a:rPr lang="en-US" baseline="-25000">
-                <a:solidFill>
-                  <a:srgbClr val="000000"/>
-                </a:solidFill>
-                <a:latin typeface="Calibri" panose="020F0502020204030204" pitchFamily="34" charset="0"/>
-              </a:rPr>
-              <a:t>0</a:t>
-            </a:r>
-            <a:r>
-              <a:rPr lang="en-US">
-                <a:solidFill>
-                  <a:srgbClr val="000000"/>
-                </a:solidFill>
-                <a:latin typeface="Calibri" panose="020F0502020204030204" pitchFamily="34" charset="0"/>
-              </a:rPr>
-              <a:t> and say which tail.</a:t>
-            </a:r>
-          </a:p>
-        </p:txBody>
-      </p:sp>
-      <p:sp>
-        <p:nvSpPr>
-          <p:cNvPr id="9" name="Numbers">
-            <a:extLst>
-              <a:ext uri="{FF2B5EF4-FFF2-40B4-BE49-F238E27FC236}">
-                <a16:creationId xmlns:a16="http://schemas.microsoft.com/office/drawing/2014/main" id="{C419F151-05B2-3E4B-BAE8-BB1F06D9D1FD}"/>
-              </a:ext>
-            </a:extLst>
-          </p:cNvPr>
-          <p:cNvSpPr txBox="1"/>
-          <p:nvPr/>
-        </p:nvSpPr>
-        <p:spPr>
-          <a:xfrm>
-            <a:off x="762000" y="2286000"/>
-            <a:ext cx="10668000" cy="400110"/>
-          </a:xfrm>
-          <a:prstGeom prst="rect">
-            <a:avLst/>
-          </a:prstGeom>
-          <a:noFill/>
-        </p:spPr>
-        <p:txBody>
-          <a:bodyPr vert="horz" wrap="square" rtlCol="0">
-            <a:spAutoFit/>
-          </a:bodyPr>
-          <a:lstStyle/>
-          <a:p>
-            <a:pPr>
-              <a:spcAft>
-                <a:spcPts val="200"/>
-              </a:spcAft>
-            </a:pPr>
-            <a:r>
-              <a:rPr lang="pt-BR" sz="2000" b="1">
-                <a:solidFill>
-                  <a:srgbClr val="000000"/>
-                </a:solidFill>
-                <a:latin typeface="Calibri" panose="020F0502020204030204" pitchFamily="34" charset="0"/>
-              </a:rPr>
-              <a:t>p = a population proportion;      </a:t>
-            </a:r>
-            <a:r>
-              <a:rPr lang="el-GR" sz="2000" b="1">
-                <a:solidFill>
-                  <a:srgbClr val="000000"/>
-                </a:solidFill>
-                <a:latin typeface="Calibri" panose="020F0502020204030204" pitchFamily="34" charset="0"/>
-              </a:rPr>
-              <a:t>μ = </a:t>
-            </a:r>
-            <a:r>
-              <a:rPr lang="pt-BR" sz="2000" b="1">
-                <a:solidFill>
-                  <a:srgbClr val="000000"/>
-                </a:solidFill>
-                <a:latin typeface="Calibri" panose="020F0502020204030204" pitchFamily="34" charset="0"/>
-              </a:rPr>
-              <a:t>a population mean</a:t>
-            </a:r>
-            <a:endParaRPr lang="en-US" sz="2000" b="1">
-              <a:solidFill>
-                <a:srgbClr val="000000"/>
-              </a:solidFill>
-              <a:latin typeface="Calibri" panose="020F0502020204030204" pitchFamily="34" charset="0"/>
-            </a:endParaRPr>
-          </a:p>
-        </p:txBody>
-      </p:sp>
-      <p:sp>
-        <p:nvSpPr>
-          <p:cNvPr id="10" name="Question">
-            <a:extLst>
-              <a:ext uri="{FF2B5EF4-FFF2-40B4-BE49-F238E27FC236}">
-                <a16:creationId xmlns:a16="http://schemas.microsoft.com/office/drawing/2014/main" id="{B31E395F-B84E-D1E9-D22A-222467FC4105}"/>
-              </a:ext>
-            </a:extLst>
-          </p:cNvPr>
-          <p:cNvSpPr txBox="1"/>
-          <p:nvPr/>
-        </p:nvSpPr>
-        <p:spPr>
-          <a:xfrm>
-            <a:off x="762000" y="2711510"/>
-            <a:ext cx="10668000" cy="974626"/>
-          </a:xfrm>
-          <a:prstGeom prst="rect">
-            <a:avLst/>
-          </a:prstGeom>
-          <a:noFill/>
-        </p:spPr>
-        <p:txBody>
-          <a:bodyPr vert="horz" wrap="square" rtlCol="0">
-            <a:spAutoFit/>
-          </a:bodyPr>
-          <a:lstStyle/>
-          <a:p>
-            <a:pPr>
-              <a:spcAft>
-                <a:spcPts val="200"/>
-              </a:spcAft>
-            </a:pPr>
-            <a:r>
-              <a:rPr lang="en-US" b="1">
-                <a:solidFill>
-                  <a:srgbClr val="C00000"/>
-                </a:solidFill>
-                <a:latin typeface="Calibri" panose="020F0502020204030204" pitchFamily="34" charset="0"/>
-              </a:rPr>
-              <a:t>(a)  Your roommate names Coke or Pepsi.  Do they do better than guessing?</a:t>
-            </a:r>
-          </a:p>
-          <a:p>
-            <a:pPr>
-              <a:spcAft>
-                <a:spcPts val="200"/>
-              </a:spcAft>
-            </a:pPr>
-            <a:r>
-              <a:rPr lang="en-US" b="1">
-                <a:solidFill>
-                  <a:srgbClr val="C00000"/>
-                </a:solidFill>
-                <a:latin typeface="Calibri" panose="020F0502020204030204" pitchFamily="34" charset="0"/>
-              </a:rPr>
-              <a:t>(b)  A coin is spun on a table.  Does it favor heads or tails?</a:t>
-            </a:r>
-          </a:p>
-          <a:p>
-            <a:pPr>
-              <a:spcAft>
-                <a:spcPts val="200"/>
-              </a:spcAft>
-            </a:pPr>
-            <a:r>
-              <a:rPr lang="en-US" b="1">
-                <a:solidFill>
-                  <a:srgbClr val="C00000"/>
-                </a:solidFill>
-                <a:latin typeface="Calibri" panose="020F0502020204030204" pitchFamily="34" charset="0"/>
-              </a:rPr>
-              <a:t>(c)  A chip bag says 28 g.  Do the bags hold less than that on average?</a:t>
-            </a:r>
-          </a:p>
-        </p:txBody>
-      </p:sp>
-      <p:sp>
-        <p:nvSpPr>
-          <p:cNvPr id="11" name="Result">
-            <a:extLst>
-              <a:ext uri="{FF2B5EF4-FFF2-40B4-BE49-F238E27FC236}">
-                <a16:creationId xmlns:a16="http://schemas.microsoft.com/office/drawing/2014/main" id="{5A70F68E-0D93-07B8-82B2-4D8F2F681D0D}"/>
-              </a:ext>
-            </a:extLst>
-          </p:cNvPr>
-          <p:cNvSpPr/>
-          <p:nvPr/>
-        </p:nvSpPr>
-        <p:spPr>
-          <a:xfrm>
-            <a:off x="762000" y="3838536"/>
-            <a:ext cx="10668000" cy="1092200"/>
-          </a:xfrm>
-          <a:prstGeom prst="roundRect">
-            <a:avLst>
-              <a:gd name="adj" fmla="val 4000"/>
-            </a:avLst>
-          </a:prstGeom>
-          <a:solidFill>
-            <a:srgbClr val="F2F6FC"/>
-          </a:solidFill>
-          <a:ln w="15875">
-            <a:solidFill>
-              <a:srgbClr val="4472C4"/>
-            </a:solidFill>
-          </a:ln>
-        </p:spPr>
-        <p:style>
-          <a:lnRef idx="2">
-            <a:schemeClr val="accent1">
-              <a:shade val="15000"/>
-            </a:schemeClr>
-          </a:lnRef>
-          <a:fillRef idx="1">
-            <a:schemeClr val="accent1"/>
-          </a:fillRef>
-          <a:effectRef idx="0">
-            <a:schemeClr val="accent1"/>
-          </a:effectRef>
-          <a:fontRef idx="minor">
-            <a:schemeClr val="lt1"/>
-          </a:fontRef>
-        </p:style>
-        <p:txBody>
-          <a:bodyPr wrap="square" lIns="152400" tIns="76200" rIns="152400" bIns="76200" rtlCol="0" anchor="ctr">
-            <a:spAutoFit/>
-          </a:bodyPr>
-          <a:lstStyle/>
-          <a:p>
-            <a:r>
-              <a:rPr lang="en-US" sz="2000" b="1">
-                <a:solidFill>
-                  <a:srgbClr val="C00000"/>
-                </a:solidFill>
-                <a:latin typeface="Calibri" panose="020F0502020204030204" pitchFamily="34" charset="0"/>
-              </a:rPr>
-              <a:t>(a)  H</a:t>
-            </a:r>
-            <a:r>
-              <a:rPr lang="en-US" sz="2000" b="1" baseline="-25000">
-                <a:solidFill>
-                  <a:srgbClr val="C00000"/>
-                </a:solidFill>
-                <a:latin typeface="Calibri" panose="020F0502020204030204" pitchFamily="34" charset="0"/>
-              </a:rPr>
-              <a:t>A</a:t>
-            </a:r>
-            <a:r>
-              <a:rPr lang="en-US" sz="2000" b="1">
-                <a:solidFill>
-                  <a:srgbClr val="C00000"/>
-                </a:solidFill>
-                <a:latin typeface="Calibri" panose="020F0502020204030204" pitchFamily="34" charset="0"/>
-              </a:rPr>
-              <a:t>: p &gt; 0.5     H</a:t>
-            </a:r>
-            <a:r>
-              <a:rPr lang="en-US" sz="2000" b="1" baseline="-25000">
-                <a:solidFill>
-                  <a:srgbClr val="C00000"/>
-                </a:solidFill>
-                <a:latin typeface="Calibri" panose="020F0502020204030204" pitchFamily="34" charset="0"/>
-              </a:rPr>
-              <a:t>0</a:t>
-            </a:r>
-            <a:r>
-              <a:rPr lang="en-US" sz="2000" b="1">
-                <a:solidFill>
-                  <a:srgbClr val="C00000"/>
-                </a:solidFill>
-                <a:latin typeface="Calibri" panose="020F0502020204030204" pitchFamily="34" charset="0"/>
-              </a:rPr>
-              <a:t>: p = 0.5     p</a:t>
-            </a:r>
-            <a:r>
-              <a:rPr lang="en-US" sz="2000" b="1" baseline="-25000">
-                <a:solidFill>
-                  <a:srgbClr val="C00000"/>
-                </a:solidFill>
-                <a:latin typeface="Calibri" panose="020F0502020204030204" pitchFamily="34" charset="0"/>
-              </a:rPr>
-              <a:t>0</a:t>
-            </a:r>
-            <a:r>
-              <a:rPr lang="en-US" sz="2000" b="1">
-                <a:solidFill>
-                  <a:srgbClr val="C00000"/>
-                </a:solidFill>
-                <a:latin typeface="Calibri" panose="020F0502020204030204" pitchFamily="34" charset="0"/>
-              </a:rPr>
-              <a:t> = 0.5,  upper-tailed   (p = chance of a right cup)</a:t>
-            </a:r>
-          </a:p>
-          <a:p>
-            <a:r>
-              <a:rPr lang="en-US" sz="2000" b="1">
-                <a:solidFill>
-                  <a:srgbClr val="C00000"/>
-                </a:solidFill>
-                <a:latin typeface="Calibri" panose="020F0502020204030204" pitchFamily="34" charset="0"/>
-              </a:rPr>
-              <a:t>(b)  H</a:t>
-            </a:r>
-            <a:r>
-              <a:rPr lang="en-US" sz="2000" b="1" baseline="-25000">
-                <a:solidFill>
-                  <a:srgbClr val="C00000"/>
-                </a:solidFill>
-                <a:latin typeface="Calibri" panose="020F0502020204030204" pitchFamily="34" charset="0"/>
-              </a:rPr>
-              <a:t>A</a:t>
-            </a:r>
-            <a:r>
-              <a:rPr lang="en-US" sz="2000" b="1">
-                <a:solidFill>
-                  <a:srgbClr val="C00000"/>
-                </a:solidFill>
-                <a:latin typeface="Calibri" panose="020F0502020204030204" pitchFamily="34" charset="0"/>
-              </a:rPr>
-              <a:t>: p ≠ 0.5     H</a:t>
-            </a:r>
-            <a:r>
-              <a:rPr lang="en-US" sz="2000" b="1" baseline="-25000">
-                <a:solidFill>
-                  <a:srgbClr val="C00000"/>
-                </a:solidFill>
-                <a:latin typeface="Calibri" panose="020F0502020204030204" pitchFamily="34" charset="0"/>
-              </a:rPr>
-              <a:t>0</a:t>
-            </a:r>
-            <a:r>
-              <a:rPr lang="en-US" sz="2000" b="1">
-                <a:solidFill>
-                  <a:srgbClr val="C00000"/>
-                </a:solidFill>
-                <a:latin typeface="Calibri" panose="020F0502020204030204" pitchFamily="34" charset="0"/>
-              </a:rPr>
-              <a:t>: p = 0.5     p</a:t>
-            </a:r>
-            <a:r>
-              <a:rPr lang="en-US" sz="2000" b="1" baseline="-25000">
-                <a:solidFill>
-                  <a:srgbClr val="C00000"/>
-                </a:solidFill>
-                <a:latin typeface="Calibri" panose="020F0502020204030204" pitchFamily="34" charset="0"/>
-              </a:rPr>
-              <a:t>0</a:t>
-            </a:r>
-            <a:r>
-              <a:rPr lang="en-US" sz="2000" b="1">
-                <a:solidFill>
-                  <a:srgbClr val="C00000"/>
-                </a:solidFill>
-                <a:latin typeface="Calibri" panose="020F0502020204030204" pitchFamily="34" charset="0"/>
-              </a:rPr>
-              <a:t> = 0.5,  two-sided   (p = chance of heads)</a:t>
-            </a:r>
-          </a:p>
-          <a:p>
-            <a:r>
-              <a:rPr lang="en-US" sz="2000" b="1">
-                <a:solidFill>
-                  <a:srgbClr val="C00000"/>
-                </a:solidFill>
-                <a:latin typeface="Calibri" panose="020F0502020204030204" pitchFamily="34" charset="0"/>
-              </a:rPr>
-              <a:t>(c)  H</a:t>
-            </a:r>
-            <a:r>
-              <a:rPr lang="en-US" sz="2000" b="1" baseline="-25000">
-                <a:solidFill>
-                  <a:srgbClr val="C00000"/>
-                </a:solidFill>
-                <a:latin typeface="Calibri" panose="020F0502020204030204" pitchFamily="34" charset="0"/>
-              </a:rPr>
-              <a:t>A</a:t>
-            </a:r>
-            <a:r>
-              <a:rPr lang="en-US" sz="2000" b="1">
-                <a:solidFill>
-                  <a:srgbClr val="C00000"/>
-                </a:solidFill>
-                <a:latin typeface="Calibri" panose="020F0502020204030204" pitchFamily="34" charset="0"/>
-              </a:rPr>
-              <a:t>: μ &lt; 28 g    H</a:t>
-            </a:r>
-            <a:r>
-              <a:rPr lang="en-US" sz="2000" b="1" baseline="-25000">
-                <a:solidFill>
-                  <a:srgbClr val="C00000"/>
-                </a:solidFill>
-                <a:latin typeface="Calibri" panose="020F0502020204030204" pitchFamily="34" charset="0"/>
-              </a:rPr>
-              <a:t>0</a:t>
-            </a:r>
-            <a:r>
-              <a:rPr lang="en-US" sz="2000" b="1">
-                <a:solidFill>
-                  <a:srgbClr val="C00000"/>
-                </a:solidFill>
-                <a:latin typeface="Calibri" panose="020F0502020204030204" pitchFamily="34" charset="0"/>
-              </a:rPr>
-              <a:t>: μ = 28 g    μ</a:t>
-            </a:r>
-            <a:r>
-              <a:rPr lang="en-US" sz="2000" b="1" baseline="-25000">
-                <a:solidFill>
-                  <a:srgbClr val="C00000"/>
-                </a:solidFill>
-                <a:latin typeface="Calibri" panose="020F0502020204030204" pitchFamily="34" charset="0"/>
-              </a:rPr>
-              <a:t>0</a:t>
-            </a:r>
-            <a:r>
-              <a:rPr lang="en-US" sz="2000" b="1">
-                <a:solidFill>
-                  <a:srgbClr val="C00000"/>
-                </a:solidFill>
-                <a:latin typeface="Calibri" panose="020F0502020204030204" pitchFamily="34" charset="0"/>
-              </a:rPr>
-              <a:t> = 28 g,  lower-tailed</a:t>
-            </a:r>
-          </a:p>
-        </p:txBody>
-      </p:sp>
-    </p:spTree>
-    <p:extLst>
-      <p:ext uri="{BB962C8B-B14F-4D97-AF65-F5344CB8AC3E}">
-        <p14:creationId xmlns:p14="http://schemas.microsoft.com/office/powerpoint/2010/main" val="3007873360"/>
-      </p:ext>
-    </p:extLst>
-  </p:cSld>
-  <p:clrMapOvr>
-    <a:masterClrMapping/>
-  </p:clrMapOvr>
-  <p:timing>
-    <p:tnLst>
-      <p:par>
-        <p:cTn id="1" dur="indefinite" restart="never" nodeType="tmRoot">
-          <p:childTnLst>
-            <p:seq concurrent="1" nextAc="seek">
-              <p:cTn id="2" dur="indefinite" nodeType="mainSeq">
-                <p:childTnLst>
-                  <p:par>
-                    <p:cTn id="3" fill="hold">
-                      <p:stCondLst>
-                        <p:cond delay="indefinite"/>
-                      </p:stCondLst>
-                      <p:childTnLst>
-                        <p:par>
-                          <p:cTn id="4" fill="hold">
-                            <p:stCondLst>
-                              <p:cond delay="0"/>
-                            </p:stCondLst>
-                            <p:childTnLst>
-                              <p:par>
-                                <p:cTn id="5" presetID="1" presetClass="entr" presetSubtype="0" fill="hold" grpId="0" nodeType="clickEffect">
-                                  <p:stCondLst>
-                                    <p:cond delay="0"/>
-                                  </p:stCondLst>
-                                  <p:childTnLst>
-                                    <p:set>
-                                      <p:cBhvr>
-                                        <p:cTn id="6" dur="1" fill="hold">
-                                          <p:stCondLst>
-                                            <p:cond delay="0"/>
-                                          </p:stCondLst>
-                                        </p:cTn>
-                                        <p:tgtEl>
-                                          <p:spTgt spid="11"/>
-                                        </p:tgtEl>
-                                        <p:attrNameLst>
-                                          <p:attrName>style.visibility</p:attrName>
-                                        </p:attrNameLst>
-                                      </p:cBhvr>
-                                      <p:to>
-                                        <p:strVal val="visible"/>
-                                      </p:to>
-                                    </p:set>
-                                  </p:childTnLst>
-                                </p:cTn>
-                              </p:par>
-                            </p:childTnLst>
-                          </p:cTn>
-                        </p:par>
-                      </p:childTnLst>
-                    </p:cTn>
-                  </p:par>
-                </p:childTnLst>
-              </p:cTn>
-              <p:prevCondLst>
-                <p:cond evt="onPrev" delay="0">
-                  <p:tgtEl>
-                    <p:sldTgt/>
-                  </p:tgtEl>
-                </p:cond>
-              </p:prevCondLst>
-              <p:nextCondLst>
-                <p:cond evt="onNext" delay="0">
-                  <p:tgtEl>
-                    <p:sldTgt/>
-                  </p:tgtEl>
-                </p:cond>
-              </p:nextCondLst>
-            </p:seq>
-          </p:childTnLst>
-        </p:cTn>
-      </p:par>
-    </p:tnLst>
-    <p:bldLst>
-      <p:bldP spid="11" grpId="0" animBg="1"/>
-    </p:bldLst>
-  </p:timing>
-</p:sld>
-</file>
-
-<file path=ppt/slides/slide12.xml><?xml version="1.0" encoding="utf-8"?>
-<p:sld xmlns:a="http://schemas.openxmlformats.org/drawingml/2006/main" xmlns:r="http://schemas.openxmlformats.org/officeDocument/2006/relationships" xmlns:p="http://schemas.openxmlformats.org/presentationml/2006/main">
-  <p:cSld>
-    <p:spTree>
-      <p:nvGrpSpPr>
-        <p:cNvPr id="1" name=""/>
-        <p:cNvGrpSpPr/>
-        <p:nvPr/>
-      </p:nvGrpSpPr>
-      <p:grpSpPr>
-        <a:xfrm>
-          <a:off x="0" y="0"/>
-          <a:ext cx="0" cy="0"/>
-          <a:chOff x="0" y="0"/>
-          <a:chExt cx="0" cy="0"/>
-        </a:xfrm>
-      </p:grpSpPr>
-      <p:sp>
-        <p:nvSpPr>
-          <p:cNvPr id="2" name="Title 1">
-            <a:extLst>
-              <a:ext uri="{FF2B5EF4-FFF2-40B4-BE49-F238E27FC236}">
-                <a16:creationId xmlns:a16="http://schemas.microsoft.com/office/drawing/2014/main" id="{D617AB41-6AD1-9EF2-7F95-46A904399681}"/>
-              </a:ext>
-            </a:extLst>
-          </p:cNvPr>
-          <p:cNvSpPr>
-            <a:spLocks noGrp="1"/>
-          </p:cNvSpPr>
-          <p:nvPr>
-            <p:ph type="title"/>
-          </p:nvPr>
-        </p:nvSpPr>
-        <p:spPr/>
-        <p:txBody>
-          <a:bodyPr>
-            <a:noAutofit/>
-          </a:bodyPr>
-          <a:lstStyle/>
-          <a:p>
-            <a:r>
-              <a:rPr lang="en-US">
-                <a:solidFill>
-                  <a:srgbClr val="1F3864"/>
-                </a:solidFill>
-              </a:rPr>
-              <a:t>Test statistics and P-values</a:t>
-            </a:r>
-          </a:p>
-        </p:txBody>
-      </p:sp>
-      <p:sp>
-        <p:nvSpPr>
-          <p:cNvPr id="4" name="Slide Number Placeholder 3">
-            <a:extLst>
-              <a:ext uri="{FF2B5EF4-FFF2-40B4-BE49-F238E27FC236}">
-                <a16:creationId xmlns:a16="http://schemas.microsoft.com/office/drawing/2014/main" id="{97D44AE5-98B5-B840-6B8A-D345C7C2E2F0}"/>
-              </a:ext>
-            </a:extLst>
-          </p:cNvPr>
-          <p:cNvSpPr>
-            <a:spLocks noGrp="1"/>
-          </p:cNvSpPr>
-          <p:nvPr>
-            <p:ph type="sldNum" sz="quarter" idx="12"/>
-          </p:nvPr>
-        </p:nvSpPr>
-        <p:spPr/>
-        <p:txBody>
-          <a:bodyPr/>
-          <a:lstStyle/>
-          <a:p>
-            <a:fld id="{A80A81DD-F10A-4B1C-963A-0ABBB4865886}" type="slidenum">
-              <a:rPr lang="en-US" sz="1600" smtClean="0"/>
-              <a:t>12</a:t>
-            </a:fld>
-            <a:endParaRPr lang="en-US" sz="1600"/>
-          </a:p>
-        </p:txBody>
-      </p:sp>
-      <p:sp>
-        <p:nvSpPr>
-          <p:cNvPr id="5" name="TextBox 4">
-            <a:extLst>
-              <a:ext uri="{FF2B5EF4-FFF2-40B4-BE49-F238E27FC236}">
-                <a16:creationId xmlns:a16="http://schemas.microsoft.com/office/drawing/2014/main" id="{A34AAE17-27CE-D7A3-C663-11BB48ACBF5B}"/>
-              </a:ext>
-            </a:extLst>
-          </p:cNvPr>
-          <p:cNvSpPr txBox="1"/>
-          <p:nvPr/>
-        </p:nvSpPr>
-        <p:spPr>
-          <a:xfrm>
-            <a:off x="762000" y="1879600"/>
-            <a:ext cx="10668000" cy="345440"/>
-          </a:xfrm>
-          <a:prstGeom prst="rect">
-            <a:avLst/>
-          </a:prstGeom>
-          <a:noFill/>
-        </p:spPr>
-        <p:txBody>
-          <a:bodyPr vert="horz" wrap="square" rtlCol="0">
-            <a:spAutoFit/>
-          </a:bodyPr>
-          <a:lstStyle/>
-          <a:p>
-            <a:pPr marL="304800" indent="-304800"/>
-            <a:r>
-              <a:rPr lang="en-US" sz="1600">
-                <a:solidFill>
-                  <a:srgbClr val="000000"/>
-                </a:solidFill>
-              </a:rPr>
-              <a:t>test statistic  z</a:t>
-            </a:r>
-            <a:r>
-              <a:rPr lang="en-US" sz="1600" baseline="-25000">
-                <a:solidFill>
-                  <a:srgbClr val="000000"/>
-                </a:solidFill>
-              </a:rPr>
-              <a:t>obs</a:t>
-            </a:r>
-          </a:p>
-        </p:txBody>
-      </p:sp>
-      <p:sp>
-        <p:nvSpPr>
-          <p:cNvPr id="6" name="TextBox 5">
-            <a:extLst>
-              <a:ext uri="{FF2B5EF4-FFF2-40B4-BE49-F238E27FC236}">
-                <a16:creationId xmlns:a16="http://schemas.microsoft.com/office/drawing/2014/main" id="{E410A0F8-5E1E-9A1D-B64C-50827EE6C9B2}"/>
-              </a:ext>
-            </a:extLst>
-          </p:cNvPr>
-          <p:cNvSpPr txBox="1"/>
-          <p:nvPr/>
-        </p:nvSpPr>
-        <p:spPr>
-          <a:xfrm>
-            <a:off x="1117600" y="2225040"/>
-            <a:ext cx="10312400" cy="338554"/>
-          </a:xfrm>
-          <a:prstGeom prst="rect">
-            <a:avLst/>
-          </a:prstGeom>
-          <a:noFill/>
-        </p:spPr>
-        <p:txBody>
-          <a:bodyPr vert="horz" wrap="square" rtlCol="0">
-            <a:spAutoFit/>
-          </a:bodyPr>
-          <a:lstStyle/>
-          <a:p>
-            <a:r>
-              <a:rPr lang="en-US" sz="1600" b="1">
-                <a:solidFill>
-                  <a:srgbClr val="C00000"/>
-                </a:solidFill>
-              </a:rPr>
-              <a:t>z</a:t>
-            </a:r>
-            <a:r>
-              <a:rPr lang="en-US" sz="1600" b="1" baseline="-25000">
-                <a:solidFill>
-                  <a:srgbClr val="C00000"/>
-                </a:solidFill>
-              </a:rPr>
-              <a:t>obs</a:t>
-            </a:r>
-            <a:r>
-              <a:rPr lang="en-US" sz="1600" b="1">
-                <a:solidFill>
-                  <a:srgbClr val="C00000"/>
-                </a:solidFill>
-              </a:rPr>
-              <a:t> = (estimate − θ</a:t>
-            </a:r>
-            <a:r>
-              <a:rPr lang="en-US" sz="1600" b="1" baseline="-25000">
-                <a:solidFill>
-                  <a:srgbClr val="C00000"/>
-                </a:solidFill>
-              </a:rPr>
-              <a:t>0</a:t>
-            </a:r>
-            <a:r>
-              <a:rPr lang="en-US" sz="1600" b="1">
-                <a:solidFill>
-                  <a:srgbClr val="C00000"/>
-                </a:solidFill>
-              </a:rPr>
-              <a:t>) / SE:  how many SEs the estimate is from θ</a:t>
-            </a:r>
-            <a:r>
-              <a:rPr lang="en-US" sz="1600" b="1" baseline="-25000">
-                <a:solidFill>
-                  <a:srgbClr val="C00000"/>
-                </a:solidFill>
-              </a:rPr>
-              <a:t>0</a:t>
-            </a:r>
-          </a:p>
-        </p:txBody>
-      </p:sp>
-      <p:sp>
-        <p:nvSpPr>
-          <p:cNvPr id="7" name="TextBox 6">
-            <a:extLst>
-              <a:ext uri="{FF2B5EF4-FFF2-40B4-BE49-F238E27FC236}">
-                <a16:creationId xmlns:a16="http://schemas.microsoft.com/office/drawing/2014/main" id="{47D3CD95-D52E-5227-B663-7C0A72677B6E}"/>
-              </a:ext>
-            </a:extLst>
-          </p:cNvPr>
-          <p:cNvSpPr txBox="1"/>
-          <p:nvPr/>
-        </p:nvSpPr>
-        <p:spPr>
-          <a:xfrm>
-            <a:off x="762000" y="2741394"/>
-            <a:ext cx="10668000" cy="345440"/>
-          </a:xfrm>
-          <a:prstGeom prst="rect">
-            <a:avLst/>
-          </a:prstGeom>
-          <a:noFill/>
-        </p:spPr>
-        <p:txBody>
-          <a:bodyPr vert="horz" wrap="square" rtlCol="0">
-            <a:spAutoFit/>
-          </a:bodyPr>
-          <a:lstStyle/>
-          <a:p>
-            <a:pPr marL="304800" indent="-304800"/>
-            <a:r>
-              <a:rPr lang="en-US" sz="1600">
-                <a:solidFill>
-                  <a:srgbClr val="000000"/>
-                </a:solidFill>
-              </a:rPr>
-              <a:t>P-value</a:t>
-            </a:r>
-          </a:p>
-        </p:txBody>
-      </p:sp>
-      <p:sp>
-        <p:nvSpPr>
-          <p:cNvPr id="8" name="TextBox 7">
-            <a:extLst>
-              <a:ext uri="{FF2B5EF4-FFF2-40B4-BE49-F238E27FC236}">
-                <a16:creationId xmlns:a16="http://schemas.microsoft.com/office/drawing/2014/main" id="{1CE3E601-601D-C6B1-8265-C079CB8C9269}"/>
-              </a:ext>
-            </a:extLst>
-          </p:cNvPr>
-          <p:cNvSpPr txBox="1"/>
-          <p:nvPr/>
-        </p:nvSpPr>
-        <p:spPr>
-          <a:xfrm>
-            <a:off x="1117600" y="3086834"/>
-            <a:ext cx="10312400" cy="338554"/>
-          </a:xfrm>
-          <a:prstGeom prst="rect">
-            <a:avLst/>
-          </a:prstGeom>
-          <a:noFill/>
-        </p:spPr>
-        <p:txBody>
-          <a:bodyPr vert="horz" wrap="square" rtlCol="0">
-            <a:spAutoFit/>
-          </a:bodyPr>
-          <a:lstStyle/>
-          <a:p>
-            <a:r>
-              <a:rPr lang="en-US" sz="1600" b="1">
-                <a:solidFill>
-                  <a:srgbClr val="C00000"/>
-                </a:solidFill>
-              </a:rPr>
-              <a:t>a result as extreme as ours, or more, if H</a:t>
-            </a:r>
-            <a:r>
-              <a:rPr lang="en-US" sz="1600" b="1" baseline="-25000">
-                <a:solidFill>
-                  <a:srgbClr val="C00000"/>
-                </a:solidFill>
-              </a:rPr>
-              <a:t>0</a:t>
-            </a:r>
-            <a:r>
-              <a:rPr lang="en-US" sz="1600" b="1">
-                <a:solidFill>
-                  <a:srgbClr val="C00000"/>
-                </a:solidFill>
-              </a:rPr>
-              <a:t> is true;  upper-tailed:  P(Z ≥ z</a:t>
-            </a:r>
-            <a:r>
-              <a:rPr lang="en-US" sz="1600" b="1" baseline="-25000">
-                <a:solidFill>
-                  <a:srgbClr val="C00000"/>
-                </a:solidFill>
-              </a:rPr>
-              <a:t>obs</a:t>
-            </a:r>
-            <a:r>
-              <a:rPr lang="en-US" sz="1600" b="1">
-                <a:solidFill>
-                  <a:srgbClr val="C00000"/>
-                </a:solidFill>
-              </a:rPr>
-              <a:t> | H</a:t>
-            </a:r>
-            <a:r>
-              <a:rPr lang="en-US" sz="1600" b="1" baseline="-25000">
-                <a:solidFill>
-                  <a:srgbClr val="C00000"/>
-                </a:solidFill>
-              </a:rPr>
-              <a:t>0</a:t>
-            </a:r>
-            <a:r>
-              <a:rPr lang="en-US" sz="1600" b="1">
-                <a:solidFill>
-                  <a:srgbClr val="C00000"/>
-                </a:solidFill>
-              </a:rPr>
-              <a:t> true)</a:t>
-            </a:r>
-          </a:p>
-        </p:txBody>
-      </p:sp>
-      <p:sp>
-        <p:nvSpPr>
-          <p:cNvPr id="9" name="TextBox 8">
-            <a:extLst>
-              <a:ext uri="{FF2B5EF4-FFF2-40B4-BE49-F238E27FC236}">
-                <a16:creationId xmlns:a16="http://schemas.microsoft.com/office/drawing/2014/main" id="{FB002BF4-8037-2F73-E27A-7A453477E389}"/>
-              </a:ext>
-            </a:extLst>
-          </p:cNvPr>
-          <p:cNvSpPr txBox="1"/>
-          <p:nvPr/>
-        </p:nvSpPr>
-        <p:spPr>
-          <a:xfrm>
-            <a:off x="762000" y="3603188"/>
-            <a:ext cx="10668000" cy="345440"/>
-          </a:xfrm>
-          <a:prstGeom prst="rect">
-            <a:avLst/>
-          </a:prstGeom>
-          <a:noFill/>
-        </p:spPr>
-        <p:txBody>
-          <a:bodyPr vert="horz" wrap="square" rtlCol="0">
-            <a:spAutoFit/>
-          </a:bodyPr>
-          <a:lstStyle/>
-          <a:p>
-            <a:pPr marL="304800" indent="-304800"/>
-            <a:r>
-              <a:rPr lang="en-US" sz="1600">
-                <a:solidFill>
-                  <a:srgbClr val="000000"/>
-                </a:solidFill>
-              </a:rPr>
-              <a:t>significance level </a:t>
-            </a:r>
-            <a:r>
-              <a:rPr lang="el-GR" sz="1600">
-                <a:solidFill>
-                  <a:srgbClr val="000000"/>
-                </a:solidFill>
-              </a:rPr>
-              <a:t>α</a:t>
-            </a:r>
-            <a:endParaRPr lang="en-US" sz="1600">
-              <a:solidFill>
-                <a:srgbClr val="000000"/>
-              </a:solidFill>
-            </a:endParaRPr>
-          </a:p>
-        </p:txBody>
-      </p:sp>
-      <p:sp>
-        <p:nvSpPr>
-          <p:cNvPr id="10" name="TextBox 9">
-            <a:extLst>
-              <a:ext uri="{FF2B5EF4-FFF2-40B4-BE49-F238E27FC236}">
-                <a16:creationId xmlns:a16="http://schemas.microsoft.com/office/drawing/2014/main" id="{10F3B3E3-D27C-E008-C93E-ED70BD2A4754}"/>
-              </a:ext>
-            </a:extLst>
-          </p:cNvPr>
-          <p:cNvSpPr txBox="1"/>
-          <p:nvPr/>
-        </p:nvSpPr>
-        <p:spPr>
-          <a:xfrm>
-            <a:off x="1117600" y="3948628"/>
-            <a:ext cx="10312400" cy="338554"/>
-          </a:xfrm>
-          <a:prstGeom prst="rect">
-            <a:avLst/>
-          </a:prstGeom>
-          <a:noFill/>
-        </p:spPr>
-        <p:txBody>
-          <a:bodyPr vert="horz" wrap="square" rtlCol="0">
-            <a:spAutoFit/>
-          </a:bodyPr>
-          <a:lstStyle/>
-          <a:p>
-            <a:r>
-              <a:rPr lang="en-US" sz="1600" b="1">
-                <a:solidFill>
-                  <a:srgbClr val="C00000"/>
-                </a:solidFill>
-              </a:rPr>
-              <a:t>the cutoff, chosen before collecting data;  usually α = 0.05</a:t>
-            </a:r>
-          </a:p>
-        </p:txBody>
-      </p:sp>
-      <p:sp>
-        <p:nvSpPr>
-          <p:cNvPr id="3" name="Title rule">
-            <a:extLst>
-              <a:ext uri="{FF2B5EF4-FFF2-40B4-BE49-F238E27FC236}">
-                <a16:creationId xmlns:a16="http://schemas.microsoft.com/office/drawing/2014/main" id="{B469CAAB-2B69-6863-7C28-0C5959E5734B}"/>
-              </a:ext>
-            </a:extLst>
-          </p:cNvPr>
-          <p:cNvSpPr/>
-          <p:nvPr/>
-        </p:nvSpPr>
-        <p:spPr>
-          <a:xfrm>
-            <a:off x="838200" y="1600200"/>
-            <a:ext cx="10515600" cy="38100"/>
-          </a:xfrm>
-          <a:prstGeom prst="rect">
-            <a:avLst/>
-          </a:prstGeom>
-          <a:solidFill>
-            <a:srgbClr val="4472C4"/>
-          </a:solidFill>
-          <a:ln w="12700" cap="flat" cmpd="sng" algn="ctr">
-            <a:noFill/>
-            <a:prstDash val="solid"/>
-            <a:miter lim="800000"/>
-          </a:ln>
-          <a:effectLst/>
-          <a:extLst>
-            <a:ext uri="{91240B29-F687-4F45-9708-019B960494DF}">
-              <a14:hiddenLine xmlns:a14="http://schemas.microsoft.com/office/drawing/2010/main" w="12700" cap="flat" cmpd="sng" algn="ctr">
-                <a:solidFill>
-                  <a:schemeClr val="accent1">
-                    <a:shade val="15000"/>
-                  </a:schemeClr>
-                </a:solidFill>
-                <a:prstDash val="solid"/>
-                <a:miter lim="800000"/>
-              </a14:hiddenLine>
-            </a:ext>
-          </a:extLst>
-        </p:spPr>
-        <p:style>
-          <a:lnRef idx="2">
-            <a:schemeClr val="accent1">
-              <a:shade val="15000"/>
-            </a:schemeClr>
-          </a:lnRef>
-          <a:fillRef idx="1">
-            <a:schemeClr val="accent1"/>
-          </a:fillRef>
-          <a:effectRef idx="0">
-            <a:schemeClr val="accent1"/>
-          </a:effectRef>
-          <a:fontRef idx="minor">
-            <a:schemeClr val="lt1"/>
-          </a:fontRef>
-        </p:style>
-        <p:txBody>
-          <a:bodyPr rtlCol="0" anchor="ctr"/>
-          <a:lstStyle/>
-          <a:p>
-            <a:pPr algn="ctr"/>
-            <a:endParaRPr lang="en-US"/>
-          </a:p>
-        </p:txBody>
-      </p:sp>
-      <p:sp>
-        <p:nvSpPr>
-          <p:cNvPr id="11" name="TextBox 10">
-            <a:extLst>
-              <a:ext uri="{FF2B5EF4-FFF2-40B4-BE49-F238E27FC236}">
-                <a16:creationId xmlns:a16="http://schemas.microsoft.com/office/drawing/2014/main" id="{7E252B31-0A80-8297-9AB5-9AED735ACDE2}"/>
-              </a:ext>
-            </a:extLst>
-          </p:cNvPr>
-          <p:cNvSpPr txBox="1"/>
-          <p:nvPr/>
-        </p:nvSpPr>
-        <p:spPr>
-          <a:xfrm>
-            <a:off x="762000" y="4464982"/>
-            <a:ext cx="10668000" cy="345440"/>
-          </a:xfrm>
-          <a:prstGeom prst="rect">
-            <a:avLst/>
-          </a:prstGeom>
-          <a:noFill/>
-        </p:spPr>
-        <p:txBody>
-          <a:bodyPr vert="horz" wrap="square" rtlCol="0">
-            <a:spAutoFit/>
-          </a:bodyPr>
-          <a:lstStyle/>
-          <a:p>
-            <a:pPr marL="304800" indent="-304800"/>
-            <a:r>
-              <a:rPr lang="en-US" sz="1600">
-                <a:solidFill>
-                  <a:srgbClr val="000000"/>
-                </a:solidFill>
-              </a:rPr>
-              <a:t>the decision</a:t>
-            </a:r>
-          </a:p>
-        </p:txBody>
-      </p:sp>
-      <p:sp>
-        <p:nvSpPr>
-          <p:cNvPr id="12" name="TextBox 11">
-            <a:extLst>
-              <a:ext uri="{FF2B5EF4-FFF2-40B4-BE49-F238E27FC236}">
-                <a16:creationId xmlns:a16="http://schemas.microsoft.com/office/drawing/2014/main" id="{A1980B2D-2D53-A814-88AF-46C2FDF3E298}"/>
-              </a:ext>
-            </a:extLst>
-          </p:cNvPr>
-          <p:cNvSpPr txBox="1"/>
-          <p:nvPr/>
-        </p:nvSpPr>
-        <p:spPr>
-          <a:xfrm>
-            <a:off x="1117600" y="4810422"/>
-            <a:ext cx="10312400" cy="338554"/>
-          </a:xfrm>
-          <a:prstGeom prst="rect">
-            <a:avLst/>
-          </a:prstGeom>
-          <a:noFill/>
-        </p:spPr>
-        <p:txBody>
-          <a:bodyPr vert="horz" wrap="square" rtlCol="0">
-            <a:spAutoFit/>
-          </a:bodyPr>
-          <a:lstStyle/>
-          <a:p>
-            <a:r>
-              <a:rPr lang="en-US" sz="1600" b="1">
-                <a:solidFill>
-                  <a:srgbClr val="C00000"/>
-                </a:solidFill>
-              </a:rPr>
-              <a:t>P-value &lt; α:  reject H</a:t>
-            </a:r>
-            <a:r>
-              <a:rPr lang="en-US" sz="1600" b="1" baseline="-25000">
-                <a:solidFill>
-                  <a:srgbClr val="C00000"/>
-                </a:solidFill>
-              </a:rPr>
-              <a:t>0</a:t>
-            </a:r>
-            <a:r>
-              <a:rPr lang="en-US" sz="1600" b="1">
-                <a:solidFill>
-                  <a:srgbClr val="C00000"/>
-                </a:solidFill>
-              </a:rPr>
-              <a:t> (significant);    P-value ≥ α:  do not reject H</a:t>
-            </a:r>
-            <a:r>
-              <a:rPr lang="en-US" sz="1600" b="1" baseline="-25000">
-                <a:solidFill>
-                  <a:srgbClr val="C00000"/>
-                </a:solidFill>
-              </a:rPr>
-              <a:t>0</a:t>
-            </a:r>
-          </a:p>
-        </p:txBody>
-      </p:sp>
-    </p:spTree>
-    <p:extLst>
-      <p:ext uri="{BB962C8B-B14F-4D97-AF65-F5344CB8AC3E}">
-        <p14:creationId xmlns:p14="http://schemas.microsoft.com/office/powerpoint/2010/main" val="3372870117"/>
-      </p:ext>
-    </p:extLst>
-  </p:cSld>
-  <p:clrMapOvr>
-    <a:masterClrMapping/>
-  </p:clrMapOvr>
-  <p:timing>
-    <p:tnLst>
-      <p:par>
-        <p:cTn id="1" dur="indefinite" restart="never" nodeType="tmRoot">
-          <p:childTnLst>
-            <p:seq concurrent="1" nextAc="seek">
-              <p:cTn id="2" dur="indefinite" nodeType="mainSeq">
-                <p:childTnLst>
-                  <p:par>
-                    <p:cTn id="3" fill="hold">
-                      <p:stCondLst>
-                        <p:cond delay="indefinite"/>
-                      </p:stCondLst>
-                      <p:childTnLst>
-                        <p:par>
-                          <p:cTn id="4" fill="hold">
-                            <p:stCondLst>
-                              <p:cond delay="0"/>
-                            </p:stCondLst>
-                            <p:childTnLst>
-                              <p:par>
-                                <p:cTn id="5" presetID="34" presetClass="entr" presetSubtype="0" fill="hold" grpId="0" nodeType="clickEffect">
-                                  <p:stCondLst>
-                                    <p:cond delay="0"/>
-                                  </p:stCondLst>
-                                  <p:childTnLst>
-                                    <p:set>
-                                      <p:cBhvr>
-                                        <p:cTn id="6" dur="1" fill="hold">
-                                          <p:stCondLst>
-                                            <p:cond delay="0"/>
-                                          </p:stCondLst>
-                                        </p:cTn>
-                                        <p:tgtEl>
-                                          <p:spTgt spid="6"/>
-                                        </p:tgtEl>
-                                        <p:attrNameLst>
-                                          <p:attrName>style.visibility</p:attrName>
-                                        </p:attrNameLst>
-                                      </p:cBhvr>
-                                      <p:to>
-                                        <p:strVal val="visible"/>
-                                      </p:to>
-                                    </p:set>
-                                    <p:anim from="(-#ppt_w/2)" to="(#ppt_x)" calcmode="lin" valueType="num">
-                                      <p:cBhvr>
-                                        <p:cTn id="7" dur="600" fill="hold">
-                                          <p:stCondLst>
-                                            <p:cond delay="0"/>
-                                          </p:stCondLst>
-                                        </p:cTn>
-                                        <p:tgtEl>
-                                          <p:spTgt spid="6"/>
-                                        </p:tgtEl>
-                                        <p:attrNameLst>
-                                          <p:attrName>ppt_x</p:attrName>
-                                        </p:attrNameLst>
-                                      </p:cBhvr>
-                                    </p:anim>
-                                    <p:anim from="0" to="-1.0" calcmode="lin" valueType="num">
-                                      <p:cBhvr>
-                                        <p:cTn id="8" dur="200" decel="50000" autoRev="1" fill="hold">
-                                          <p:stCondLst>
-                                            <p:cond delay="600"/>
-                                          </p:stCondLst>
-                                        </p:cTn>
-                                        <p:tgtEl>
-                                          <p:spTgt spid="6"/>
-                                        </p:tgtEl>
-                                        <p:attrNameLst>
-                                          <p:attrName>xshear</p:attrName>
-                                        </p:attrNameLst>
-                                      </p:cBhvr>
-                                    </p:anim>
-                                    <p:animScale>
-                                      <p:cBhvr>
-                                        <p:cTn id="9" dur="200" decel="100000" autoRev="1" fill="hold">
-                                          <p:stCondLst>
-                                            <p:cond delay="600"/>
-                                          </p:stCondLst>
-                                        </p:cTn>
-                                        <p:tgtEl>
-                                          <p:spTgt spid="6"/>
-                                        </p:tgtEl>
-                                      </p:cBhvr>
-                                      <p:from x="100000" y="100000"/>
-                                      <p:to x="80000" y="100000"/>
-                                    </p:animScale>
-                                    <p:anim by="(#ppt_h/3+#ppt_w*0.1)" calcmode="lin" valueType="num">
-                                      <p:cBhvr additive="sum">
-                                        <p:cTn id="10" dur="200" decel="100000" autoRev="1" fill="hold">
-                                          <p:stCondLst>
-                                            <p:cond delay="600"/>
-                                          </p:stCondLst>
-                                        </p:cTn>
-                                        <p:tgtEl>
-                                          <p:spTgt spid="6"/>
-                                        </p:tgtEl>
-                                        <p:attrNameLst>
-                                          <p:attrName>ppt_x</p:attrName>
-                                        </p:attrNameLst>
-                                      </p:cBhvr>
-                                    </p:anim>
-                                  </p:childTnLst>
-                                </p:cTn>
-                              </p:par>
-                            </p:childTnLst>
-                          </p:cTn>
-                        </p:par>
-                      </p:childTnLst>
-                    </p:cTn>
-                  </p:par>
-                  <p:par>
-                    <p:cTn id="11" fill="hold">
-                      <p:stCondLst>
-                        <p:cond delay="indefinite"/>
-                      </p:stCondLst>
-                      <p:childTnLst>
-                        <p:par>
-                          <p:cTn id="12" fill="hold">
-                            <p:stCondLst>
-                              <p:cond delay="0"/>
-                            </p:stCondLst>
-                            <p:childTnLst>
-                              <p:par>
-                                <p:cTn id="13" presetID="34" presetClass="entr" presetSubtype="0" fill="hold" grpId="0" nodeType="clickEffect">
-                                  <p:stCondLst>
-                                    <p:cond delay="0"/>
-                                  </p:stCondLst>
-                                  <p:childTnLst>
-                                    <p:set>
-                                      <p:cBhvr>
-                                        <p:cTn id="14" dur="1" fill="hold">
-                                          <p:stCondLst>
-                                            <p:cond delay="0"/>
-                                          </p:stCondLst>
-                                        </p:cTn>
-                                        <p:tgtEl>
-                                          <p:spTgt spid="8"/>
-                                        </p:tgtEl>
-                                        <p:attrNameLst>
-                                          <p:attrName>style.visibility</p:attrName>
-                                        </p:attrNameLst>
-                                      </p:cBhvr>
-                                      <p:to>
-                                        <p:strVal val="visible"/>
-                                      </p:to>
-                                    </p:set>
-                                    <p:anim from="(-#ppt_w/2)" to="(#ppt_x)" calcmode="lin" valueType="num">
-                                      <p:cBhvr>
-                                        <p:cTn id="15" dur="600" fill="hold">
-                                          <p:stCondLst>
-                                            <p:cond delay="0"/>
-                                          </p:stCondLst>
-                                        </p:cTn>
-                                        <p:tgtEl>
-                                          <p:spTgt spid="8"/>
-                                        </p:tgtEl>
-                                        <p:attrNameLst>
-                                          <p:attrName>ppt_x</p:attrName>
-                                        </p:attrNameLst>
-                                      </p:cBhvr>
-                                    </p:anim>
-                                    <p:anim from="0" to="-1.0" calcmode="lin" valueType="num">
-                                      <p:cBhvr>
-                                        <p:cTn id="16" dur="200" decel="50000" autoRev="1" fill="hold">
-                                          <p:stCondLst>
-                                            <p:cond delay="600"/>
-                                          </p:stCondLst>
-                                        </p:cTn>
-                                        <p:tgtEl>
-                                          <p:spTgt spid="8"/>
-                                        </p:tgtEl>
-                                        <p:attrNameLst>
-                                          <p:attrName>xshear</p:attrName>
-                                        </p:attrNameLst>
-                                      </p:cBhvr>
-                                    </p:anim>
-                                    <p:animScale>
-                                      <p:cBhvr>
-                                        <p:cTn id="17" dur="200" decel="100000" autoRev="1" fill="hold">
-                                          <p:stCondLst>
-                                            <p:cond delay="600"/>
-                                          </p:stCondLst>
-                                        </p:cTn>
-                                        <p:tgtEl>
-                                          <p:spTgt spid="8"/>
-                                        </p:tgtEl>
-                                      </p:cBhvr>
-                                      <p:from x="100000" y="100000"/>
-                                      <p:to x="80000" y="100000"/>
-                                    </p:animScale>
-                                    <p:anim by="(#ppt_h/3+#ppt_w*0.1)" calcmode="lin" valueType="num">
-                                      <p:cBhvr additive="sum">
-                                        <p:cTn id="18" dur="200" decel="100000" autoRev="1" fill="hold">
-                                          <p:stCondLst>
-                                            <p:cond delay="600"/>
-                                          </p:stCondLst>
-                                        </p:cTn>
-                                        <p:tgtEl>
-                                          <p:spTgt spid="8"/>
-                                        </p:tgtEl>
-                                        <p:attrNameLst>
-                                          <p:attrName>ppt_x</p:attrName>
-                                        </p:attrNameLst>
-                                      </p:cBhvr>
-                                    </p:anim>
-                                  </p:childTnLst>
-                                </p:cTn>
-                              </p:par>
-                            </p:childTnLst>
-                          </p:cTn>
-                        </p:par>
-                      </p:childTnLst>
-                    </p:cTn>
-                  </p:par>
-                  <p:par>
-                    <p:cTn id="19" fill="hold">
-                      <p:stCondLst>
-                        <p:cond delay="indefinite"/>
-                      </p:stCondLst>
-                      <p:childTnLst>
-                        <p:par>
-                          <p:cTn id="20" fill="hold">
-                            <p:stCondLst>
-                              <p:cond delay="0"/>
-                            </p:stCondLst>
-                            <p:childTnLst>
-                              <p:par>
-                                <p:cTn id="21" presetID="34" presetClass="entr" presetSubtype="0" fill="hold" grpId="0" nodeType="clickEffect">
-                                  <p:stCondLst>
-                                    <p:cond delay="0"/>
-                                  </p:stCondLst>
-                                  <p:childTnLst>
-                                    <p:set>
-                                      <p:cBhvr>
-                                        <p:cTn id="22" dur="1" fill="hold">
-                                          <p:stCondLst>
-                                            <p:cond delay="0"/>
-                                          </p:stCondLst>
-                                        </p:cTn>
-                                        <p:tgtEl>
-                                          <p:spTgt spid="10"/>
-                                        </p:tgtEl>
-                                        <p:attrNameLst>
-                                          <p:attrName>style.visibility</p:attrName>
-                                        </p:attrNameLst>
-                                      </p:cBhvr>
-                                      <p:to>
-                                        <p:strVal val="visible"/>
-                                      </p:to>
-                                    </p:set>
-                                    <p:anim from="(-#ppt_w/2)" to="(#ppt_x)" calcmode="lin" valueType="num">
-                                      <p:cBhvr>
-                                        <p:cTn id="23" dur="600" fill="hold">
-                                          <p:stCondLst>
-                                            <p:cond delay="0"/>
-                                          </p:stCondLst>
-                                        </p:cTn>
-                                        <p:tgtEl>
-                                          <p:spTgt spid="10"/>
-                                        </p:tgtEl>
-                                        <p:attrNameLst>
-                                          <p:attrName>ppt_x</p:attrName>
-                                        </p:attrNameLst>
-                                      </p:cBhvr>
-                                    </p:anim>
-                                    <p:anim from="0" to="-1.0" calcmode="lin" valueType="num">
-                                      <p:cBhvr>
-                                        <p:cTn id="24" dur="200" decel="50000" autoRev="1" fill="hold">
-                                          <p:stCondLst>
-                                            <p:cond delay="600"/>
-                                          </p:stCondLst>
-                                        </p:cTn>
-                                        <p:tgtEl>
-                                          <p:spTgt spid="10"/>
-                                        </p:tgtEl>
-                                        <p:attrNameLst>
-                                          <p:attrName>xshear</p:attrName>
-                                        </p:attrNameLst>
-                                      </p:cBhvr>
-                                    </p:anim>
-                                    <p:animScale>
-                                      <p:cBhvr>
-                                        <p:cTn id="25" dur="200" decel="100000" autoRev="1" fill="hold">
-                                          <p:stCondLst>
-                                            <p:cond delay="600"/>
-                                          </p:stCondLst>
-                                        </p:cTn>
-                                        <p:tgtEl>
-                                          <p:spTgt spid="10"/>
-                                        </p:tgtEl>
-                                      </p:cBhvr>
-                                      <p:from x="100000" y="100000"/>
-                                      <p:to x="80000" y="100000"/>
-                                    </p:animScale>
-                                    <p:anim by="(#ppt_h/3+#ppt_w*0.1)" calcmode="lin" valueType="num">
-                                      <p:cBhvr additive="sum">
-                                        <p:cTn id="26" dur="200" decel="100000" autoRev="1" fill="hold">
-                                          <p:stCondLst>
-                                            <p:cond delay="600"/>
-                                          </p:stCondLst>
-                                        </p:cTn>
-                                        <p:tgtEl>
-                                          <p:spTgt spid="10"/>
-                                        </p:tgtEl>
-                                        <p:attrNameLst>
-                                          <p:attrName>ppt_x</p:attrName>
-                                        </p:attrNameLst>
-                                      </p:cBhvr>
-                                    </p:anim>
-                                  </p:childTnLst>
-                                </p:cTn>
-                              </p:par>
-                            </p:childTnLst>
-                          </p:cTn>
-                        </p:par>
-                      </p:childTnLst>
-                    </p:cTn>
-                  </p:par>
-                  <p:par>
-                    <p:cTn id="27" fill="hold">
-                      <p:stCondLst>
-                        <p:cond delay="indefinite"/>
-                      </p:stCondLst>
-                      <p:childTnLst>
-                        <p:par>
-                          <p:cTn id="28" fill="hold">
-                            <p:stCondLst>
-                              <p:cond delay="0"/>
-                            </p:stCondLst>
-                            <p:childTnLst>
-                              <p:par>
-                                <p:cTn id="29" presetID="34" presetClass="entr" presetSubtype="0" fill="hold" grpId="1" nodeType="clickEffect">
-                                  <p:stCondLst>
-                                    <p:cond delay="0"/>
-                                  </p:stCondLst>
-                                  <p:childTnLst>
-                                    <p:set>
-                                      <p:cBhvr>
-                                        <p:cTn id="30" dur="1" fill="hold">
-                                          <p:stCondLst>
-                                            <p:cond delay="0"/>
-                                          </p:stCondLst>
-                                        </p:cTn>
-                                        <p:tgtEl>
-                                          <p:spTgt spid="12"/>
-                                        </p:tgtEl>
-                                        <p:attrNameLst>
-                                          <p:attrName>style.visibility</p:attrName>
-                                        </p:attrNameLst>
-                                      </p:cBhvr>
-                                      <p:to>
-                                        <p:strVal val="visible"/>
-                                      </p:to>
-                                    </p:set>
-                                    <p:anim from="(-#ppt_w/2)" to="(#ppt_x)" calcmode="lin" valueType="num">
-                                      <p:cBhvr>
-                                        <p:cTn id="31" dur="600" fill="hold">
-                                          <p:stCondLst>
-                                            <p:cond delay="0"/>
-                                          </p:stCondLst>
-                                        </p:cTn>
-                                        <p:tgtEl>
-                                          <p:spTgt spid="12"/>
-                                        </p:tgtEl>
-                                        <p:attrNameLst>
-                                          <p:attrName>ppt_x</p:attrName>
-                                        </p:attrNameLst>
-                                      </p:cBhvr>
-                                    </p:anim>
-                                    <p:anim from="0" to="-1.0" calcmode="lin" valueType="num">
-                                      <p:cBhvr>
-                                        <p:cTn id="32" dur="200" decel="50000" autoRev="1" fill="hold">
-                                          <p:stCondLst>
-                                            <p:cond delay="600"/>
-                                          </p:stCondLst>
-                                        </p:cTn>
-                                        <p:tgtEl>
-                                          <p:spTgt spid="12"/>
-                                        </p:tgtEl>
-                                        <p:attrNameLst>
-                                          <p:attrName>xshear</p:attrName>
-                                        </p:attrNameLst>
-                                      </p:cBhvr>
-                                    </p:anim>
-                                    <p:animScale>
-                                      <p:cBhvr>
-                                        <p:cTn id="33" dur="200" decel="100000" autoRev="1" fill="hold">
-                                          <p:stCondLst>
-                                            <p:cond delay="600"/>
-                                          </p:stCondLst>
-                                        </p:cTn>
-                                        <p:tgtEl>
-                                          <p:spTgt spid="12"/>
-                                        </p:tgtEl>
-                                      </p:cBhvr>
-                                      <p:from x="100000" y="100000"/>
-                                      <p:to x="80000" y="100000"/>
-                                    </p:animScale>
-                                    <p:anim by="(#ppt_h/3+#ppt_w*0.1)" calcmode="lin" valueType="num">
-                                      <p:cBhvr additive="sum">
-                                        <p:cTn id="34" dur="200" decel="100000" autoRev="1" fill="hold">
-                                          <p:stCondLst>
-                                            <p:cond delay="600"/>
-                                          </p:stCondLst>
-                                        </p:cTn>
-                                        <p:tgtEl>
-                                          <p:spTgt spid="12"/>
-                                        </p:tgtEl>
-                                        <p:attrNameLst>
-                                          <p:attrName>ppt_x</p:attrName>
-                                        </p:attrNameLst>
-                                      </p:cBhvr>
-                                    </p:anim>
-                                  </p:childTnLst>
-                                </p:cTn>
-                              </p:par>
-                            </p:childTnLst>
-                          </p:cTn>
-                        </p:par>
-                      </p:childTnLst>
-                    </p:cTn>
-                  </p:par>
-                </p:childTnLst>
-              </p:cTn>
-              <p:prevCondLst>
-                <p:cond evt="onPrev" delay="0">
-                  <p:tgtEl>
-                    <p:sldTgt/>
-                  </p:tgtEl>
-                </p:cond>
-              </p:prevCondLst>
-              <p:nextCondLst>
-                <p:cond evt="onNext" delay="0">
-                  <p:tgtEl>
-                    <p:sldTgt/>
-                  </p:tgtEl>
-                </p:cond>
-              </p:nextCondLst>
-            </p:seq>
-          </p:childTnLst>
-        </p:cTn>
-      </p:par>
-    </p:tnLst>
-    <p:bldLst>
-      <p:bldP spid="6" grpId="0"/>
-      <p:bldP spid="8" grpId="0"/>
-      <p:bldP spid="10" grpId="0"/>
-      <p:bldP spid="12" grpId="1"/>
-    </p:bldLst>
-  </p:timing>
-</p:sld>
-</file>
-
-<file path=ppt/slides/slide13.xml><?xml version="1.0" encoding="utf-8"?>
-<p:sld xmlns:a="http://schemas.openxmlformats.org/drawingml/2006/main" xmlns:r="http://schemas.openxmlformats.org/officeDocument/2006/relationships" xmlns:p="http://schemas.openxmlformats.org/presentationml/2006/main">
-  <p:cSld>
-    <p:spTree>
-      <p:nvGrpSpPr>
-        <p:cNvPr id="1" name=""/>
-        <p:cNvGrpSpPr/>
-        <p:nvPr/>
-      </p:nvGrpSpPr>
-      <p:grpSpPr>
-        <a:xfrm>
-          <a:off x="0" y="0"/>
-          <a:ext cx="0" cy="0"/>
-          <a:chOff x="0" y="0"/>
-          <a:chExt cx="0" cy="0"/>
-        </a:xfrm>
-      </p:grpSpPr>
-      <p:sp>
-        <p:nvSpPr>
-          <p:cNvPr id="2" name="Title 1">
-            <a:extLst>
-              <a:ext uri="{FF2B5EF4-FFF2-40B4-BE49-F238E27FC236}">
-                <a16:creationId xmlns:a16="http://schemas.microsoft.com/office/drawing/2014/main" id="{C08D30B1-1864-30EF-7EAB-9BEE656C0012}"/>
-              </a:ext>
-            </a:extLst>
-          </p:cNvPr>
-          <p:cNvSpPr>
-            <a:spLocks noGrp="1"/>
-          </p:cNvSpPr>
-          <p:nvPr>
-            <p:ph type="title"/>
-          </p:nvPr>
-        </p:nvSpPr>
-        <p:spPr/>
-        <p:txBody>
-          <a:bodyPr>
-            <a:noAutofit/>
-          </a:bodyPr>
-          <a:lstStyle/>
-          <a:p>
-            <a:r>
-              <a:rPr lang="en-US">
-                <a:solidFill>
-                  <a:srgbClr val="1F3864"/>
-                </a:solidFill>
-              </a:rPr>
-              <a:t>Example: taste-test P-values</a:t>
-            </a:r>
-          </a:p>
-        </p:txBody>
-      </p:sp>
-      <p:sp>
-        <p:nvSpPr>
-          <p:cNvPr id="4" name="Slide Number Placeholder 3">
-            <a:extLst>
-              <a:ext uri="{FF2B5EF4-FFF2-40B4-BE49-F238E27FC236}">
-                <a16:creationId xmlns:a16="http://schemas.microsoft.com/office/drawing/2014/main" id="{3F875068-D051-44AE-498E-1BEBEDE3A7C8}"/>
-              </a:ext>
-            </a:extLst>
-          </p:cNvPr>
-          <p:cNvSpPr>
-            <a:spLocks noGrp="1"/>
-          </p:cNvSpPr>
-          <p:nvPr>
-            <p:ph type="sldNum" sz="quarter" idx="12"/>
-          </p:nvPr>
-        </p:nvSpPr>
-        <p:spPr/>
-        <p:txBody>
-          <a:bodyPr/>
-          <a:lstStyle/>
-          <a:p>
-            <a:fld id="{A80A81DD-F10A-4B1C-963A-0ABBB4865886}" type="slidenum">
-              <a:rPr lang="en-US" sz="1600" smtClean="0"/>
-              <a:t>13</a:t>
-            </a:fld>
-            <a:endParaRPr lang="en-US" sz="1600"/>
-          </a:p>
-        </p:txBody>
-      </p:sp>
-      <p:sp>
-        <p:nvSpPr>
-          <p:cNvPr id="3" name="Title rule">
-            <a:extLst>
-              <a:ext uri="{FF2B5EF4-FFF2-40B4-BE49-F238E27FC236}">
-                <a16:creationId xmlns:a16="http://schemas.microsoft.com/office/drawing/2014/main" id="{30656AA8-9645-F028-C769-A313710853CC}"/>
-              </a:ext>
-            </a:extLst>
-          </p:cNvPr>
-          <p:cNvSpPr/>
-          <p:nvPr/>
-        </p:nvSpPr>
-        <p:spPr>
-          <a:xfrm>
-            <a:off x="838200" y="1600200"/>
-            <a:ext cx="10515600" cy="38100"/>
-          </a:xfrm>
-          <a:prstGeom prst="rect">
-            <a:avLst/>
-          </a:prstGeom>
-          <a:solidFill>
-            <a:srgbClr val="4472C4"/>
-          </a:solidFill>
-          <a:ln w="12700" cap="flat" cmpd="sng" algn="ctr">
-            <a:noFill/>
-            <a:prstDash val="solid"/>
-            <a:miter lim="800000"/>
-          </a:ln>
-          <a:effectLst/>
-          <a:extLst>
-            <a:ext uri="{91240B29-F687-4F45-9708-019B960494DF}">
-              <a14:hiddenLine xmlns:a14="http://schemas.microsoft.com/office/drawing/2010/main" w="12700" cap="flat" cmpd="sng" algn="ctr">
-                <a:solidFill>
-                  <a:schemeClr val="accent1">
-                    <a:shade val="15000"/>
-                  </a:schemeClr>
-                </a:solidFill>
-                <a:prstDash val="solid"/>
-                <a:miter lim="800000"/>
-              </a14:hiddenLine>
-            </a:ext>
-          </a:extLst>
-        </p:spPr>
-        <p:style>
-          <a:lnRef idx="2">
-            <a:schemeClr val="accent1">
-              <a:shade val="15000"/>
-            </a:schemeClr>
-          </a:lnRef>
-          <a:fillRef idx="1">
-            <a:schemeClr val="accent1"/>
-          </a:fillRef>
-          <a:effectRef idx="0">
-            <a:schemeClr val="accent1"/>
-          </a:effectRef>
-          <a:fontRef idx="minor">
-            <a:schemeClr val="lt1"/>
-          </a:fontRef>
-        </p:style>
-        <p:txBody>
-          <a:bodyPr rtlCol="0" anchor="ctr"/>
-          <a:lstStyle/>
-          <a:p>
-            <a:pPr algn="ctr"/>
-            <a:endParaRPr lang="en-US"/>
-          </a:p>
-        </p:txBody>
-      </p:sp>
-      <p:sp>
-        <p:nvSpPr>
-          <p:cNvPr id="8" name="Context">
-            <a:extLst>
-              <a:ext uri="{FF2B5EF4-FFF2-40B4-BE49-F238E27FC236}">
-                <a16:creationId xmlns:a16="http://schemas.microsoft.com/office/drawing/2014/main" id="{71E3EA8C-31B4-DAD4-BC4A-65D72E59AD46}"/>
-              </a:ext>
-            </a:extLst>
-          </p:cNvPr>
-          <p:cNvSpPr txBox="1"/>
-          <p:nvPr/>
-        </p:nvSpPr>
-        <p:spPr>
-          <a:xfrm>
-            <a:off x="762000" y="1879600"/>
-            <a:ext cx="10668000" cy="381000"/>
-          </a:xfrm>
-          <a:prstGeom prst="rect">
-            <a:avLst/>
-          </a:prstGeom>
-          <a:noFill/>
-        </p:spPr>
-        <p:txBody>
-          <a:bodyPr vert="horz" wrap="square" rtlCol="0">
-            <a:spAutoFit/>
-          </a:bodyPr>
-          <a:lstStyle/>
-          <a:p>
-            <a:pPr>
-              <a:spcAft>
-                <a:spcPts val="200"/>
-              </a:spcAft>
-            </a:pPr>
-            <a:r>
-              <a:rPr lang="en-US">
-                <a:solidFill>
-                  <a:srgbClr val="000000"/>
-                </a:solidFill>
-                <a:latin typeface="Calibri" panose="020F0502020204030204" pitchFamily="34" charset="0"/>
-              </a:rPr>
-              <a:t>A second friend makes the same claim and takes a 6-cup test.  Test H</a:t>
-            </a:r>
-            <a:r>
-              <a:rPr lang="en-US" baseline="-25000">
-                <a:solidFill>
-                  <a:srgbClr val="000000"/>
-                </a:solidFill>
-                <a:latin typeface="Calibri" panose="020F0502020204030204" pitchFamily="34" charset="0"/>
-              </a:rPr>
-              <a:t>0</a:t>
-            </a:r>
-            <a:r>
-              <a:rPr lang="en-US">
-                <a:solidFill>
-                  <a:srgbClr val="000000"/>
-                </a:solidFill>
-                <a:latin typeface="Calibri" panose="020F0502020204030204" pitchFamily="34" charset="0"/>
-              </a:rPr>
-              <a:t>: p = 0.5 against H</a:t>
-            </a:r>
-            <a:r>
-              <a:rPr lang="en-US" baseline="-25000">
-                <a:solidFill>
-                  <a:srgbClr val="000000"/>
-                </a:solidFill>
-                <a:latin typeface="Calibri" panose="020F0502020204030204" pitchFamily="34" charset="0"/>
-              </a:rPr>
-              <a:t>A</a:t>
-            </a:r>
-            <a:r>
-              <a:rPr lang="en-US">
-                <a:solidFill>
-                  <a:srgbClr val="000000"/>
-                </a:solidFill>
-                <a:latin typeface="Calibri" panose="020F0502020204030204" pitchFamily="34" charset="0"/>
-              </a:rPr>
-              <a:t>: p &gt; 0.5 at α = 0.05.</a:t>
-            </a:r>
-          </a:p>
-        </p:txBody>
-      </p:sp>
-      <p:sp>
-        <p:nvSpPr>
-          <p:cNvPr id="9" name="Numbers">
-            <a:extLst>
-              <a:ext uri="{FF2B5EF4-FFF2-40B4-BE49-F238E27FC236}">
-                <a16:creationId xmlns:a16="http://schemas.microsoft.com/office/drawing/2014/main" id="{C419F151-05B2-3E4B-BAE8-BB1F06D9D1FD}"/>
-              </a:ext>
-            </a:extLst>
-          </p:cNvPr>
-          <p:cNvSpPr txBox="1"/>
-          <p:nvPr/>
-        </p:nvSpPr>
-        <p:spPr>
-          <a:xfrm>
-            <a:off x="762000" y="2286000"/>
-            <a:ext cx="10668000" cy="400110"/>
-          </a:xfrm>
-          <a:prstGeom prst="rect">
-            <a:avLst/>
-          </a:prstGeom>
-          <a:noFill/>
-        </p:spPr>
-        <p:txBody>
-          <a:bodyPr vert="horz" wrap="square" rtlCol="0">
-            <a:spAutoFit/>
-          </a:bodyPr>
-          <a:lstStyle/>
-          <a:p>
-            <a:pPr>
-              <a:spcAft>
-                <a:spcPts val="200"/>
-              </a:spcAft>
-            </a:pPr>
-            <a:r>
-              <a:rPr lang="en-US" sz="2000" b="1">
-                <a:solidFill>
-                  <a:srgbClr val="000000"/>
-                </a:solidFill>
-                <a:latin typeface="Calibri" panose="020F0502020204030204" pitchFamily="34" charset="0"/>
-              </a:rPr>
-              <a:t>roommate:  8 of 8 correct;      friend:  4 of 6 correct</a:t>
-            </a:r>
-          </a:p>
-        </p:txBody>
-      </p:sp>
-      <p:sp>
-        <p:nvSpPr>
-          <p:cNvPr id="10" name="Question">
-            <a:extLst>
-              <a:ext uri="{FF2B5EF4-FFF2-40B4-BE49-F238E27FC236}">
-                <a16:creationId xmlns:a16="http://schemas.microsoft.com/office/drawing/2014/main" id="{B31E395F-B84E-D1E9-D22A-222467FC4105}"/>
-              </a:ext>
-            </a:extLst>
-          </p:cNvPr>
-          <p:cNvSpPr txBox="1"/>
-          <p:nvPr/>
-        </p:nvSpPr>
-        <p:spPr>
-          <a:xfrm>
-            <a:off x="762000" y="2711510"/>
-            <a:ext cx="10668000" cy="974626"/>
-          </a:xfrm>
-          <a:prstGeom prst="rect">
-            <a:avLst/>
-          </a:prstGeom>
-          <a:noFill/>
-        </p:spPr>
-        <p:txBody>
-          <a:bodyPr vert="horz" wrap="square" rtlCol="0">
-            <a:spAutoFit/>
-          </a:bodyPr>
-          <a:lstStyle/>
-          <a:p>
-            <a:pPr>
-              <a:spcAft>
-                <a:spcPts val="200"/>
-              </a:spcAft>
-            </a:pPr>
-            <a:r>
-              <a:rPr lang="en-US" b="1">
-                <a:solidFill>
-                  <a:srgbClr val="C00000"/>
-                </a:solidFill>
-                <a:latin typeface="Calibri" panose="020F0502020204030204" pitchFamily="34" charset="0"/>
-              </a:rPr>
-              <a:t>(a)  If H</a:t>
-            </a:r>
-            <a:r>
-              <a:rPr lang="en-US" b="1" baseline="-25000">
-                <a:solidFill>
-                  <a:srgbClr val="C00000"/>
-                </a:solidFill>
-                <a:latin typeface="Calibri" panose="020F0502020204030204" pitchFamily="34" charset="0"/>
-              </a:rPr>
-              <a:t>0</a:t>
-            </a:r>
-            <a:r>
-              <a:rPr lang="en-US" b="1">
-                <a:solidFill>
-                  <a:srgbClr val="C00000"/>
-                </a:solidFill>
-                <a:latin typeface="Calibri" panose="020F0502020204030204" pitchFamily="34" charset="0"/>
-              </a:rPr>
-              <a:t> is true, what is the P-value for each?</a:t>
-            </a:r>
-          </a:p>
-          <a:p>
-            <a:pPr>
-              <a:spcAft>
-                <a:spcPts val="200"/>
-              </a:spcAft>
-            </a:pPr>
-            <a:r>
-              <a:rPr lang="en-US" b="1">
-                <a:solidFill>
-                  <a:srgbClr val="C00000"/>
-                </a:solidFill>
-                <a:latin typeface="Calibri" panose="020F0502020204030204" pitchFamily="34" charset="0"/>
-              </a:rPr>
-              <a:t>(b)  What is the decision for each?</a:t>
-            </a:r>
-          </a:p>
-          <a:p>
-            <a:pPr>
-              <a:spcAft>
-                <a:spcPts val="200"/>
-              </a:spcAft>
-            </a:pPr>
-            <a:r>
-              <a:rPr lang="en-US" b="1">
-                <a:solidFill>
-                  <a:srgbClr val="C00000"/>
-                </a:solidFill>
-                <a:latin typeface="Calibri" panose="020F0502020204030204" pitchFamily="34" charset="0"/>
-              </a:rPr>
-              <a:t>(c)  If 256 people took the 8-cup test by pure guessing, how many would go 8 for 8?</a:t>
-            </a:r>
-          </a:p>
-        </p:txBody>
-      </p:sp>
-      <p:sp>
-        <p:nvSpPr>
-          <p:cNvPr id="11" name="Result">
-            <a:extLst>
-              <a:ext uri="{FF2B5EF4-FFF2-40B4-BE49-F238E27FC236}">
-                <a16:creationId xmlns:a16="http://schemas.microsoft.com/office/drawing/2014/main" id="{5A70F68E-0D93-07B8-82B2-4D8F2F681D0D}"/>
-              </a:ext>
-            </a:extLst>
-          </p:cNvPr>
-          <p:cNvSpPr/>
-          <p:nvPr/>
-        </p:nvSpPr>
-        <p:spPr>
-          <a:xfrm>
-            <a:off x="762000" y="3838536"/>
-            <a:ext cx="10668000" cy="1409700"/>
-          </a:xfrm>
-          <a:prstGeom prst="roundRect">
-            <a:avLst>
-              <a:gd name="adj" fmla="val 4000"/>
-            </a:avLst>
-          </a:prstGeom>
-          <a:solidFill>
-            <a:srgbClr val="F2F6FC"/>
-          </a:solidFill>
-          <a:ln w="15875">
-            <a:solidFill>
-              <a:srgbClr val="4472C4"/>
-            </a:solidFill>
-          </a:ln>
-        </p:spPr>
-        <p:style>
-          <a:lnRef idx="2">
-            <a:schemeClr val="accent1">
-              <a:shade val="15000"/>
-            </a:schemeClr>
-          </a:lnRef>
-          <a:fillRef idx="1">
-            <a:schemeClr val="accent1"/>
-          </a:fillRef>
-          <a:effectRef idx="0">
-            <a:schemeClr val="accent1"/>
-          </a:effectRef>
-          <a:fontRef idx="minor">
-            <a:schemeClr val="lt1"/>
-          </a:fontRef>
-        </p:style>
-        <p:txBody>
-          <a:bodyPr wrap="square" lIns="152400" tIns="76200" rIns="152400" bIns="76200" rtlCol="0" anchor="ctr">
-            <a:spAutoFit/>
-          </a:bodyPr>
-          <a:lstStyle/>
-          <a:p>
-            <a:r>
-              <a:rPr lang="en-US" sz="2000" b="1">
-                <a:solidFill>
-                  <a:srgbClr val="C00000"/>
-                </a:solidFill>
-                <a:latin typeface="Calibri" panose="020F0502020204030204" pitchFamily="34" charset="0"/>
-              </a:rPr>
-              <a:t>(a)  roommate:  P(8 of 8 | H</a:t>
-            </a:r>
-            <a:r>
-              <a:rPr lang="en-US" sz="2000" b="1" baseline="-25000">
-                <a:solidFill>
-                  <a:srgbClr val="C00000"/>
-                </a:solidFill>
-                <a:latin typeface="Calibri" panose="020F0502020204030204" pitchFamily="34" charset="0"/>
-              </a:rPr>
-              <a:t>0</a:t>
-            </a:r>
-            <a:r>
-              <a:rPr lang="en-US" sz="2000" b="1">
-                <a:solidFill>
-                  <a:srgbClr val="C00000"/>
-                </a:solidFill>
-                <a:latin typeface="Calibri" panose="020F0502020204030204" pitchFamily="34" charset="0"/>
-              </a:rPr>
-              <a:t> true) = 0.5⁸ ≈ 0.004</a:t>
-            </a:r>
-          </a:p>
-          <a:p>
-            <a:r>
-              <a:rPr lang="en-US" sz="2000" b="1">
-                <a:solidFill>
-                  <a:srgbClr val="C00000"/>
-                </a:solidFill>
-                <a:latin typeface="Calibri" panose="020F0502020204030204" pitchFamily="34" charset="0"/>
-              </a:rPr>
-              <a:t>       friend:  P(4 or more of 6 | H</a:t>
-            </a:r>
-            <a:r>
-              <a:rPr lang="en-US" sz="2000" b="1" baseline="-25000">
-                <a:solidFill>
-                  <a:srgbClr val="C00000"/>
-                </a:solidFill>
-                <a:latin typeface="Calibri" panose="020F0502020204030204" pitchFamily="34" charset="0"/>
-              </a:rPr>
-              <a:t>0</a:t>
-            </a:r>
-            <a:r>
-              <a:rPr lang="en-US" sz="2000" b="1">
-                <a:solidFill>
-                  <a:srgbClr val="C00000"/>
-                </a:solidFill>
-                <a:latin typeface="Calibri" panose="020F0502020204030204" pitchFamily="34" charset="0"/>
-              </a:rPr>
-              <a:t> true) = 22/64 ≈ 0.34</a:t>
-            </a:r>
-          </a:p>
-          <a:p>
-            <a:r>
-              <a:rPr lang="en-US" sz="2000" b="1">
-                <a:solidFill>
-                  <a:srgbClr val="C00000"/>
-                </a:solidFill>
-                <a:latin typeface="Calibri" panose="020F0502020204030204" pitchFamily="34" charset="0"/>
-              </a:rPr>
-              <a:t>(b)  roommate:  0.004 &lt; 0.05, reject H</a:t>
-            </a:r>
-            <a:r>
-              <a:rPr lang="en-US" sz="2000" b="1" baseline="-25000">
-                <a:solidFill>
-                  <a:srgbClr val="C00000"/>
-                </a:solidFill>
-                <a:latin typeface="Calibri" panose="020F0502020204030204" pitchFamily="34" charset="0"/>
-              </a:rPr>
-              <a:t>0</a:t>
-            </a:r>
-            <a:r>
-              <a:rPr lang="en-US" sz="2000" b="1">
-                <a:solidFill>
-                  <a:srgbClr val="C00000"/>
-                </a:solidFill>
-                <a:latin typeface="Calibri" panose="020F0502020204030204" pitchFamily="34" charset="0"/>
-              </a:rPr>
-              <a:t>;     friend:  0.34 ≥ 0.05, do not reject H</a:t>
-            </a:r>
-            <a:r>
-              <a:rPr lang="en-US" sz="2000" b="1" baseline="-25000">
-                <a:solidFill>
-                  <a:srgbClr val="C00000"/>
-                </a:solidFill>
-                <a:latin typeface="Calibri" panose="020F0502020204030204" pitchFamily="34" charset="0"/>
-              </a:rPr>
-              <a:t>0</a:t>
-            </a:r>
-          </a:p>
-          <a:p>
-            <a:r>
-              <a:rPr lang="en-US" sz="2000" b="1">
-                <a:solidFill>
-                  <a:srgbClr val="C00000"/>
-                </a:solidFill>
-                <a:latin typeface="Calibri" panose="020F0502020204030204" pitchFamily="34" charset="0"/>
-              </a:rPr>
-              <a:t>(c)  About 1:  a small P-value means rare luck or a false H</a:t>
-            </a:r>
-            <a:r>
-              <a:rPr lang="en-US" sz="2000" b="1" baseline="-25000">
-                <a:solidFill>
-                  <a:srgbClr val="C00000"/>
-                </a:solidFill>
-                <a:latin typeface="Calibri" panose="020F0502020204030204" pitchFamily="34" charset="0"/>
-              </a:rPr>
-              <a:t>0</a:t>
-            </a:r>
-            <a:r>
-              <a:rPr lang="en-US" sz="2000" b="1">
-                <a:solidFill>
-                  <a:srgbClr val="C00000"/>
-                </a:solidFill>
-                <a:latin typeface="Calibri" panose="020F0502020204030204" pitchFamily="34" charset="0"/>
-              </a:rPr>
-              <a:t>, and we can’t be sure which</a:t>
-            </a:r>
-          </a:p>
-        </p:txBody>
-      </p:sp>
-    </p:spTree>
-    <p:extLst>
-      <p:ext uri="{BB962C8B-B14F-4D97-AF65-F5344CB8AC3E}">
-        <p14:creationId xmlns:p14="http://schemas.microsoft.com/office/powerpoint/2010/main" val="94102795"/>
-      </p:ext>
-    </p:extLst>
-  </p:cSld>
-  <p:clrMapOvr>
-    <a:masterClrMapping/>
-  </p:clrMapOvr>
-  <p:timing>
-    <p:tnLst>
-      <p:par>
-        <p:cTn id="1" dur="indefinite" restart="never" nodeType="tmRoot">
-          <p:childTnLst>
-            <p:seq concurrent="1" nextAc="seek">
-              <p:cTn id="2" dur="indefinite" nodeType="mainSeq">
-                <p:childTnLst>
-                  <p:par>
-                    <p:cTn id="3" fill="hold">
-                      <p:stCondLst>
-                        <p:cond delay="indefinite"/>
-                      </p:stCondLst>
-                      <p:childTnLst>
-                        <p:par>
-                          <p:cTn id="4" fill="hold">
-                            <p:stCondLst>
-                              <p:cond delay="0"/>
-                            </p:stCondLst>
-                            <p:childTnLst>
-                              <p:par>
-                                <p:cTn id="5" presetID="1" presetClass="entr" presetSubtype="0" fill="hold" grpId="0" nodeType="clickEffect">
-                                  <p:stCondLst>
-                                    <p:cond delay="0"/>
-                                  </p:stCondLst>
-                                  <p:childTnLst>
-                                    <p:set>
-                                      <p:cBhvr>
-                                        <p:cTn id="6" dur="1" fill="hold">
-                                          <p:stCondLst>
-                                            <p:cond delay="0"/>
-                                          </p:stCondLst>
-                                        </p:cTn>
-                                        <p:tgtEl>
-                                          <p:spTgt spid="11"/>
-                                        </p:tgtEl>
-                                        <p:attrNameLst>
-                                          <p:attrName>style.visibility</p:attrName>
-                                        </p:attrNameLst>
-                                      </p:cBhvr>
-                                      <p:to>
-                                        <p:strVal val="visible"/>
-                                      </p:to>
-                                    </p:set>
-                                  </p:childTnLst>
-                                </p:cTn>
-                              </p:par>
-                            </p:childTnLst>
-                          </p:cTn>
-                        </p:par>
-                      </p:childTnLst>
-                    </p:cTn>
-                  </p:par>
-                </p:childTnLst>
-              </p:cTn>
-              <p:prevCondLst>
-                <p:cond evt="onPrev" delay="0">
-                  <p:tgtEl>
-                    <p:sldTgt/>
-                  </p:tgtEl>
-                </p:cond>
-              </p:prevCondLst>
-              <p:nextCondLst>
-                <p:cond evt="onNext" delay="0">
-                  <p:tgtEl>
-                    <p:sldTgt/>
-                  </p:tgtEl>
-                </p:cond>
-              </p:nextCondLst>
-            </p:seq>
-          </p:childTnLst>
-        </p:cTn>
-      </p:par>
-    </p:tnLst>
-    <p:bldLst>
-      <p:bldP spid="11" grpId="0" animBg="1"/>
-    </p:bldLst>
-  </p:timing>
-</p:sld>
-</file>
-
-<file path=ppt/slides/slide14.xml><?xml version="1.0" encoding="utf-8"?>
-<p:sld xmlns:a="http://schemas.openxmlformats.org/drawingml/2006/main" xmlns:r="http://schemas.openxmlformats.org/officeDocument/2006/relationships" xmlns:p="http://schemas.openxmlformats.org/presentationml/2006/main">
-  <p:cSld>
-    <p:spTree>
-      <p:nvGrpSpPr>
-        <p:cNvPr id="1" name=""/>
-        <p:cNvGrpSpPr/>
-        <p:nvPr/>
-      </p:nvGrpSpPr>
-      <p:grpSpPr>
-        <a:xfrm>
-          <a:off x="0" y="0"/>
-          <a:ext cx="0" cy="0"/>
-          <a:chOff x="0" y="0"/>
-          <a:chExt cx="0" cy="0"/>
-        </a:xfrm>
-      </p:grpSpPr>
-      <p:sp>
-        <p:nvSpPr>
-          <p:cNvPr id="2" name="Title 1">
-            <a:extLst>
-              <a:ext uri="{FF2B5EF4-FFF2-40B4-BE49-F238E27FC236}">
-                <a16:creationId xmlns:a16="http://schemas.microsoft.com/office/drawing/2014/main" id="{C08D30B1-1864-30EF-7EAB-9BEE656C0012}"/>
-              </a:ext>
-            </a:extLst>
-          </p:cNvPr>
-          <p:cNvSpPr>
-            <a:spLocks noGrp="1"/>
-          </p:cNvSpPr>
-          <p:nvPr>
-            <p:ph type="title"/>
-          </p:nvPr>
-        </p:nvSpPr>
-        <p:spPr/>
-        <p:txBody>
-          <a:bodyPr>
-            <a:noAutofit/>
-          </a:bodyPr>
-          <a:lstStyle/>
-          <a:p>
-            <a:r>
-              <a:rPr lang="en-US">
-                <a:solidFill>
-                  <a:srgbClr val="1F3864"/>
-                </a:solidFill>
-              </a:rPr>
-              <a:t>Which tail is the P-value?</a:t>
-            </a:r>
-          </a:p>
-        </p:txBody>
-      </p:sp>
-      <p:sp>
-        <p:nvSpPr>
-          <p:cNvPr id="4" name="Slide Number Placeholder 3">
-            <a:extLst>
-              <a:ext uri="{FF2B5EF4-FFF2-40B4-BE49-F238E27FC236}">
-                <a16:creationId xmlns:a16="http://schemas.microsoft.com/office/drawing/2014/main" id="{3F875068-D051-44AE-498E-1BEBEDE3A7C8}"/>
-              </a:ext>
-            </a:extLst>
-          </p:cNvPr>
-          <p:cNvSpPr>
-            <a:spLocks noGrp="1"/>
-          </p:cNvSpPr>
-          <p:nvPr>
-            <p:ph type="sldNum" sz="quarter" idx="12"/>
-          </p:nvPr>
-        </p:nvSpPr>
-        <p:spPr/>
-        <p:txBody>
-          <a:bodyPr/>
-          <a:lstStyle/>
-          <a:p>
-            <a:fld id="{A80A81DD-F10A-4B1C-963A-0ABBB4865886}" type="slidenum">
-              <a:rPr lang="en-US" sz="1600" smtClean="0"/>
-              <a:t>14</a:t>
-            </a:fld>
-            <a:endParaRPr lang="en-US" sz="1600"/>
-          </a:p>
-        </p:txBody>
-      </p:sp>
-      <p:sp>
-        <p:nvSpPr>
-          <p:cNvPr id="3" name="Title rule">
-            <a:extLst>
-              <a:ext uri="{FF2B5EF4-FFF2-40B4-BE49-F238E27FC236}">
-                <a16:creationId xmlns:a16="http://schemas.microsoft.com/office/drawing/2014/main" id="{30656AA8-9645-F028-C769-A313710853CC}"/>
-              </a:ext>
-            </a:extLst>
-          </p:cNvPr>
-          <p:cNvSpPr/>
-          <p:nvPr/>
-        </p:nvSpPr>
-        <p:spPr>
-          <a:xfrm>
-            <a:off x="838200" y="1600200"/>
-            <a:ext cx="10515600" cy="38100"/>
-          </a:xfrm>
-          <a:prstGeom prst="rect">
-            <a:avLst/>
-          </a:prstGeom>
-          <a:solidFill>
-            <a:srgbClr val="4472C4"/>
-          </a:solidFill>
-          <a:ln w="12700" cap="flat" cmpd="sng" algn="ctr">
-            <a:noFill/>
-            <a:prstDash val="solid"/>
-            <a:miter lim="800000"/>
-          </a:ln>
-          <a:effectLst/>
-          <a:extLst>
-            <a:ext uri="{91240B29-F687-4F45-9708-019B960494DF}">
-              <a14:hiddenLine xmlns:a14="http://schemas.microsoft.com/office/drawing/2010/main" w="12700" cap="flat" cmpd="sng" algn="ctr">
-                <a:solidFill>
-                  <a:schemeClr val="accent1">
-                    <a:shade val="15000"/>
-                  </a:schemeClr>
-                </a:solidFill>
-                <a:prstDash val="solid"/>
-                <a:miter lim="800000"/>
-              </a14:hiddenLine>
-            </a:ext>
-          </a:extLst>
-        </p:spPr>
-        <p:style>
-          <a:lnRef idx="2">
-            <a:schemeClr val="accent1">
-              <a:shade val="15000"/>
-            </a:schemeClr>
-          </a:lnRef>
-          <a:fillRef idx="1">
-            <a:schemeClr val="accent1"/>
-          </a:fillRef>
-          <a:effectRef idx="0">
-            <a:schemeClr val="accent1"/>
-          </a:effectRef>
-          <a:fontRef idx="minor">
-            <a:schemeClr val="lt1"/>
-          </a:fontRef>
-        </p:style>
-        <p:txBody>
-          <a:bodyPr rtlCol="0" anchor="ctr"/>
-          <a:lstStyle/>
-          <a:p>
-            <a:pPr algn="ctr"/>
-            <a:endParaRPr lang="en-US"/>
-          </a:p>
-        </p:txBody>
-      </p:sp>
-      <p:sp>
-        <p:nvSpPr>
-          <p:cNvPr id="8" name="Context">
-            <a:extLst>
-              <a:ext uri="{FF2B5EF4-FFF2-40B4-BE49-F238E27FC236}">
-                <a16:creationId xmlns:a16="http://schemas.microsoft.com/office/drawing/2014/main" id="{71E3EA8C-31B4-DAD4-BC4A-65D72E59AD46}"/>
-              </a:ext>
-            </a:extLst>
-          </p:cNvPr>
-          <p:cNvSpPr txBox="1"/>
-          <p:nvPr/>
-        </p:nvSpPr>
-        <p:spPr>
-          <a:xfrm>
-            <a:off x="762000" y="1879600"/>
-            <a:ext cx="10668000" cy="369332"/>
-          </a:xfrm>
-          <a:prstGeom prst="rect">
-            <a:avLst/>
-          </a:prstGeom>
-          <a:noFill/>
-        </p:spPr>
-        <p:txBody>
-          <a:bodyPr vert="horz" wrap="square" rtlCol="0">
-            <a:spAutoFit/>
-          </a:bodyPr>
-          <a:lstStyle/>
-          <a:p>
-            <a:pPr>
-              <a:spcAft>
-                <a:spcPts val="200"/>
-              </a:spcAft>
-            </a:pPr>
-            <a:r>
-              <a:rPr lang="en-US">
-                <a:solidFill>
-                  <a:srgbClr val="000000"/>
-                </a:solidFill>
-                <a:latin typeface="Calibri" panose="020F0502020204030204" pitchFamily="34" charset="0"/>
-              </a:rPr>
-              <a:t>Polls put Candidate X at 52%.  Our poll of 1,000 likely voters finds 49.0%, so testing H</a:t>
-            </a:r>
-            <a:r>
-              <a:rPr lang="en-US" baseline="-25000">
-                <a:solidFill>
-                  <a:srgbClr val="000000"/>
-                </a:solidFill>
-                <a:latin typeface="Calibri" panose="020F0502020204030204" pitchFamily="34" charset="0"/>
-              </a:rPr>
-              <a:t>0</a:t>
-            </a:r>
-            <a:r>
-              <a:rPr lang="en-US">
-                <a:solidFill>
-                  <a:srgbClr val="000000"/>
-                </a:solidFill>
-                <a:latin typeface="Calibri" panose="020F0502020204030204" pitchFamily="34" charset="0"/>
-              </a:rPr>
-              <a:t>: p = 0.52 gives z</a:t>
-            </a:r>
-            <a:r>
-              <a:rPr lang="en-US" baseline="-25000">
-                <a:solidFill>
-                  <a:srgbClr val="000000"/>
-                </a:solidFill>
-                <a:latin typeface="Calibri" panose="020F0502020204030204" pitchFamily="34" charset="0"/>
-              </a:rPr>
-              <a:t>obs</a:t>
-            </a:r>
-            <a:r>
-              <a:rPr lang="en-US">
-                <a:solidFill>
-                  <a:srgbClr val="000000"/>
-                </a:solidFill>
-                <a:latin typeface="Calibri" panose="020F0502020204030204" pitchFamily="34" charset="0"/>
-              </a:rPr>
-              <a:t> = −1.90.</a:t>
-            </a:r>
-          </a:p>
-        </p:txBody>
-      </p:sp>
-      <p:sp>
-        <p:nvSpPr>
-          <p:cNvPr id="10" name="Question">
-            <a:extLst>
-              <a:ext uri="{FF2B5EF4-FFF2-40B4-BE49-F238E27FC236}">
-                <a16:creationId xmlns:a16="http://schemas.microsoft.com/office/drawing/2014/main" id="{B31E395F-B84E-D1E9-D22A-222467FC4105}"/>
-              </a:ext>
-            </a:extLst>
-          </p:cNvPr>
-          <p:cNvSpPr txBox="1"/>
-          <p:nvPr/>
-        </p:nvSpPr>
-        <p:spPr>
-          <a:xfrm>
-            <a:off x="762000" y="2274332"/>
-            <a:ext cx="10668000" cy="369332"/>
-          </a:xfrm>
-          <a:prstGeom prst="rect">
-            <a:avLst/>
-          </a:prstGeom>
-          <a:noFill/>
-        </p:spPr>
-        <p:txBody>
-          <a:bodyPr vert="horz" wrap="square" rtlCol="0">
-            <a:spAutoFit/>
-          </a:bodyPr>
-          <a:lstStyle/>
-          <a:p>
-            <a:pPr>
-              <a:spcAft>
-                <a:spcPts val="200"/>
-              </a:spcAft>
-            </a:pPr>
-            <a:r>
-              <a:rPr lang="en-US" b="1">
-                <a:solidFill>
-                  <a:srgbClr val="C00000"/>
-                </a:solidFill>
-                <a:latin typeface="Calibri" panose="020F0502020204030204" pitchFamily="34" charset="0"/>
-              </a:rPr>
-              <a:t>What is the P-value under each H</a:t>
-            </a:r>
-            <a:r>
-              <a:rPr lang="en-US" b="1" baseline="-25000">
-                <a:solidFill>
-                  <a:srgbClr val="C00000"/>
-                </a:solidFill>
-                <a:latin typeface="Calibri" panose="020F0502020204030204" pitchFamily="34" charset="0"/>
-              </a:rPr>
-              <a:t>A</a:t>
-            </a:r>
-            <a:r>
-              <a:rPr lang="en-US" b="1">
-                <a:solidFill>
-                  <a:srgbClr val="C00000"/>
-                </a:solidFill>
-                <a:latin typeface="Calibri" panose="020F0502020204030204" pitchFamily="34" charset="0"/>
-              </a:rPr>
-              <a:t>?  Which ones reject H</a:t>
-            </a:r>
-            <a:r>
-              <a:rPr lang="en-US" b="1" baseline="-25000">
-                <a:solidFill>
-                  <a:srgbClr val="C00000"/>
-                </a:solidFill>
-                <a:latin typeface="Calibri" panose="020F0502020204030204" pitchFamily="34" charset="0"/>
-              </a:rPr>
-              <a:t>0</a:t>
-            </a:r>
-            <a:r>
-              <a:rPr lang="en-US" b="1">
-                <a:solidFill>
-                  <a:srgbClr val="C00000"/>
-                </a:solidFill>
-                <a:latin typeface="Calibri" panose="020F0502020204030204" pitchFamily="34" charset="0"/>
-              </a:rPr>
-              <a:t> at α = 0.05?</a:t>
-            </a:r>
-          </a:p>
-        </p:txBody>
-      </p:sp>
-      <p:sp>
-        <p:nvSpPr>
-          <p:cNvPr id="11" name="Result">
-            <a:extLst>
-              <a:ext uri="{FF2B5EF4-FFF2-40B4-BE49-F238E27FC236}">
-                <a16:creationId xmlns:a16="http://schemas.microsoft.com/office/drawing/2014/main" id="{5A70F68E-0D93-07B8-82B2-4D8F2F681D0D}"/>
-              </a:ext>
-            </a:extLst>
-          </p:cNvPr>
-          <p:cNvSpPr/>
-          <p:nvPr/>
-        </p:nvSpPr>
-        <p:spPr>
-          <a:xfrm>
-            <a:off x="762000" y="5285264"/>
-            <a:ext cx="10668000" cy="774700"/>
-          </a:xfrm>
-          <a:prstGeom prst="roundRect">
-            <a:avLst>
-              <a:gd name="adj" fmla="val 4000"/>
-            </a:avLst>
-          </a:prstGeom>
-          <a:solidFill>
-            <a:srgbClr val="F2F6FC"/>
-          </a:solidFill>
-          <a:ln w="15875">
-            <a:solidFill>
-              <a:srgbClr val="4472C4"/>
-            </a:solidFill>
-          </a:ln>
-        </p:spPr>
-        <p:style>
-          <a:lnRef idx="2">
-            <a:schemeClr val="accent1">
-              <a:shade val="15000"/>
-            </a:schemeClr>
-          </a:lnRef>
-          <a:fillRef idx="1">
-            <a:schemeClr val="accent1"/>
-          </a:fillRef>
-          <a:effectRef idx="0">
-            <a:schemeClr val="accent1"/>
-          </a:effectRef>
-          <a:fontRef idx="minor">
-            <a:schemeClr val="lt1"/>
-          </a:fontRef>
-        </p:style>
-        <p:txBody>
-          <a:bodyPr wrap="square" lIns="152400" tIns="76200" rIns="152400" bIns="76200" rtlCol="0" anchor="ctr">
-            <a:spAutoFit/>
-          </a:bodyPr>
-          <a:lstStyle/>
-          <a:p>
-            <a:r>
-              <a:rPr lang="en-US" sz="2000" b="1">
-                <a:solidFill>
-                  <a:srgbClr val="C00000"/>
-                </a:solidFill>
-                <a:latin typeface="Calibri" panose="020F0502020204030204" pitchFamily="34" charset="0"/>
-              </a:rPr>
-              <a:t>upper:  P(Z ≥ −1.90) = 0.971      lower:  P(Z ≤ −1.90) = 0.029      two:  2 × 0.029 = 0.057</a:t>
-            </a:r>
-          </a:p>
-          <a:p>
-            <a:r>
-              <a:rPr lang="en-US" sz="2000" b="1">
-                <a:solidFill>
-                  <a:srgbClr val="C00000"/>
-                </a:solidFill>
-                <a:latin typeface="Calibri" panose="020F0502020204030204" pitchFamily="34" charset="0"/>
-              </a:rPr>
-              <a:t>Only the lower-tailed test rejects H</a:t>
-            </a:r>
-            <a:r>
-              <a:rPr lang="en-US" sz="2000" b="1" baseline="-25000">
-                <a:solidFill>
-                  <a:srgbClr val="C00000"/>
-                </a:solidFill>
-                <a:latin typeface="Calibri" panose="020F0502020204030204" pitchFamily="34" charset="0"/>
-              </a:rPr>
-              <a:t>0</a:t>
-            </a:r>
-            <a:r>
-              <a:rPr lang="en-US" sz="2000" b="1">
-                <a:solidFill>
-                  <a:srgbClr val="C00000"/>
-                </a:solidFill>
-                <a:latin typeface="Calibri" panose="020F0502020204030204" pitchFamily="34" charset="0"/>
-              </a:rPr>
-              <a:t>:  H</a:t>
-            </a:r>
-            <a:r>
-              <a:rPr lang="en-US" sz="2000" b="1" baseline="-25000">
-                <a:solidFill>
-                  <a:srgbClr val="C00000"/>
-                </a:solidFill>
-                <a:latin typeface="Calibri" panose="020F0502020204030204" pitchFamily="34" charset="0"/>
-              </a:rPr>
-              <a:t>A</a:t>
-            </a:r>
-            <a:r>
-              <a:rPr lang="en-US" sz="2000" b="1">
-                <a:solidFill>
-                  <a:srgbClr val="C00000"/>
-                </a:solidFill>
-                <a:latin typeface="Calibri" panose="020F0502020204030204" pitchFamily="34" charset="0"/>
-              </a:rPr>
-              <a:t> must be set before seeing the data</a:t>
-            </a:r>
-          </a:p>
-        </p:txBody>
-      </p:sp>
-      <p:pic>
-        <p:nvPicPr>
-          <p:cNvPr id="6" name="l22_tails.png" descr="Three standard normal curves, each with the poll z observed of -1.90 marked. Left, for the alternative p greater than 0.52: everything above -1.90 is shaded, almost the whole curve. Middle, p less than 0.52: the small lower tail below -1.90 is shaded. Right, p not equal to 0.52: both tails beyond -1.90 and 1.90 are shaded.">
-            <a:extLst>
-              <a:ext uri="{FF2B5EF4-FFF2-40B4-BE49-F238E27FC236}">
-                <a16:creationId xmlns:a16="http://schemas.microsoft.com/office/drawing/2014/main" id="{86ACFF03-76A9-D68A-F87A-420449EBAC2B}"/>
-              </a:ext>
-            </a:extLst>
-          </p:cNvPr>
-          <p:cNvPicPr>
-            <a:picLocks/>
-          </p:cNvPicPr>
-          <p:nvPr/>
-        </p:nvPicPr>
-        <p:blipFill>
-          <a:blip r:embed="rId2">
-            <a:extLst>
-              <a:ext uri="{28A0092B-C50C-407E-A947-70E740481C1C}">
-                <a14:useLocalDpi xmlns:a14="http://schemas.microsoft.com/office/drawing/2010/main" val="0"/>
-              </a:ext>
-            </a:extLst>
-          </a:blip>
-          <a:stretch>
-            <a:fillRect/>
-          </a:stretch>
-        </p:blipFill>
-        <p:spPr>
-          <a:xfrm>
-            <a:off x="762000" y="2694464"/>
-            <a:ext cx="10668000" cy="2540000"/>
-          </a:xfrm>
-          <a:prstGeom prst="rect">
-            <a:avLst/>
-          </a:prstGeom>
-        </p:spPr>
-      </p:pic>
-    </p:spTree>
-    <p:extLst>
-      <p:ext uri="{BB962C8B-B14F-4D97-AF65-F5344CB8AC3E}">
-        <p14:creationId xmlns:p14="http://schemas.microsoft.com/office/powerpoint/2010/main" val="802648944"/>
-      </p:ext>
-    </p:extLst>
-  </p:cSld>
-  <p:clrMapOvr>
-    <a:masterClrMapping/>
-  </p:clrMapOvr>
-  <p:timing>
-    <p:tnLst>
-      <p:par>
-        <p:cTn id="1" dur="indefinite" restart="never" nodeType="tmRoot">
-          <p:childTnLst>
-            <p:seq concurrent="1" nextAc="seek">
-              <p:cTn id="2" dur="indefinite" nodeType="mainSeq">
-                <p:childTnLst>
-                  <p:par>
-                    <p:cTn id="3" fill="hold">
-                      <p:stCondLst>
-                        <p:cond delay="indefinite"/>
-                      </p:stCondLst>
-                      <p:childTnLst>
-                        <p:par>
-                          <p:cTn id="4" fill="hold">
-                            <p:stCondLst>
-                              <p:cond delay="0"/>
-                            </p:stCondLst>
-                            <p:childTnLst>
-                              <p:par>
-                                <p:cTn id="5" presetID="1" presetClass="entr" presetSubtype="0" fill="hold" grpId="0" nodeType="clickEffect">
-                                  <p:stCondLst>
-                                    <p:cond delay="0"/>
-                                  </p:stCondLst>
-                                  <p:childTnLst>
-                                    <p:set>
-                                      <p:cBhvr>
-                                        <p:cTn id="6" dur="1" fill="hold">
-                                          <p:stCondLst>
-                                            <p:cond delay="0"/>
-                                          </p:stCondLst>
-                                        </p:cTn>
-                                        <p:tgtEl>
-                                          <p:spTgt spid="11"/>
-                                        </p:tgtEl>
-                                        <p:attrNameLst>
-                                          <p:attrName>style.visibility</p:attrName>
-                                        </p:attrNameLst>
-                                      </p:cBhvr>
-                                      <p:to>
-                                        <p:strVal val="visible"/>
-                                      </p:to>
-                                    </p:set>
-                                  </p:childTnLst>
-                                </p:cTn>
-                              </p:par>
-                            </p:childTnLst>
-                          </p:cTn>
-                        </p:par>
-                      </p:childTnLst>
-                    </p:cTn>
-                  </p:par>
-                </p:childTnLst>
-              </p:cTn>
-              <p:prevCondLst>
-                <p:cond evt="onPrev" delay="0">
-                  <p:tgtEl>
-                    <p:sldTgt/>
-                  </p:tgtEl>
-                </p:cond>
-              </p:prevCondLst>
-              <p:nextCondLst>
-                <p:cond evt="onNext" delay="0">
-                  <p:tgtEl>
-                    <p:sldTgt/>
-                  </p:tgtEl>
-                </p:cond>
-              </p:nextCondLst>
-            </p:seq>
-          </p:childTnLst>
-        </p:cTn>
-      </p:par>
-    </p:tnLst>
-    <p:bldLst>
-      <p:bldP spid="11" grpId="0" animBg="1"/>
-    </p:bldLst>
-  </p:timing>
-</p:sld>
-</file>
-
-<file path=ppt/slides/slide15.xml><?xml version="1.0" encoding="utf-8"?>
-<p:sld xmlns:a="http://schemas.openxmlformats.org/drawingml/2006/main" xmlns:r="http://schemas.openxmlformats.org/officeDocument/2006/relationships" xmlns:p="http://schemas.openxmlformats.org/presentationml/2006/main">
-  <p:cSld>
-    <p:spTree>
-      <p:nvGrpSpPr>
-        <p:cNvPr id="1" name=""/>
-        <p:cNvGrpSpPr/>
-        <p:nvPr/>
-      </p:nvGrpSpPr>
-      <p:grpSpPr>
-        <a:xfrm>
-          <a:off x="0" y="0"/>
-          <a:ext cx="0" cy="0"/>
-          <a:chOff x="0" y="0"/>
-          <a:chExt cx="0" cy="0"/>
-        </a:xfrm>
-      </p:grpSpPr>
-      <p:sp>
-        <p:nvSpPr>
-          <p:cNvPr id="2" name="Title 1">
-            <a:extLst>
-              <a:ext uri="{FF2B5EF4-FFF2-40B4-BE49-F238E27FC236}">
-                <a16:creationId xmlns:a16="http://schemas.microsoft.com/office/drawing/2014/main" id="{C08D30B1-1864-30EF-7EAB-9BEE656C0012}"/>
-              </a:ext>
-            </a:extLst>
-          </p:cNvPr>
-          <p:cNvSpPr>
-            <a:spLocks noGrp="1"/>
-          </p:cNvSpPr>
-          <p:nvPr>
-            <p:ph type="title"/>
-          </p:nvPr>
-        </p:nvSpPr>
-        <p:spPr/>
-        <p:txBody>
-          <a:bodyPr>
-            <a:noAutofit/>
-          </a:bodyPr>
-          <a:lstStyle/>
-          <a:p>
-            <a:r>
-              <a:rPr lang="en-US">
-                <a:solidFill>
-                  <a:srgbClr val="1F3864"/>
-                </a:solidFill>
-              </a:rPr>
-              <a:t>Data: 350,757 coin flips</a:t>
-            </a:r>
-          </a:p>
-        </p:txBody>
-      </p:sp>
-      <p:sp>
-        <p:nvSpPr>
-          <p:cNvPr id="4" name="Slide Number Placeholder 3">
-            <a:extLst>
-              <a:ext uri="{FF2B5EF4-FFF2-40B4-BE49-F238E27FC236}">
-                <a16:creationId xmlns:a16="http://schemas.microsoft.com/office/drawing/2014/main" id="{3F875068-D051-44AE-498E-1BEBEDE3A7C8}"/>
-              </a:ext>
-            </a:extLst>
-          </p:cNvPr>
-          <p:cNvSpPr>
-            <a:spLocks noGrp="1"/>
-          </p:cNvSpPr>
-          <p:nvPr>
-            <p:ph type="sldNum" sz="quarter" idx="12"/>
-          </p:nvPr>
-        </p:nvSpPr>
-        <p:spPr/>
-        <p:txBody>
-          <a:bodyPr/>
-          <a:lstStyle/>
-          <a:p>
-            <a:fld id="{A80A81DD-F10A-4B1C-963A-0ABBB4865886}" type="slidenum">
-              <a:rPr lang="en-US" sz="1600" smtClean="0"/>
-              <a:t>15</a:t>
-            </a:fld>
-            <a:endParaRPr lang="en-US" sz="1600"/>
-          </a:p>
-        </p:txBody>
-      </p:sp>
-      <p:sp>
-        <p:nvSpPr>
-          <p:cNvPr id="3" name="Title rule">
-            <a:extLst>
-              <a:ext uri="{FF2B5EF4-FFF2-40B4-BE49-F238E27FC236}">
-                <a16:creationId xmlns:a16="http://schemas.microsoft.com/office/drawing/2014/main" id="{30656AA8-9645-F028-C769-A313710853CC}"/>
-              </a:ext>
-            </a:extLst>
-          </p:cNvPr>
-          <p:cNvSpPr/>
-          <p:nvPr/>
-        </p:nvSpPr>
-        <p:spPr>
-          <a:xfrm>
-            <a:off x="838200" y="1600200"/>
-            <a:ext cx="10515600" cy="38100"/>
-          </a:xfrm>
-          <a:prstGeom prst="rect">
-            <a:avLst/>
-          </a:prstGeom>
-          <a:solidFill>
-            <a:srgbClr val="4472C4"/>
-          </a:solidFill>
-          <a:ln w="12700" cap="flat" cmpd="sng" algn="ctr">
-            <a:noFill/>
-            <a:prstDash val="solid"/>
-            <a:miter lim="800000"/>
-          </a:ln>
-          <a:effectLst/>
-          <a:extLst>
-            <a:ext uri="{91240B29-F687-4F45-9708-019B960494DF}">
-              <a14:hiddenLine xmlns:a14="http://schemas.microsoft.com/office/drawing/2010/main" w="12700" cap="flat" cmpd="sng" algn="ctr">
-                <a:solidFill>
-                  <a:schemeClr val="accent1">
-                    <a:shade val="15000"/>
-                  </a:schemeClr>
-                </a:solidFill>
-                <a:prstDash val="solid"/>
-                <a:miter lim="800000"/>
-              </a14:hiddenLine>
-            </a:ext>
-          </a:extLst>
-        </p:spPr>
-        <p:style>
-          <a:lnRef idx="2">
-            <a:schemeClr val="accent1">
-              <a:shade val="15000"/>
-            </a:schemeClr>
-          </a:lnRef>
-          <a:fillRef idx="1">
-            <a:schemeClr val="accent1"/>
-          </a:fillRef>
-          <a:effectRef idx="0">
-            <a:schemeClr val="accent1"/>
-          </a:effectRef>
-          <a:fontRef idx="minor">
-            <a:schemeClr val="lt1"/>
-          </a:fontRef>
-        </p:style>
-        <p:txBody>
-          <a:bodyPr rtlCol="0" anchor="ctr"/>
-          <a:lstStyle/>
-          <a:p>
-            <a:pPr algn="ctr"/>
-            <a:endParaRPr lang="en-US"/>
-          </a:p>
-        </p:txBody>
-      </p:sp>
-      <p:sp>
-        <p:nvSpPr>
-          <p:cNvPr id="8" name="Context">
-            <a:extLst>
-              <a:ext uri="{FF2B5EF4-FFF2-40B4-BE49-F238E27FC236}">
-                <a16:creationId xmlns:a16="http://schemas.microsoft.com/office/drawing/2014/main" id="{71E3EA8C-31B4-DAD4-BC4A-65D72E59AD46}"/>
-              </a:ext>
-            </a:extLst>
-          </p:cNvPr>
-          <p:cNvSpPr txBox="1"/>
-          <p:nvPr/>
-        </p:nvSpPr>
-        <p:spPr>
-          <a:xfrm>
-            <a:off x="762000" y="1879600"/>
-            <a:ext cx="10668000" cy="646331"/>
-          </a:xfrm>
-          <a:prstGeom prst="rect">
-            <a:avLst/>
-          </a:prstGeom>
-          <a:noFill/>
-        </p:spPr>
-        <p:txBody>
-          <a:bodyPr vert="horz" wrap="square" rtlCol="0">
-            <a:spAutoFit/>
-          </a:bodyPr>
-          <a:lstStyle/>
-          <a:p>
-            <a:pPr>
-              <a:spcAft>
-                <a:spcPts val="200"/>
-              </a:spcAft>
-            </a:pPr>
-            <a:r>
-              <a:rPr lang="en-US">
-                <a:solidFill>
-                  <a:srgbClr val="000000"/>
-                </a:solidFill>
-                <a:latin typeface="Calibri" panose="020F0502020204030204" pitchFamily="34" charset="0"/>
-              </a:rPr>
-              <a:t>A physics model predicts a flipped coin lands on the side it started on about 51% of the time.  Bartoš et al. (2025) had 48 people flip coins to test it.</a:t>
-            </a:r>
-          </a:p>
-        </p:txBody>
-      </p:sp>
-      <p:sp>
-        <p:nvSpPr>
-          <p:cNvPr id="9" name="Numbers">
-            <a:extLst>
-              <a:ext uri="{FF2B5EF4-FFF2-40B4-BE49-F238E27FC236}">
-                <a16:creationId xmlns:a16="http://schemas.microsoft.com/office/drawing/2014/main" id="{C419F151-05B2-3E4B-BAE8-BB1F06D9D1FD}"/>
-              </a:ext>
-            </a:extLst>
-          </p:cNvPr>
-          <p:cNvSpPr txBox="1"/>
-          <p:nvPr/>
-        </p:nvSpPr>
-        <p:spPr>
-          <a:xfrm>
-            <a:off x="762000" y="2551331"/>
-            <a:ext cx="10668000" cy="400110"/>
-          </a:xfrm>
-          <a:prstGeom prst="rect">
-            <a:avLst/>
-          </a:prstGeom>
-          <a:noFill/>
-        </p:spPr>
-        <p:txBody>
-          <a:bodyPr vert="horz" wrap="square" rtlCol="0">
-            <a:spAutoFit/>
-          </a:bodyPr>
-          <a:lstStyle/>
-          <a:p>
-            <a:pPr>
-              <a:spcAft>
-                <a:spcPts val="200"/>
-              </a:spcAft>
-            </a:pPr>
-            <a:r>
-              <a:rPr lang="en-US" sz="2000" b="1">
-                <a:solidFill>
-                  <a:srgbClr val="000000"/>
-                </a:solidFill>
-                <a:latin typeface="Calibri" panose="020F0502020204030204" pitchFamily="34" charset="0"/>
-              </a:rPr>
-              <a:t>X = 1 if a flip lands on the side it started on, and 0 otherwise</a:t>
-            </a:r>
-          </a:p>
-        </p:txBody>
-      </p:sp>
-      <p:sp>
-        <p:nvSpPr>
-          <p:cNvPr id="10" name="Question">
-            <a:extLst>
-              <a:ext uri="{FF2B5EF4-FFF2-40B4-BE49-F238E27FC236}">
-                <a16:creationId xmlns:a16="http://schemas.microsoft.com/office/drawing/2014/main" id="{B31E395F-B84E-D1E9-D22A-222467FC4105}"/>
-              </a:ext>
-            </a:extLst>
-          </p:cNvPr>
-          <p:cNvSpPr txBox="1"/>
-          <p:nvPr/>
-        </p:nvSpPr>
-        <p:spPr>
-          <a:xfrm>
-            <a:off x="762000" y="4678641"/>
-            <a:ext cx="10668000" cy="369332"/>
-          </a:xfrm>
-          <a:prstGeom prst="rect">
-            <a:avLst/>
-          </a:prstGeom>
-          <a:noFill/>
-        </p:spPr>
-        <p:txBody>
-          <a:bodyPr vert="horz" wrap="square" rtlCol="0">
-            <a:spAutoFit/>
-          </a:bodyPr>
-          <a:lstStyle/>
-          <a:p>
-            <a:pPr>
-              <a:spcAft>
-                <a:spcPts val="200"/>
-              </a:spcAft>
-            </a:pPr>
-            <a:r>
-              <a:rPr lang="en-US">
-                <a:solidFill>
-                  <a:srgbClr val="000000"/>
-                </a:solidFill>
-                <a:latin typeface="Calibri" panose="020F0502020204030204" pitchFamily="34" charset="0"/>
-              </a:rPr>
-              <a:t>Each person recorded the side facing up before and after every flip, and filmed it</a:t>
-            </a:r>
-          </a:p>
-        </p:txBody>
-      </p:sp>
-      <p:graphicFrame>
-        <p:nvGraphicFramePr>
-          <p:cNvPr id="5" name="Data table">
-            <a:extLst>
-              <a:ext uri="{FF2B5EF4-FFF2-40B4-BE49-F238E27FC236}">
-                <a16:creationId xmlns:a16="http://schemas.microsoft.com/office/drawing/2014/main" id="{107D57CA-D659-5E39-E6B7-B1821FDE1989}"/>
-              </a:ext>
-            </a:extLst>
-          </p:cNvPr>
-          <p:cNvGraphicFramePr>
-            <a:graphicFrameLocks noGrp="1"/>
-          </p:cNvGraphicFramePr>
-          <p:nvPr>
-            <p:extLst>
-              <p:ext uri="{D42A27DB-BD31-4B8C-83A1-F6EECF244321}">
-                <p14:modId xmlns:p14="http://schemas.microsoft.com/office/powerpoint/2010/main" val="1258285308"/>
-              </p:ext>
-            </p:extLst>
-          </p:nvPr>
-        </p:nvGraphicFramePr>
-        <p:xfrm>
-          <a:off x="762000" y="3053041"/>
-          <a:ext cx="8001000" cy="2133600"/>
-        </p:xfrm>
-        <a:graphic>
-          <a:graphicData uri="http://schemas.openxmlformats.org/drawingml/2006/table">
-            <a:tbl>
-              <a:tblPr firstRow="1" bandRow="1">
-                <a:tableStyleId>{3B4B98B0-60AC-42C2-AFA5-B58CD77FA1E5}</a:tableStyleId>
-              </a:tblPr>
-              <a:tblGrid>
-                <a:gridCol w="5969000">
-                  <a:extLst>
-                    <a:ext uri="{9D8B030D-6E8A-4147-A177-3AD203B41FA5}">
-                      <a16:colId xmlns:a16="http://schemas.microsoft.com/office/drawing/2014/main" val="330255408"/>
-                    </a:ext>
-                  </a:extLst>
-                </a:gridCol>
-                <a:gridCol w="1905000">
-                  <a:extLst>
-                    <a:ext uri="{9D8B030D-6E8A-4147-A177-3AD203B41FA5}">
-                      <a16:colId xmlns:a16="http://schemas.microsoft.com/office/drawing/2014/main" val="3431246229"/>
-                    </a:ext>
-                  </a:extLst>
-                </a:gridCol>
-              </a:tblGrid>
-              <a:tr h="304800">
-                <a:tc>
-                  <a:txBody>
-                    <a:bodyPr/>
-                    <a:lstStyle/>
-                    <a:p>
-                      <a:pPr algn="l"/>
-                      <a:r>
-                        <a:rPr lang="en-US" sz="1600" b="1">
-                          <a:latin typeface="Calibri" panose="020F0502020204030204" pitchFamily="34" charset="0"/>
-                        </a:rPr>
-                        <a:t>who flipped</a:t>
-                      </a:r>
-                    </a:p>
-                  </a:txBody>
-                  <a:tcPr marT="25400" marB="25400"/>
-                </a:tc>
-                <a:tc>
-                  <a:txBody>
-                    <a:bodyPr/>
-                    <a:lstStyle/>
-                    <a:p>
-                      <a:pPr algn="r"/>
-                      <a:r>
-                        <a:rPr lang="en-US" sz="1600" b="1">
-                          <a:latin typeface="Calibri" panose="020F0502020204030204" pitchFamily="34" charset="0"/>
-                        </a:rPr>
-                        <a:t>flips</a:t>
-                      </a:r>
-                    </a:p>
-                  </a:txBody>
-                  <a:tcPr marT="25400" marB="25400"/>
-                </a:tc>
-                <a:extLst>
-                  <a:ext uri="{0D108BD9-81ED-4DB2-BD59-A6C34878D82A}">
-                    <a16:rowId xmlns:a16="http://schemas.microsoft.com/office/drawing/2014/main" val="3735979105"/>
-                  </a:ext>
-                </a:extLst>
-              </a:tr>
-              <a:tr h="304800">
-                <a:tc>
-                  <a:txBody>
-                    <a:bodyPr/>
-                    <a:lstStyle/>
-                    <a:p>
-                      <a:pPr algn="l"/>
-                      <a:r>
-                        <a:rPr lang="en-US" sz="1600" b="0">
-                          <a:latin typeface="Calibri" panose="020F0502020204030204" pitchFamily="34" charset="0"/>
-                        </a:rPr>
-                        <a:t>students, for a thesis project</a:t>
-                      </a:r>
-                    </a:p>
-                  </a:txBody>
-                  <a:tcPr marT="25400" marB="25400"/>
-                </a:tc>
-                <a:tc>
-                  <a:txBody>
-                    <a:bodyPr/>
-                    <a:lstStyle/>
-                    <a:p>
-                      <a:pPr algn="r"/>
-                      <a:r>
-                        <a:rPr lang="en-US" sz="1600" b="0">
-                          <a:latin typeface="Calibri" panose="020F0502020204030204" pitchFamily="34" charset="0"/>
-                        </a:rPr>
-                        <a:t>75,036</a:t>
-                      </a:r>
-                    </a:p>
-                  </a:txBody>
-                  <a:tcPr marT="25400" marB="25400"/>
-                </a:tc>
-                <a:extLst>
-                  <a:ext uri="{0D108BD9-81ED-4DB2-BD59-A6C34878D82A}">
-                    <a16:rowId xmlns:a16="http://schemas.microsoft.com/office/drawing/2014/main" val="188483433"/>
-                  </a:ext>
-                </a:extLst>
-              </a:tr>
-              <a:tr h="304800">
-                <a:tc>
-                  <a:txBody>
-                    <a:bodyPr/>
-                    <a:lstStyle/>
-                    <a:p>
-                      <a:pPr algn="l"/>
-                      <a:r>
-                        <a:rPr lang="en-US" sz="1600" b="0">
-                          <a:latin typeface="Calibri" panose="020F0502020204030204" pitchFamily="34" charset="0"/>
-                        </a:rPr>
-                        <a:t>coin-flipping marathons (up to 12 hours)</a:t>
-                      </a:r>
-                    </a:p>
-                  </a:txBody>
-                  <a:tcPr marT="25400" marB="25400"/>
-                </a:tc>
-                <a:tc>
-                  <a:txBody>
-                    <a:bodyPr/>
-                    <a:lstStyle/>
-                    <a:p>
-                      <a:pPr algn="r"/>
-                      <a:r>
-                        <a:rPr lang="en-US" sz="1600" b="0">
-                          <a:latin typeface="Calibri" panose="020F0502020204030204" pitchFamily="34" charset="0"/>
-                        </a:rPr>
-                        <a:t>203,440</a:t>
-                      </a:r>
-                    </a:p>
-                  </a:txBody>
-                  <a:tcPr marT="25400" marB="25400"/>
-                </a:tc>
-                <a:extLst>
-                  <a:ext uri="{0D108BD9-81ED-4DB2-BD59-A6C34878D82A}">
-                    <a16:rowId xmlns:a16="http://schemas.microsoft.com/office/drawing/2014/main" val="1214692265"/>
-                  </a:ext>
-                </a:extLst>
-              </a:tr>
-              <a:tr h="304800">
-                <a:tc>
-                  <a:txBody>
-                    <a:bodyPr/>
-                    <a:lstStyle/>
-                    <a:p>
-                      <a:pPr algn="l"/>
-                      <a:r>
-                        <a:rPr lang="en-US" sz="1600" b="0">
-                          <a:latin typeface="Calibri" panose="020F0502020204030204" pitchFamily="34" charset="0"/>
-                        </a:rPr>
-                        <a:t>volunteers recruited online</a:t>
-                      </a:r>
-                    </a:p>
-                  </a:txBody>
-                  <a:tcPr marT="25400" marB="25400"/>
-                </a:tc>
-                <a:tc>
-                  <a:txBody>
-                    <a:bodyPr/>
-                    <a:lstStyle/>
-                    <a:p>
-                      <a:pPr algn="r"/>
-                      <a:r>
-                        <a:rPr lang="en-US" sz="1600" b="0">
-                          <a:latin typeface="Calibri" panose="020F0502020204030204" pitchFamily="34" charset="0"/>
-                        </a:rPr>
-                        <a:t>72,281</a:t>
-                      </a:r>
-                    </a:p>
-                  </a:txBody>
-                  <a:tcPr marT="25400" marB="25400"/>
-                </a:tc>
-                <a:extLst>
-                  <a:ext uri="{0D108BD9-81ED-4DB2-BD59-A6C34878D82A}">
-                    <a16:rowId xmlns:a16="http://schemas.microsoft.com/office/drawing/2014/main" val="2893545131"/>
-                  </a:ext>
-                </a:extLst>
-              </a:tr>
-              <a:tr h="304800">
-                <a:tc>
-                  <a:txBody>
-                    <a:bodyPr/>
-                    <a:lstStyle/>
-                    <a:p>
-                      <a:pPr algn="l"/>
-                      <a:r>
-                        <a:rPr lang="en-US" sz="1600" b="1">
-                          <a:latin typeface="Calibri" panose="020F0502020204030204" pitchFamily="34" charset="0"/>
-                        </a:rPr>
-                        <a:t>total</a:t>
-                      </a:r>
-                    </a:p>
-                  </a:txBody>
-                  <a:tcPr marT="25400" marB="25400"/>
-                </a:tc>
-                <a:tc>
-                  <a:txBody>
-                    <a:bodyPr/>
-                    <a:lstStyle/>
-                    <a:p>
-                      <a:pPr algn="r"/>
-                      <a:r>
-                        <a:rPr lang="en-US" sz="1600" b="1">
-                          <a:latin typeface="Calibri" panose="020F0502020204030204" pitchFamily="34" charset="0"/>
-                        </a:rPr>
-                        <a:t>350,757</a:t>
-                      </a:r>
-                    </a:p>
-                  </a:txBody>
-                  <a:tcPr marT="25400" marB="25400"/>
-                </a:tc>
-                <a:extLst>
-                  <a:ext uri="{0D108BD9-81ED-4DB2-BD59-A6C34878D82A}">
-                    <a16:rowId xmlns:a16="http://schemas.microsoft.com/office/drawing/2014/main" val="3525875763"/>
-                  </a:ext>
-                </a:extLst>
-              </a:tr>
-            </a:tbl>
-          </a:graphicData>
-        </a:graphic>
-      </p:graphicFrame>
-    </p:spTree>
-    <p:extLst>
-      <p:ext uri="{BB962C8B-B14F-4D97-AF65-F5344CB8AC3E}">
-        <p14:creationId xmlns:p14="http://schemas.microsoft.com/office/powerpoint/2010/main" val="480451647"/>
-      </p:ext>
-    </p:extLst>
-  </p:cSld>
-  <p:clrMapOvr>
-    <a:masterClrMapping/>
-  </p:clrMapOvr>
-</p:sld>
-</file>
-
-<file path=ppt/slides/slide16.xml><?xml version="1.0" encoding="utf-8"?>
-<p:sld xmlns:a="http://schemas.openxmlformats.org/drawingml/2006/main" xmlns:r="http://schemas.openxmlformats.org/officeDocument/2006/relationships" xmlns:p="http://schemas.openxmlformats.org/presentationml/2006/main">
-  <p:cSld>
-    <p:spTree>
-      <p:nvGrpSpPr>
-        <p:cNvPr id="1" name=""/>
-        <p:cNvGrpSpPr/>
-        <p:nvPr/>
-      </p:nvGrpSpPr>
-      <p:grpSpPr>
-        <a:xfrm>
-          <a:off x="0" y="0"/>
-          <a:ext cx="0" cy="0"/>
-          <a:chOff x="0" y="0"/>
-          <a:chExt cx="0" cy="0"/>
-        </a:xfrm>
-      </p:grpSpPr>
-      <p:sp>
-        <p:nvSpPr>
-          <p:cNvPr id="2" name="Title 1">
-            <a:extLst>
-              <a:ext uri="{FF2B5EF4-FFF2-40B4-BE49-F238E27FC236}">
-                <a16:creationId xmlns:a16="http://schemas.microsoft.com/office/drawing/2014/main" id="{C08D30B1-1864-30EF-7EAB-9BEE656C0012}"/>
-              </a:ext>
-            </a:extLst>
-          </p:cNvPr>
-          <p:cNvSpPr>
-            <a:spLocks noGrp="1"/>
-          </p:cNvSpPr>
-          <p:nvPr>
-            <p:ph type="title"/>
-          </p:nvPr>
-        </p:nvSpPr>
-        <p:spPr/>
-        <p:txBody>
-          <a:bodyPr>
-            <a:noAutofit/>
-          </a:bodyPr>
-          <a:lstStyle/>
-          <a:p>
-            <a:r>
-              <a:rPr lang="en-US">
-                <a:solidFill>
-                  <a:srgbClr val="1F3864"/>
-                </a:solidFill>
-              </a:rPr>
-              <a:t>Example: do coins land the way they started?</a:t>
-            </a:r>
-          </a:p>
-        </p:txBody>
-      </p:sp>
-      <p:sp>
-        <p:nvSpPr>
-          <p:cNvPr id="4" name="Slide Number Placeholder 3">
-            <a:extLst>
-              <a:ext uri="{FF2B5EF4-FFF2-40B4-BE49-F238E27FC236}">
-                <a16:creationId xmlns:a16="http://schemas.microsoft.com/office/drawing/2014/main" id="{3F875068-D051-44AE-498E-1BEBEDE3A7C8}"/>
-              </a:ext>
-            </a:extLst>
-          </p:cNvPr>
-          <p:cNvSpPr>
-            <a:spLocks noGrp="1"/>
-          </p:cNvSpPr>
-          <p:nvPr>
-            <p:ph type="sldNum" sz="quarter" idx="12"/>
-          </p:nvPr>
-        </p:nvSpPr>
-        <p:spPr/>
-        <p:txBody>
-          <a:bodyPr/>
-          <a:lstStyle/>
-          <a:p>
-            <a:fld id="{A80A81DD-F10A-4B1C-963A-0ABBB4865886}" type="slidenum">
-              <a:rPr lang="en-US" sz="1600" smtClean="0"/>
-              <a:t>16</a:t>
-            </a:fld>
-            <a:endParaRPr lang="en-US" sz="1600"/>
-          </a:p>
-        </p:txBody>
-      </p:sp>
-      <p:sp>
-        <p:nvSpPr>
-          <p:cNvPr id="3" name="Title rule">
-            <a:extLst>
-              <a:ext uri="{FF2B5EF4-FFF2-40B4-BE49-F238E27FC236}">
-                <a16:creationId xmlns:a16="http://schemas.microsoft.com/office/drawing/2014/main" id="{30656AA8-9645-F028-C769-A313710853CC}"/>
-              </a:ext>
-            </a:extLst>
-          </p:cNvPr>
-          <p:cNvSpPr/>
-          <p:nvPr/>
-        </p:nvSpPr>
-        <p:spPr>
-          <a:xfrm>
-            <a:off x="838200" y="1600200"/>
-            <a:ext cx="10515600" cy="38100"/>
-          </a:xfrm>
-          <a:prstGeom prst="rect">
-            <a:avLst/>
-          </a:prstGeom>
-          <a:solidFill>
-            <a:srgbClr val="4472C4"/>
-          </a:solidFill>
-          <a:ln w="12700" cap="flat" cmpd="sng" algn="ctr">
-            <a:noFill/>
-            <a:prstDash val="solid"/>
-            <a:miter lim="800000"/>
-          </a:ln>
-          <a:effectLst/>
-          <a:extLst>
-            <a:ext uri="{91240B29-F687-4F45-9708-019B960494DF}">
-              <a14:hiddenLine xmlns:a14="http://schemas.microsoft.com/office/drawing/2010/main" w="12700" cap="flat" cmpd="sng" algn="ctr">
-                <a:solidFill>
-                  <a:schemeClr val="accent1">
-                    <a:shade val="15000"/>
-                  </a:schemeClr>
-                </a:solidFill>
-                <a:prstDash val="solid"/>
-                <a:miter lim="800000"/>
-              </a14:hiddenLine>
-            </a:ext>
-          </a:extLst>
-        </p:spPr>
-        <p:style>
-          <a:lnRef idx="2">
-            <a:schemeClr val="accent1">
-              <a:shade val="15000"/>
-            </a:schemeClr>
-          </a:lnRef>
-          <a:fillRef idx="1">
-            <a:schemeClr val="accent1"/>
-          </a:fillRef>
-          <a:effectRef idx="0">
-            <a:schemeClr val="accent1"/>
-          </a:effectRef>
-          <a:fontRef idx="minor">
-            <a:schemeClr val="lt1"/>
-          </a:fontRef>
-        </p:style>
-        <p:txBody>
-          <a:bodyPr rtlCol="0" anchor="ctr"/>
-          <a:lstStyle/>
-          <a:p>
-            <a:pPr algn="ctr"/>
-            <a:endParaRPr lang="en-US"/>
-          </a:p>
-        </p:txBody>
-      </p:sp>
-      <p:sp>
-        <p:nvSpPr>
-          <p:cNvPr id="8" name="Context">
-            <a:extLst>
-              <a:ext uri="{FF2B5EF4-FFF2-40B4-BE49-F238E27FC236}">
-                <a16:creationId xmlns:a16="http://schemas.microsoft.com/office/drawing/2014/main" id="{71E3EA8C-31B4-DAD4-BC4A-65D72E59AD46}"/>
-              </a:ext>
-            </a:extLst>
-          </p:cNvPr>
-          <p:cNvSpPr txBox="1"/>
-          <p:nvPr/>
-        </p:nvSpPr>
-        <p:spPr>
-          <a:xfrm>
-            <a:off x="762000" y="1879600"/>
-            <a:ext cx="10668000" cy="646331"/>
-          </a:xfrm>
-          <a:prstGeom prst="rect">
-            <a:avLst/>
-          </a:prstGeom>
-          <a:noFill/>
-        </p:spPr>
-        <p:txBody>
-          <a:bodyPr vert="horz" wrap="square" rtlCol="0">
-            <a:spAutoFit/>
-          </a:bodyPr>
-          <a:lstStyle/>
-          <a:p>
-            <a:pPr>
-              <a:spcAft>
-                <a:spcPts val="200"/>
-              </a:spcAft>
-            </a:pPr>
-            <a:r>
-              <a:rPr lang="en-US">
-                <a:solidFill>
-                  <a:srgbClr val="000000"/>
-                </a:solidFill>
-                <a:latin typeface="Calibri" panose="020F0502020204030204" pitchFamily="34" charset="0"/>
-              </a:rPr>
-              <a:t>Test whether flips land on their starting side more than half the time, at α = 0.05.  The model predicted the direction before any flips were made.</a:t>
-            </a:r>
-          </a:p>
-        </p:txBody>
-      </p:sp>
-      <p:sp>
-        <p:nvSpPr>
-          <p:cNvPr id="9" name="Numbers">
-            <a:extLst>
-              <a:ext uri="{FF2B5EF4-FFF2-40B4-BE49-F238E27FC236}">
-                <a16:creationId xmlns:a16="http://schemas.microsoft.com/office/drawing/2014/main" id="{C419F151-05B2-3E4B-BAE8-BB1F06D9D1FD}"/>
-              </a:ext>
-            </a:extLst>
-          </p:cNvPr>
-          <p:cNvSpPr txBox="1"/>
-          <p:nvPr/>
-        </p:nvSpPr>
-        <p:spPr>
-          <a:xfrm>
-            <a:off x="762000" y="2551331"/>
-            <a:ext cx="10668000" cy="400110"/>
-          </a:xfrm>
-          <a:prstGeom prst="rect">
-            <a:avLst/>
-          </a:prstGeom>
-          <a:noFill/>
-        </p:spPr>
-        <p:txBody>
-          <a:bodyPr vert="horz" wrap="square" rtlCol="0">
-            <a:spAutoFit/>
-          </a:bodyPr>
-          <a:lstStyle/>
-          <a:p>
-            <a:pPr>
-              <a:spcAft>
-                <a:spcPts val="200"/>
-              </a:spcAft>
-            </a:pPr>
-            <a:r>
-              <a:rPr lang="en-US" sz="2000" b="1">
-                <a:solidFill>
-                  <a:srgbClr val="000000"/>
-                </a:solidFill>
-                <a:latin typeface="Calibri" panose="020F0502020204030204" pitchFamily="34" charset="0"/>
-              </a:rPr>
-              <a:t>178,079 of n = 350,757 flips landed on the side they started on</a:t>
-            </a:r>
-          </a:p>
-        </p:txBody>
-      </p:sp>
-      <p:sp>
-        <p:nvSpPr>
-          <p:cNvPr id="10" name="Question">
-            <a:extLst>
-              <a:ext uri="{FF2B5EF4-FFF2-40B4-BE49-F238E27FC236}">
-                <a16:creationId xmlns:a16="http://schemas.microsoft.com/office/drawing/2014/main" id="{B31E395F-B84E-D1E9-D22A-222467FC4105}"/>
-              </a:ext>
-            </a:extLst>
-          </p:cNvPr>
-          <p:cNvSpPr txBox="1"/>
-          <p:nvPr/>
-        </p:nvSpPr>
-        <p:spPr>
-          <a:xfrm>
-            <a:off x="762000" y="2976841"/>
-            <a:ext cx="10668000" cy="1277273"/>
-          </a:xfrm>
-          <a:prstGeom prst="rect">
-            <a:avLst/>
-          </a:prstGeom>
-          <a:noFill/>
-        </p:spPr>
-        <p:txBody>
-          <a:bodyPr vert="horz" wrap="square" rtlCol="0">
-            <a:spAutoFit/>
-          </a:bodyPr>
-          <a:lstStyle/>
-          <a:p>
-            <a:pPr>
-              <a:spcAft>
-                <a:spcPts val="200"/>
-              </a:spcAft>
-            </a:pPr>
-            <a:r>
-              <a:rPr lang="en-US" b="1">
-                <a:solidFill>
-                  <a:srgbClr val="C00000"/>
-                </a:solidFill>
-                <a:latin typeface="Calibri" panose="020F0502020204030204" pitchFamily="34" charset="0"/>
-              </a:rPr>
-              <a:t>(a)  What are p</a:t>
-            </a:r>
-            <a:r>
-              <a:rPr lang="en-US" b="1" baseline="-25000">
-                <a:solidFill>
-                  <a:srgbClr val="C00000"/>
-                </a:solidFill>
-                <a:latin typeface="Calibri" panose="020F0502020204030204" pitchFamily="34" charset="0"/>
-              </a:rPr>
-              <a:t>0</a:t>
-            </a:r>
-            <a:r>
-              <a:rPr lang="en-US" b="1">
-                <a:solidFill>
-                  <a:srgbClr val="C00000"/>
-                </a:solidFill>
-                <a:latin typeface="Calibri" panose="020F0502020204030204" pitchFamily="34" charset="0"/>
-              </a:rPr>
-              <a:t>, H</a:t>
-            </a:r>
-            <a:r>
-              <a:rPr lang="en-US" b="1" baseline="-25000">
-                <a:solidFill>
-                  <a:srgbClr val="C00000"/>
-                </a:solidFill>
-                <a:latin typeface="Calibri" panose="020F0502020204030204" pitchFamily="34" charset="0"/>
-              </a:rPr>
-              <a:t>0</a:t>
-            </a:r>
-            <a:r>
-              <a:rPr lang="en-US" b="1">
-                <a:solidFill>
-                  <a:srgbClr val="C00000"/>
-                </a:solidFill>
-                <a:latin typeface="Calibri" panose="020F0502020204030204" pitchFamily="34" charset="0"/>
-              </a:rPr>
-              <a:t> and H</a:t>
-            </a:r>
-            <a:r>
-              <a:rPr lang="en-US" b="1" baseline="-25000">
-                <a:solidFill>
-                  <a:srgbClr val="C00000"/>
-                </a:solidFill>
-                <a:latin typeface="Calibri" panose="020F0502020204030204" pitchFamily="34" charset="0"/>
-              </a:rPr>
-              <a:t>A</a:t>
-            </a:r>
-            <a:r>
-              <a:rPr lang="en-US" b="1">
-                <a:solidFill>
-                  <a:srgbClr val="C00000"/>
-                </a:solidFill>
-                <a:latin typeface="Calibri" panose="020F0502020204030204" pitchFamily="34" charset="0"/>
-              </a:rPr>
-              <a:t>?  Which tail?</a:t>
-            </a:r>
-          </a:p>
-          <a:p>
-            <a:pPr>
-              <a:spcAft>
-                <a:spcPts val="200"/>
-              </a:spcAft>
-            </a:pPr>
-            <a:r>
-              <a:rPr lang="en-US" b="1">
-                <a:solidFill>
-                  <a:srgbClr val="C00000"/>
-                </a:solidFill>
-                <a:latin typeface="Calibri" panose="020F0502020204030204" pitchFamily="34" charset="0"/>
-              </a:rPr>
-              <a:t>(b)  What are p̂, the standard error and z</a:t>
-            </a:r>
-            <a:r>
-              <a:rPr lang="en-US" b="1" baseline="-25000">
-                <a:solidFill>
-                  <a:srgbClr val="C00000"/>
-                </a:solidFill>
-                <a:latin typeface="Calibri" panose="020F0502020204030204" pitchFamily="34" charset="0"/>
-              </a:rPr>
-              <a:t>obs</a:t>
-            </a:r>
-            <a:r>
-              <a:rPr lang="en-US" b="1">
-                <a:solidFill>
-                  <a:srgbClr val="C00000"/>
-                </a:solidFill>
-                <a:latin typeface="Calibri" panose="020F0502020204030204" pitchFamily="34" charset="0"/>
-              </a:rPr>
-              <a:t>?</a:t>
-            </a:r>
-          </a:p>
-          <a:p>
-            <a:pPr>
-              <a:spcAft>
-                <a:spcPts val="200"/>
-              </a:spcAft>
-            </a:pPr>
-            <a:r>
-              <a:rPr lang="en-US" b="1">
-                <a:solidFill>
-                  <a:srgbClr val="C00000"/>
-                </a:solidFill>
-                <a:latin typeface="Calibri" panose="020F0502020204030204" pitchFamily="34" charset="0"/>
-              </a:rPr>
-              <a:t>(c)  What is the P-value?  What is the decision?</a:t>
-            </a:r>
-          </a:p>
-          <a:p>
-            <a:pPr>
-              <a:spcAft>
-                <a:spcPts val="200"/>
-              </a:spcAft>
-            </a:pPr>
-            <a:r>
-              <a:rPr lang="en-US" b="1">
-                <a:solidFill>
-                  <a:srgbClr val="C00000"/>
-                </a:solidFill>
-                <a:latin typeface="Calibri" panose="020F0502020204030204" pitchFamily="34" charset="0"/>
-              </a:rPr>
-              <a:t>(d)  50.8% versus 50%:  is that a big difference?</a:t>
-            </a:r>
-          </a:p>
-        </p:txBody>
-      </p:sp>
-      <p:sp>
-        <p:nvSpPr>
-          <p:cNvPr id="11" name="Result">
-            <a:extLst>
-              <a:ext uri="{FF2B5EF4-FFF2-40B4-BE49-F238E27FC236}">
-                <a16:creationId xmlns:a16="http://schemas.microsoft.com/office/drawing/2014/main" id="{5A70F68E-0D93-07B8-82B2-4D8F2F681D0D}"/>
-              </a:ext>
-            </a:extLst>
-          </p:cNvPr>
-          <p:cNvSpPr/>
-          <p:nvPr/>
-        </p:nvSpPr>
-        <p:spPr>
-          <a:xfrm>
-            <a:off x="762000" y="4406514"/>
-            <a:ext cx="10668000" cy="1727200"/>
-          </a:xfrm>
-          <a:prstGeom prst="roundRect">
-            <a:avLst>
-              <a:gd name="adj" fmla="val 4000"/>
-            </a:avLst>
-          </a:prstGeom>
-          <a:solidFill>
-            <a:srgbClr val="F2F6FC"/>
-          </a:solidFill>
-          <a:ln w="15875">
-            <a:solidFill>
-              <a:srgbClr val="4472C4"/>
-            </a:solidFill>
-          </a:ln>
-        </p:spPr>
-        <p:style>
-          <a:lnRef idx="2">
-            <a:schemeClr val="accent1">
-              <a:shade val="15000"/>
-            </a:schemeClr>
-          </a:lnRef>
-          <a:fillRef idx="1">
-            <a:schemeClr val="accent1"/>
-          </a:fillRef>
-          <a:effectRef idx="0">
-            <a:schemeClr val="accent1"/>
-          </a:effectRef>
-          <a:fontRef idx="minor">
-            <a:schemeClr val="lt1"/>
-          </a:fontRef>
-        </p:style>
-        <p:txBody>
-          <a:bodyPr wrap="square" lIns="152400" tIns="76200" rIns="152400" bIns="76200" rtlCol="0" anchor="ctr">
-            <a:spAutoFit/>
-          </a:bodyPr>
-          <a:lstStyle/>
-          <a:p>
-            <a:r>
-              <a:rPr lang="en-US" sz="2000" b="1">
-                <a:solidFill>
-                  <a:srgbClr val="C00000"/>
-                </a:solidFill>
-                <a:latin typeface="Calibri" panose="020F0502020204030204" pitchFamily="34" charset="0"/>
-              </a:rPr>
-              <a:t>(a)  p</a:t>
-            </a:r>
-            <a:r>
-              <a:rPr lang="en-US" sz="2000" b="1" baseline="-25000">
-                <a:solidFill>
-                  <a:srgbClr val="C00000"/>
-                </a:solidFill>
-                <a:latin typeface="Calibri" panose="020F0502020204030204" pitchFamily="34" charset="0"/>
-              </a:rPr>
-              <a:t>0</a:t>
-            </a:r>
-            <a:r>
-              <a:rPr lang="en-US" sz="2000" b="1">
-                <a:solidFill>
-                  <a:srgbClr val="C00000"/>
-                </a:solidFill>
-                <a:latin typeface="Calibri" panose="020F0502020204030204" pitchFamily="34" charset="0"/>
-              </a:rPr>
-              <a:t> = 0.5;     H</a:t>
-            </a:r>
-            <a:r>
-              <a:rPr lang="en-US" sz="2000" b="1" baseline="-25000">
-                <a:solidFill>
-                  <a:srgbClr val="C00000"/>
-                </a:solidFill>
-                <a:latin typeface="Calibri" panose="020F0502020204030204" pitchFamily="34" charset="0"/>
-              </a:rPr>
-              <a:t>0</a:t>
-            </a:r>
-            <a:r>
-              <a:rPr lang="en-US" sz="2000" b="1">
-                <a:solidFill>
-                  <a:srgbClr val="C00000"/>
-                </a:solidFill>
-                <a:latin typeface="Calibri" panose="020F0502020204030204" pitchFamily="34" charset="0"/>
-              </a:rPr>
-              <a:t>: p = 0.5     H</a:t>
-            </a:r>
-            <a:r>
-              <a:rPr lang="en-US" sz="2000" b="1" baseline="-25000">
-                <a:solidFill>
-                  <a:srgbClr val="C00000"/>
-                </a:solidFill>
-                <a:latin typeface="Calibri" panose="020F0502020204030204" pitchFamily="34" charset="0"/>
-              </a:rPr>
-              <a:t>A</a:t>
-            </a:r>
-            <a:r>
-              <a:rPr lang="en-US" sz="2000" b="1">
-                <a:solidFill>
-                  <a:srgbClr val="C00000"/>
-                </a:solidFill>
-                <a:latin typeface="Calibri" panose="020F0502020204030204" pitchFamily="34" charset="0"/>
-              </a:rPr>
-              <a:t>: p &gt; 0.5;     upper-tailed</a:t>
-            </a:r>
-          </a:p>
-          <a:p>
-            <a:r>
-              <a:rPr lang="en-US" sz="2000" b="1">
-                <a:solidFill>
-                  <a:srgbClr val="C00000"/>
-                </a:solidFill>
-                <a:latin typeface="Calibri" panose="020F0502020204030204" pitchFamily="34" charset="0"/>
-              </a:rPr>
-              <a:t>(b)  p̂ = 178,079 / 350,757 ≈ 0.5077;     SE = √(0.5 × 0.5 / 350,757) ≈ 0.000844</a:t>
-            </a:r>
-          </a:p>
-          <a:p>
-            <a:r>
-              <a:rPr lang="en-US" sz="2000" b="1">
-                <a:solidFill>
-                  <a:srgbClr val="C00000"/>
-                </a:solidFill>
-                <a:latin typeface="Calibri" panose="020F0502020204030204" pitchFamily="34" charset="0"/>
-              </a:rPr>
-              <a:t>       z</a:t>
-            </a:r>
-            <a:r>
-              <a:rPr lang="en-US" sz="2000" b="1" baseline="-25000">
-                <a:solidFill>
-                  <a:srgbClr val="C00000"/>
-                </a:solidFill>
-                <a:latin typeface="Calibri" panose="020F0502020204030204" pitchFamily="34" charset="0"/>
-              </a:rPr>
-              <a:t>obs</a:t>
-            </a:r>
-            <a:r>
-              <a:rPr lang="en-US" sz="2000" b="1">
-                <a:solidFill>
-                  <a:srgbClr val="C00000"/>
-                </a:solidFill>
-                <a:latin typeface="Calibri" panose="020F0502020204030204" pitchFamily="34" charset="0"/>
-              </a:rPr>
-              <a:t> = (0.5077 − 0.5) / 0.000844 ≈ 9.1</a:t>
-            </a:r>
-          </a:p>
-          <a:p>
-            <a:r>
-              <a:rPr lang="en-US" sz="2000" b="1">
-                <a:solidFill>
-                  <a:srgbClr val="C00000"/>
-                </a:solidFill>
-                <a:latin typeface="Calibri" panose="020F0502020204030204" pitchFamily="34" charset="0"/>
-              </a:rPr>
-              <a:t>(c)  P(Z ≥ 9.1 | H</a:t>
-            </a:r>
-            <a:r>
-              <a:rPr lang="en-US" sz="2000" b="1" baseline="-25000">
-                <a:solidFill>
-                  <a:srgbClr val="C00000"/>
-                </a:solidFill>
-                <a:latin typeface="Calibri" panose="020F0502020204030204" pitchFamily="34" charset="0"/>
-              </a:rPr>
-              <a:t>0</a:t>
-            </a:r>
-            <a:r>
-              <a:rPr lang="en-US" sz="2000" b="1">
-                <a:solidFill>
-                  <a:srgbClr val="C00000"/>
-                </a:solidFill>
-                <a:latin typeface="Calibri" panose="020F0502020204030204" pitchFamily="34" charset="0"/>
-              </a:rPr>
-              <a:t> true) ≈ 0, off the z-table:  less than 0.05, so reject H</a:t>
-            </a:r>
-            <a:r>
-              <a:rPr lang="en-US" sz="2000" b="1" baseline="-25000">
-                <a:solidFill>
-                  <a:srgbClr val="C00000"/>
-                </a:solidFill>
-                <a:latin typeface="Calibri" panose="020F0502020204030204" pitchFamily="34" charset="0"/>
-              </a:rPr>
-              <a:t>0</a:t>
-            </a:r>
-          </a:p>
-          <a:p>
-            <a:r>
-              <a:rPr lang="en-US" sz="2000" b="1">
-                <a:solidFill>
-                  <a:srgbClr val="C00000"/>
-                </a:solidFill>
-                <a:latin typeface="Calibri" panose="020F0502020204030204" pitchFamily="34" charset="0"/>
-              </a:rPr>
-              <a:t>(d)  No:  about 1 extra in 130 flips.  Significant means “not chance”, not “big”</a:t>
-            </a:r>
-          </a:p>
-        </p:txBody>
-      </p:sp>
-    </p:spTree>
-    <p:extLst>
-      <p:ext uri="{BB962C8B-B14F-4D97-AF65-F5344CB8AC3E}">
-        <p14:creationId xmlns:p14="http://schemas.microsoft.com/office/powerpoint/2010/main" val="126512286"/>
-      </p:ext>
-    </p:extLst>
-  </p:cSld>
-  <p:clrMapOvr>
-    <a:masterClrMapping/>
-  </p:clrMapOvr>
-  <p:timing>
-    <p:tnLst>
-      <p:par>
-        <p:cTn id="1" dur="indefinite" restart="never" nodeType="tmRoot">
-          <p:childTnLst>
-            <p:seq concurrent="1" nextAc="seek">
-              <p:cTn id="2" dur="indefinite" nodeType="mainSeq">
-                <p:childTnLst>
-                  <p:par>
-                    <p:cTn id="3" fill="hold">
-                      <p:stCondLst>
-                        <p:cond delay="indefinite"/>
-                      </p:stCondLst>
-                      <p:childTnLst>
-                        <p:par>
-                          <p:cTn id="4" fill="hold">
-                            <p:stCondLst>
-                              <p:cond delay="0"/>
-                            </p:stCondLst>
-                            <p:childTnLst>
-                              <p:par>
-                                <p:cTn id="5" presetID="1" presetClass="entr" presetSubtype="0" fill="hold" grpId="0" nodeType="clickEffect">
-                                  <p:stCondLst>
-                                    <p:cond delay="0"/>
-                                  </p:stCondLst>
-                                  <p:childTnLst>
-                                    <p:set>
-                                      <p:cBhvr>
-                                        <p:cTn id="6" dur="1" fill="hold">
-                                          <p:stCondLst>
-                                            <p:cond delay="0"/>
-                                          </p:stCondLst>
-                                        </p:cTn>
-                                        <p:tgtEl>
-                                          <p:spTgt spid="11"/>
-                                        </p:tgtEl>
-                                        <p:attrNameLst>
-                                          <p:attrName>style.visibility</p:attrName>
-                                        </p:attrNameLst>
-                                      </p:cBhvr>
-                                      <p:to>
-                                        <p:strVal val="visible"/>
-                                      </p:to>
-                                    </p:set>
-                                  </p:childTnLst>
-                                </p:cTn>
-                              </p:par>
-                            </p:childTnLst>
-                          </p:cTn>
-                        </p:par>
-                      </p:childTnLst>
-                    </p:cTn>
-                  </p:par>
-                </p:childTnLst>
-              </p:cTn>
-              <p:prevCondLst>
-                <p:cond evt="onPrev" delay="0">
-                  <p:tgtEl>
-                    <p:sldTgt/>
-                  </p:tgtEl>
-                </p:cond>
-              </p:prevCondLst>
-              <p:nextCondLst>
-                <p:cond evt="onNext" delay="0">
-                  <p:tgtEl>
-                    <p:sldTgt/>
-                  </p:tgtEl>
-                </p:cond>
-              </p:nextCondLst>
-            </p:seq>
-          </p:childTnLst>
-        </p:cTn>
-      </p:par>
-    </p:tnLst>
-    <p:bldLst>
-      <p:bldP spid="11" grpId="0" animBg="1"/>
-    </p:bldLst>
-  </p:timing>
-</p:sld>
-</file>
-
-<file path=ppt/slides/slide17.xml><?xml version="1.0" encoding="utf-8"?>
-<p:sld xmlns:a="http://schemas.openxmlformats.org/drawingml/2006/main" xmlns:r="http://schemas.openxmlformats.org/officeDocument/2006/relationships" xmlns:p="http://schemas.openxmlformats.org/presentationml/2006/main">
-  <p:cSld>
-    <p:spTree>
-      <p:nvGrpSpPr>
-        <p:cNvPr id="1" name=""/>
-        <p:cNvGrpSpPr/>
-        <p:nvPr/>
-      </p:nvGrpSpPr>
-      <p:grpSpPr>
-        <a:xfrm>
-          <a:off x="0" y="0"/>
-          <a:ext cx="0" cy="0"/>
-          <a:chOff x="0" y="0"/>
-          <a:chExt cx="0" cy="0"/>
-        </a:xfrm>
-      </p:grpSpPr>
-      <p:sp>
-        <p:nvSpPr>
-          <p:cNvPr id="2" name="Title 1">
-            <a:extLst>
-              <a:ext uri="{FF2B5EF4-FFF2-40B4-BE49-F238E27FC236}">
-                <a16:creationId xmlns:a16="http://schemas.microsoft.com/office/drawing/2014/main" id="{D617AB41-6AD1-9EF2-7F95-46A904399681}"/>
-              </a:ext>
-            </a:extLst>
-          </p:cNvPr>
-          <p:cNvSpPr>
-            <a:spLocks noGrp="1"/>
-          </p:cNvSpPr>
-          <p:nvPr>
-            <p:ph type="title"/>
-          </p:nvPr>
-        </p:nvSpPr>
-        <p:spPr/>
-        <p:txBody>
-          <a:bodyPr>
-            <a:noAutofit/>
-          </a:bodyPr>
-          <a:lstStyle/>
-          <a:p>
-            <a:r>
-              <a:rPr lang="en-US">
-                <a:solidFill>
-                  <a:srgbClr val="1F3864"/>
-                </a:solidFill>
-              </a:rPr>
-              <a:t>The five steps of a significance test</a:t>
-            </a:r>
-          </a:p>
-        </p:txBody>
-      </p:sp>
-      <p:sp>
-        <p:nvSpPr>
-          <p:cNvPr id="4" name="Slide Number Placeholder 3">
-            <a:extLst>
-              <a:ext uri="{FF2B5EF4-FFF2-40B4-BE49-F238E27FC236}">
-                <a16:creationId xmlns:a16="http://schemas.microsoft.com/office/drawing/2014/main" id="{97D44AE5-98B5-B840-6B8A-D345C7C2E2F0}"/>
-              </a:ext>
-            </a:extLst>
-          </p:cNvPr>
-          <p:cNvSpPr>
-            <a:spLocks noGrp="1"/>
-          </p:cNvSpPr>
-          <p:nvPr>
-            <p:ph type="sldNum" sz="quarter" idx="12"/>
-          </p:nvPr>
-        </p:nvSpPr>
-        <p:spPr/>
-        <p:txBody>
-          <a:bodyPr/>
-          <a:lstStyle/>
-          <a:p>
-            <a:fld id="{A80A81DD-F10A-4B1C-963A-0ABBB4865886}" type="slidenum">
-              <a:rPr lang="en-US" sz="1600" smtClean="0"/>
-              <a:t>17</a:t>
-            </a:fld>
-            <a:endParaRPr lang="en-US" sz="1600"/>
-          </a:p>
-        </p:txBody>
-      </p:sp>
-      <p:sp>
-        <p:nvSpPr>
-          <p:cNvPr id="5" name="TextBox 4">
-            <a:extLst>
-              <a:ext uri="{FF2B5EF4-FFF2-40B4-BE49-F238E27FC236}">
-                <a16:creationId xmlns:a16="http://schemas.microsoft.com/office/drawing/2014/main" id="{A34AAE17-27CE-D7A3-C663-11BB48ACBF5B}"/>
-              </a:ext>
-            </a:extLst>
-          </p:cNvPr>
-          <p:cNvSpPr txBox="1"/>
-          <p:nvPr/>
-        </p:nvSpPr>
-        <p:spPr>
-          <a:xfrm>
-            <a:off x="762000" y="1879600"/>
-            <a:ext cx="10668000" cy="345440"/>
-          </a:xfrm>
-          <a:prstGeom prst="rect">
-            <a:avLst/>
-          </a:prstGeom>
-          <a:noFill/>
-        </p:spPr>
-        <p:txBody>
-          <a:bodyPr vert="horz" wrap="square" rtlCol="0">
-            <a:spAutoFit/>
-          </a:bodyPr>
-          <a:lstStyle/>
-          <a:p>
-            <a:pPr marL="304800" indent="-304800"/>
-            <a:r>
-              <a:rPr lang="en-US" sz="1600">
-                <a:solidFill>
-                  <a:srgbClr val="000000"/>
-                </a:solidFill>
-              </a:rPr>
-              <a:t>1. assumptions,  2. hypotheses</a:t>
-            </a:r>
-            <a:endParaRPr lang="en-US" sz="1600" baseline="-25000">
-              <a:solidFill>
-                <a:srgbClr val="000000"/>
-              </a:solidFill>
-            </a:endParaRPr>
-          </a:p>
-        </p:txBody>
-      </p:sp>
-      <p:sp>
-        <p:nvSpPr>
-          <p:cNvPr id="6" name="TextBox 5">
-            <a:extLst>
-              <a:ext uri="{FF2B5EF4-FFF2-40B4-BE49-F238E27FC236}">
-                <a16:creationId xmlns:a16="http://schemas.microsoft.com/office/drawing/2014/main" id="{E410A0F8-5E1E-9A1D-B64C-50827EE6C9B2}"/>
-              </a:ext>
-            </a:extLst>
-          </p:cNvPr>
-          <p:cNvSpPr txBox="1"/>
-          <p:nvPr/>
-        </p:nvSpPr>
-        <p:spPr>
-          <a:xfrm>
-            <a:off x="1117600" y="2225040"/>
-            <a:ext cx="10312400" cy="338554"/>
-          </a:xfrm>
-          <a:prstGeom prst="rect">
-            <a:avLst/>
-          </a:prstGeom>
-          <a:noFill/>
-        </p:spPr>
-        <p:txBody>
-          <a:bodyPr vert="horz" wrap="square" rtlCol="0">
-            <a:spAutoFit/>
-          </a:bodyPr>
-          <a:lstStyle/>
-          <a:p>
-            <a:r>
-              <a:rPr lang="en-US" sz="1600" b="1">
-                <a:solidFill>
-                  <a:srgbClr val="C00000"/>
-                </a:solidFill>
-              </a:rPr>
-              <a:t>a random sample (plus size or shape checks);   H</a:t>
-            </a:r>
-            <a:r>
-              <a:rPr lang="en-US" sz="1600" b="1" baseline="-25000">
-                <a:solidFill>
-                  <a:srgbClr val="C00000"/>
-                </a:solidFill>
-              </a:rPr>
-              <a:t>0</a:t>
-            </a:r>
-            <a:r>
-              <a:rPr lang="en-US" sz="1600" b="1">
-                <a:solidFill>
-                  <a:srgbClr val="C00000"/>
-                </a:solidFill>
-              </a:rPr>
-              <a:t>: θ = θ</a:t>
-            </a:r>
-            <a:r>
-              <a:rPr lang="en-US" sz="1600" b="1" baseline="-25000">
-                <a:solidFill>
-                  <a:srgbClr val="C00000"/>
-                </a:solidFill>
-              </a:rPr>
-              <a:t>0</a:t>
-            </a:r>
-            <a:r>
-              <a:rPr lang="en-US" sz="1600" b="1">
-                <a:solidFill>
-                  <a:srgbClr val="C00000"/>
-                </a:solidFill>
-              </a:rPr>
-              <a:t>  and  H</a:t>
-            </a:r>
-            <a:r>
-              <a:rPr lang="en-US" sz="1600" b="1" baseline="-25000">
-                <a:solidFill>
-                  <a:srgbClr val="C00000"/>
-                </a:solidFill>
-              </a:rPr>
-              <a:t>A</a:t>
-            </a:r>
-          </a:p>
-        </p:txBody>
-      </p:sp>
-      <p:sp>
-        <p:nvSpPr>
-          <p:cNvPr id="7" name="TextBox 6">
-            <a:extLst>
-              <a:ext uri="{FF2B5EF4-FFF2-40B4-BE49-F238E27FC236}">
-                <a16:creationId xmlns:a16="http://schemas.microsoft.com/office/drawing/2014/main" id="{47D3CD95-D52E-5227-B663-7C0A72677B6E}"/>
-              </a:ext>
-            </a:extLst>
-          </p:cNvPr>
-          <p:cNvSpPr txBox="1"/>
-          <p:nvPr/>
-        </p:nvSpPr>
-        <p:spPr>
-          <a:xfrm>
-            <a:off x="762000" y="2741394"/>
-            <a:ext cx="10668000" cy="345440"/>
-          </a:xfrm>
-          <a:prstGeom prst="rect">
-            <a:avLst/>
-          </a:prstGeom>
-          <a:noFill/>
-        </p:spPr>
-        <p:txBody>
-          <a:bodyPr vert="horz" wrap="square" rtlCol="0">
-            <a:spAutoFit/>
-          </a:bodyPr>
-          <a:lstStyle/>
-          <a:p>
-            <a:pPr marL="304800" indent="-304800"/>
-            <a:r>
-              <a:rPr lang="en-US" sz="1600">
-                <a:solidFill>
-                  <a:srgbClr val="000000"/>
-                </a:solidFill>
-              </a:rPr>
-              <a:t>3. test statistic</a:t>
-            </a:r>
-            <a:endParaRPr lang="en-US" sz="1600" baseline="-25000">
-              <a:solidFill>
-                <a:srgbClr val="000000"/>
-              </a:solidFill>
-            </a:endParaRPr>
-          </a:p>
-        </p:txBody>
-      </p:sp>
-      <p:sp>
-        <p:nvSpPr>
-          <p:cNvPr id="8" name="TextBox 7">
-            <a:extLst>
-              <a:ext uri="{FF2B5EF4-FFF2-40B4-BE49-F238E27FC236}">
-                <a16:creationId xmlns:a16="http://schemas.microsoft.com/office/drawing/2014/main" id="{1CE3E601-601D-C6B1-8265-C079CB8C9269}"/>
-              </a:ext>
-            </a:extLst>
-          </p:cNvPr>
-          <p:cNvSpPr txBox="1"/>
-          <p:nvPr/>
-        </p:nvSpPr>
-        <p:spPr>
-          <a:xfrm>
-            <a:off x="1117600" y="3086834"/>
-            <a:ext cx="10312400" cy="338554"/>
-          </a:xfrm>
-          <a:prstGeom prst="rect">
-            <a:avLst/>
-          </a:prstGeom>
-          <a:noFill/>
-        </p:spPr>
-        <p:txBody>
-          <a:bodyPr vert="horz" wrap="square" rtlCol="0">
-            <a:spAutoFit/>
-          </a:bodyPr>
-          <a:lstStyle/>
-          <a:p>
-            <a:r>
-              <a:rPr lang="en-US" sz="1600" b="1">
-                <a:solidFill>
-                  <a:srgbClr val="C00000"/>
-                </a:solidFill>
-              </a:rPr>
-              <a:t>z</a:t>
-            </a:r>
-            <a:r>
-              <a:rPr lang="en-US" sz="1600" b="1" baseline="-25000">
-                <a:solidFill>
-                  <a:srgbClr val="C00000"/>
-                </a:solidFill>
-              </a:rPr>
-              <a:t>obs</a:t>
-            </a:r>
-            <a:r>
-              <a:rPr lang="en-US" sz="1600" b="1">
-                <a:solidFill>
-                  <a:srgbClr val="C00000"/>
-                </a:solidFill>
-              </a:rPr>
-              <a:t> = (estimate − θ</a:t>
-            </a:r>
-            <a:r>
-              <a:rPr lang="en-US" sz="1600" b="1" baseline="-25000">
-                <a:solidFill>
-                  <a:srgbClr val="C00000"/>
-                </a:solidFill>
-              </a:rPr>
-              <a:t>0</a:t>
-            </a:r>
-            <a:r>
-              <a:rPr lang="en-US" sz="1600" b="1">
-                <a:solidFill>
-                  <a:srgbClr val="C00000"/>
-                </a:solidFill>
-              </a:rPr>
-              <a:t>) / SE,  computed as if H</a:t>
-            </a:r>
-            <a:r>
-              <a:rPr lang="en-US" sz="1600" b="1" baseline="-25000">
-                <a:solidFill>
-                  <a:srgbClr val="C00000"/>
-                </a:solidFill>
-              </a:rPr>
-              <a:t>0</a:t>
-            </a:r>
-            <a:r>
-              <a:rPr lang="en-US" sz="1600" b="1">
-                <a:solidFill>
-                  <a:srgbClr val="C00000"/>
-                </a:solidFill>
-              </a:rPr>
-              <a:t> were true</a:t>
-            </a:r>
-          </a:p>
-        </p:txBody>
-      </p:sp>
-      <p:sp>
-        <p:nvSpPr>
-          <p:cNvPr id="9" name="TextBox 8">
-            <a:extLst>
-              <a:ext uri="{FF2B5EF4-FFF2-40B4-BE49-F238E27FC236}">
-                <a16:creationId xmlns:a16="http://schemas.microsoft.com/office/drawing/2014/main" id="{FB002BF4-8037-2F73-E27A-7A453477E389}"/>
-              </a:ext>
-            </a:extLst>
-          </p:cNvPr>
-          <p:cNvSpPr txBox="1"/>
-          <p:nvPr/>
-        </p:nvSpPr>
-        <p:spPr>
-          <a:xfrm>
-            <a:off x="762000" y="3603188"/>
-            <a:ext cx="10668000" cy="345440"/>
-          </a:xfrm>
-          <a:prstGeom prst="rect">
-            <a:avLst/>
-          </a:prstGeom>
-          <a:noFill/>
-        </p:spPr>
-        <p:txBody>
-          <a:bodyPr vert="horz" wrap="square" rtlCol="0">
-            <a:spAutoFit/>
-          </a:bodyPr>
-          <a:lstStyle/>
-          <a:p>
-            <a:pPr marL="304800" indent="-304800"/>
-            <a:r>
-              <a:rPr lang="en-US" sz="1600">
-                <a:solidFill>
-                  <a:srgbClr val="000000"/>
-                </a:solidFill>
-              </a:rPr>
-              <a:t>4. P-value</a:t>
-            </a:r>
-          </a:p>
-        </p:txBody>
-      </p:sp>
-      <p:sp>
-        <p:nvSpPr>
-          <p:cNvPr id="10" name="TextBox 9">
-            <a:extLst>
-              <a:ext uri="{FF2B5EF4-FFF2-40B4-BE49-F238E27FC236}">
-                <a16:creationId xmlns:a16="http://schemas.microsoft.com/office/drawing/2014/main" id="{10F3B3E3-D27C-E008-C93E-ED70BD2A4754}"/>
-              </a:ext>
-            </a:extLst>
-          </p:cNvPr>
-          <p:cNvSpPr txBox="1"/>
-          <p:nvPr/>
-        </p:nvSpPr>
-        <p:spPr>
-          <a:xfrm>
-            <a:off x="1117600" y="3948628"/>
-            <a:ext cx="10312400" cy="338554"/>
-          </a:xfrm>
-          <a:prstGeom prst="rect">
-            <a:avLst/>
-          </a:prstGeom>
-          <a:noFill/>
-        </p:spPr>
-        <p:txBody>
-          <a:bodyPr vert="horz" wrap="square" rtlCol="0">
-            <a:spAutoFit/>
-          </a:bodyPr>
-          <a:lstStyle/>
-          <a:p>
-            <a:r>
-              <a:rPr lang="en-US" sz="1600" b="1">
-                <a:solidFill>
-                  <a:srgbClr val="C00000"/>
-                </a:solidFill>
-              </a:rPr>
-              <a:t>the area beyond z</a:t>
-            </a:r>
-            <a:r>
-              <a:rPr lang="en-US" sz="1600" b="1" baseline="-25000">
-                <a:solidFill>
-                  <a:srgbClr val="C00000"/>
-                </a:solidFill>
-              </a:rPr>
-              <a:t>obs</a:t>
-            </a:r>
-            <a:r>
-              <a:rPr lang="en-US" sz="1600" b="1">
-                <a:solidFill>
-                  <a:srgbClr val="C00000"/>
-                </a:solidFill>
-              </a:rPr>
-              <a:t> in the tail or tails H</a:t>
-            </a:r>
-            <a:r>
-              <a:rPr lang="en-US" sz="1600" b="1" baseline="-25000">
-                <a:solidFill>
-                  <a:srgbClr val="C00000"/>
-                </a:solidFill>
-              </a:rPr>
-              <a:t>A</a:t>
-            </a:r>
-            <a:r>
-              <a:rPr lang="en-US" sz="1600" b="1">
-                <a:solidFill>
-                  <a:srgbClr val="C00000"/>
-                </a:solidFill>
-              </a:rPr>
-              <a:t> points to, if H</a:t>
-            </a:r>
-            <a:r>
-              <a:rPr lang="en-US" sz="1600" b="1" baseline="-25000">
-                <a:solidFill>
-                  <a:srgbClr val="C00000"/>
-                </a:solidFill>
-              </a:rPr>
-              <a:t>0</a:t>
-            </a:r>
-            <a:r>
-              <a:rPr lang="en-US" sz="1600" b="1">
-                <a:solidFill>
-                  <a:srgbClr val="C00000"/>
-                </a:solidFill>
-              </a:rPr>
-              <a:t> were true</a:t>
-            </a:r>
-          </a:p>
-        </p:txBody>
-      </p:sp>
-      <p:sp>
-        <p:nvSpPr>
-          <p:cNvPr id="3" name="Title rule">
-            <a:extLst>
-              <a:ext uri="{FF2B5EF4-FFF2-40B4-BE49-F238E27FC236}">
-                <a16:creationId xmlns:a16="http://schemas.microsoft.com/office/drawing/2014/main" id="{B469CAAB-2B69-6863-7C28-0C5959E5734B}"/>
-              </a:ext>
-            </a:extLst>
-          </p:cNvPr>
-          <p:cNvSpPr/>
-          <p:nvPr/>
-        </p:nvSpPr>
-        <p:spPr>
-          <a:xfrm>
-            <a:off x="838200" y="1600200"/>
-            <a:ext cx="10515600" cy="38100"/>
-          </a:xfrm>
-          <a:prstGeom prst="rect">
-            <a:avLst/>
-          </a:prstGeom>
-          <a:solidFill>
-            <a:srgbClr val="4472C4"/>
-          </a:solidFill>
-          <a:ln w="12700" cap="flat" cmpd="sng" algn="ctr">
-            <a:noFill/>
-            <a:prstDash val="solid"/>
-            <a:miter lim="800000"/>
-          </a:ln>
-          <a:effectLst/>
-          <a:extLst>
-            <a:ext uri="{91240B29-F687-4F45-9708-019B960494DF}">
-              <a14:hiddenLine xmlns:a14="http://schemas.microsoft.com/office/drawing/2010/main" w="12700" cap="flat" cmpd="sng" algn="ctr">
-                <a:solidFill>
-                  <a:schemeClr val="accent1">
-                    <a:shade val="15000"/>
-                  </a:schemeClr>
-                </a:solidFill>
-                <a:prstDash val="solid"/>
-                <a:miter lim="800000"/>
-              </a14:hiddenLine>
-            </a:ext>
-          </a:extLst>
-        </p:spPr>
-        <p:style>
-          <a:lnRef idx="2">
-            <a:schemeClr val="accent1">
-              <a:shade val="15000"/>
-            </a:schemeClr>
-          </a:lnRef>
-          <a:fillRef idx="1">
-            <a:schemeClr val="accent1"/>
-          </a:fillRef>
-          <a:effectRef idx="0">
-            <a:schemeClr val="accent1"/>
-          </a:effectRef>
-          <a:fontRef idx="minor">
-            <a:schemeClr val="lt1"/>
-          </a:fontRef>
-        </p:style>
-        <p:txBody>
-          <a:bodyPr rtlCol="0" anchor="ctr"/>
-          <a:lstStyle/>
-          <a:p>
-            <a:pPr algn="ctr"/>
-            <a:endParaRPr lang="en-US"/>
-          </a:p>
-        </p:txBody>
-      </p:sp>
-      <p:sp>
-        <p:nvSpPr>
-          <p:cNvPr id="11" name="TextBox 10">
-            <a:extLst>
-              <a:ext uri="{FF2B5EF4-FFF2-40B4-BE49-F238E27FC236}">
-                <a16:creationId xmlns:a16="http://schemas.microsoft.com/office/drawing/2014/main" id="{7E252B31-0A80-8297-9AB5-9AED735ACDE2}"/>
-              </a:ext>
-            </a:extLst>
-          </p:cNvPr>
-          <p:cNvSpPr txBox="1"/>
-          <p:nvPr/>
-        </p:nvSpPr>
-        <p:spPr>
-          <a:xfrm>
-            <a:off x="762000" y="4464982"/>
-            <a:ext cx="10668000" cy="345440"/>
-          </a:xfrm>
-          <a:prstGeom prst="rect">
-            <a:avLst/>
-          </a:prstGeom>
-          <a:noFill/>
-        </p:spPr>
-        <p:txBody>
-          <a:bodyPr vert="horz" wrap="square" rtlCol="0">
-            <a:spAutoFit/>
-          </a:bodyPr>
-          <a:lstStyle/>
-          <a:p>
-            <a:pPr marL="304800" indent="-304800"/>
-            <a:r>
-              <a:rPr lang="en-US" sz="1600">
-                <a:solidFill>
-                  <a:srgbClr val="000000"/>
-                </a:solidFill>
-              </a:rPr>
-              <a:t>5. decision</a:t>
-            </a:r>
-          </a:p>
-        </p:txBody>
-      </p:sp>
-      <p:sp>
-        <p:nvSpPr>
-          <p:cNvPr id="12" name="TextBox 11">
-            <a:extLst>
-              <a:ext uri="{FF2B5EF4-FFF2-40B4-BE49-F238E27FC236}">
-                <a16:creationId xmlns:a16="http://schemas.microsoft.com/office/drawing/2014/main" id="{A1980B2D-2D53-A814-88AF-46C2FDF3E298}"/>
-              </a:ext>
-            </a:extLst>
-          </p:cNvPr>
-          <p:cNvSpPr txBox="1"/>
-          <p:nvPr/>
-        </p:nvSpPr>
-        <p:spPr>
-          <a:xfrm>
-            <a:off x="1117600" y="4810422"/>
-            <a:ext cx="10312400" cy="338554"/>
-          </a:xfrm>
-          <a:prstGeom prst="rect">
-            <a:avLst/>
-          </a:prstGeom>
-          <a:noFill/>
-        </p:spPr>
-        <p:txBody>
-          <a:bodyPr vert="horz" wrap="square" rtlCol="0">
-            <a:spAutoFit/>
-          </a:bodyPr>
-          <a:lstStyle/>
-          <a:p>
-            <a:r>
-              <a:rPr lang="en-US" sz="1600" b="1">
-                <a:solidFill>
-                  <a:srgbClr val="C00000"/>
-                </a:solidFill>
-              </a:rPr>
-              <a:t>P-value &lt; α:  reject H</a:t>
-            </a:r>
-            <a:r>
-              <a:rPr lang="en-US" sz="1600" b="1" baseline="-25000">
-                <a:solidFill>
-                  <a:srgbClr val="C00000"/>
-                </a:solidFill>
-              </a:rPr>
-              <a:t>0</a:t>
-            </a:r>
-            <a:r>
-              <a:rPr lang="en-US" sz="1600" b="1">
-                <a:solidFill>
-                  <a:srgbClr val="C00000"/>
-                </a:solidFill>
-              </a:rPr>
-              <a:t>;  otherwise do not reject;  significant ≠ important</a:t>
-            </a:r>
-          </a:p>
-        </p:txBody>
-      </p:sp>
-    </p:spTree>
-    <p:extLst>
-      <p:ext uri="{BB962C8B-B14F-4D97-AF65-F5344CB8AC3E}">
-        <p14:creationId xmlns:p14="http://schemas.microsoft.com/office/powerpoint/2010/main" val="412465737"/>
-      </p:ext>
-    </p:extLst>
-  </p:cSld>
-  <p:clrMapOvr>
-    <a:masterClrMapping/>
-  </p:clrMapOvr>
-  <p:timing>
-    <p:tnLst>
-      <p:par>
-        <p:cTn id="1" dur="indefinite" restart="never" nodeType="tmRoot">
-          <p:childTnLst>
-            <p:seq concurrent="1" nextAc="seek">
-              <p:cTn id="2" dur="indefinite" nodeType="mainSeq">
-                <p:childTnLst>
-                  <p:par>
-                    <p:cTn id="3" fill="hold">
-                      <p:stCondLst>
-                        <p:cond delay="indefinite"/>
-                      </p:stCondLst>
-                      <p:childTnLst>
-                        <p:par>
-                          <p:cTn id="4" fill="hold">
-                            <p:stCondLst>
-                              <p:cond delay="0"/>
-                            </p:stCondLst>
-                            <p:childTnLst>
-                              <p:par>
-                                <p:cTn id="5" presetID="34" presetClass="entr" presetSubtype="0" fill="hold" grpId="0" nodeType="clickEffect">
-                                  <p:stCondLst>
-                                    <p:cond delay="0"/>
-                                  </p:stCondLst>
-                                  <p:childTnLst>
-                                    <p:set>
-                                      <p:cBhvr>
-                                        <p:cTn id="6" dur="1" fill="hold">
-                                          <p:stCondLst>
-                                            <p:cond delay="0"/>
-                                          </p:stCondLst>
-                                        </p:cTn>
-                                        <p:tgtEl>
-                                          <p:spTgt spid="6"/>
-                                        </p:tgtEl>
-                                        <p:attrNameLst>
-                                          <p:attrName>style.visibility</p:attrName>
-                                        </p:attrNameLst>
-                                      </p:cBhvr>
-                                      <p:to>
-                                        <p:strVal val="visible"/>
-                                      </p:to>
-                                    </p:set>
-                                    <p:anim from="(-#ppt_w/2)" to="(#ppt_x)" calcmode="lin" valueType="num">
-                                      <p:cBhvr>
-                                        <p:cTn id="7" dur="600" fill="hold">
-                                          <p:stCondLst>
-                                            <p:cond delay="0"/>
-                                          </p:stCondLst>
-                                        </p:cTn>
-                                        <p:tgtEl>
-                                          <p:spTgt spid="6"/>
-                                        </p:tgtEl>
-                                        <p:attrNameLst>
-                                          <p:attrName>ppt_x</p:attrName>
-                                        </p:attrNameLst>
-                                      </p:cBhvr>
-                                    </p:anim>
-                                    <p:anim from="0" to="-1.0" calcmode="lin" valueType="num">
-                                      <p:cBhvr>
-                                        <p:cTn id="8" dur="200" decel="50000" autoRev="1" fill="hold">
-                                          <p:stCondLst>
-                                            <p:cond delay="600"/>
-                                          </p:stCondLst>
-                                        </p:cTn>
-                                        <p:tgtEl>
-                                          <p:spTgt spid="6"/>
-                                        </p:tgtEl>
-                                        <p:attrNameLst>
-                                          <p:attrName>xshear</p:attrName>
-                                        </p:attrNameLst>
-                                      </p:cBhvr>
-                                    </p:anim>
-                                    <p:animScale>
-                                      <p:cBhvr>
-                                        <p:cTn id="9" dur="200" decel="100000" autoRev="1" fill="hold">
-                                          <p:stCondLst>
-                                            <p:cond delay="600"/>
-                                          </p:stCondLst>
-                                        </p:cTn>
-                                        <p:tgtEl>
-                                          <p:spTgt spid="6"/>
-                                        </p:tgtEl>
-                                      </p:cBhvr>
-                                      <p:from x="100000" y="100000"/>
-                                      <p:to x="80000" y="100000"/>
-                                    </p:animScale>
-                                    <p:anim by="(#ppt_h/3+#ppt_w*0.1)" calcmode="lin" valueType="num">
-                                      <p:cBhvr additive="sum">
-                                        <p:cTn id="10" dur="200" decel="100000" autoRev="1" fill="hold">
-                                          <p:stCondLst>
-                                            <p:cond delay="600"/>
-                                          </p:stCondLst>
-                                        </p:cTn>
-                                        <p:tgtEl>
-                                          <p:spTgt spid="6"/>
-                                        </p:tgtEl>
-                                        <p:attrNameLst>
-                                          <p:attrName>ppt_x</p:attrName>
-                                        </p:attrNameLst>
-                                      </p:cBhvr>
-                                    </p:anim>
-                                  </p:childTnLst>
-                                </p:cTn>
-                              </p:par>
-                            </p:childTnLst>
-                          </p:cTn>
-                        </p:par>
-                      </p:childTnLst>
-                    </p:cTn>
-                  </p:par>
-                  <p:par>
-                    <p:cTn id="11" fill="hold">
-                      <p:stCondLst>
-                        <p:cond delay="indefinite"/>
-                      </p:stCondLst>
-                      <p:childTnLst>
-                        <p:par>
-                          <p:cTn id="12" fill="hold">
-                            <p:stCondLst>
-                              <p:cond delay="0"/>
-                            </p:stCondLst>
-                            <p:childTnLst>
-                              <p:par>
-                                <p:cTn id="13" presetID="34" presetClass="entr" presetSubtype="0" fill="hold" grpId="0" nodeType="clickEffect">
-                                  <p:stCondLst>
-                                    <p:cond delay="0"/>
-                                  </p:stCondLst>
-                                  <p:childTnLst>
-                                    <p:set>
-                                      <p:cBhvr>
-                                        <p:cTn id="14" dur="1" fill="hold">
-                                          <p:stCondLst>
-                                            <p:cond delay="0"/>
-                                          </p:stCondLst>
-                                        </p:cTn>
-                                        <p:tgtEl>
-                                          <p:spTgt spid="8"/>
-                                        </p:tgtEl>
-                                        <p:attrNameLst>
-                                          <p:attrName>style.visibility</p:attrName>
-                                        </p:attrNameLst>
-                                      </p:cBhvr>
-                                      <p:to>
-                                        <p:strVal val="visible"/>
-                                      </p:to>
-                                    </p:set>
-                                    <p:anim from="(-#ppt_w/2)" to="(#ppt_x)" calcmode="lin" valueType="num">
-                                      <p:cBhvr>
-                                        <p:cTn id="15" dur="600" fill="hold">
-                                          <p:stCondLst>
-                                            <p:cond delay="0"/>
-                                          </p:stCondLst>
-                                        </p:cTn>
-                                        <p:tgtEl>
-                                          <p:spTgt spid="8"/>
-                                        </p:tgtEl>
-                                        <p:attrNameLst>
-                                          <p:attrName>ppt_x</p:attrName>
-                                        </p:attrNameLst>
-                                      </p:cBhvr>
-                                    </p:anim>
-                                    <p:anim from="0" to="-1.0" calcmode="lin" valueType="num">
-                                      <p:cBhvr>
-                                        <p:cTn id="16" dur="200" decel="50000" autoRev="1" fill="hold">
-                                          <p:stCondLst>
-                                            <p:cond delay="600"/>
-                                          </p:stCondLst>
-                                        </p:cTn>
-                                        <p:tgtEl>
-                                          <p:spTgt spid="8"/>
-                                        </p:tgtEl>
-                                        <p:attrNameLst>
-                                          <p:attrName>xshear</p:attrName>
-                                        </p:attrNameLst>
-                                      </p:cBhvr>
-                                    </p:anim>
-                                    <p:animScale>
-                                      <p:cBhvr>
-                                        <p:cTn id="17" dur="200" decel="100000" autoRev="1" fill="hold">
-                                          <p:stCondLst>
-                                            <p:cond delay="600"/>
-                                          </p:stCondLst>
-                                        </p:cTn>
-                                        <p:tgtEl>
-                                          <p:spTgt spid="8"/>
-                                        </p:tgtEl>
-                                      </p:cBhvr>
-                                      <p:from x="100000" y="100000"/>
-                                      <p:to x="80000" y="100000"/>
-                                    </p:animScale>
-                                    <p:anim by="(#ppt_h/3+#ppt_w*0.1)" calcmode="lin" valueType="num">
-                                      <p:cBhvr additive="sum">
-                                        <p:cTn id="18" dur="200" decel="100000" autoRev="1" fill="hold">
-                                          <p:stCondLst>
-                                            <p:cond delay="600"/>
-                                          </p:stCondLst>
-                                        </p:cTn>
-                                        <p:tgtEl>
-                                          <p:spTgt spid="8"/>
-                                        </p:tgtEl>
-                                        <p:attrNameLst>
-                                          <p:attrName>ppt_x</p:attrName>
-                                        </p:attrNameLst>
-                                      </p:cBhvr>
-                                    </p:anim>
-                                  </p:childTnLst>
-                                </p:cTn>
-                              </p:par>
-                            </p:childTnLst>
-                          </p:cTn>
-                        </p:par>
-                      </p:childTnLst>
-                    </p:cTn>
-                  </p:par>
-                  <p:par>
-                    <p:cTn id="19" fill="hold">
-                      <p:stCondLst>
-                        <p:cond delay="indefinite"/>
-                      </p:stCondLst>
-                      <p:childTnLst>
-                        <p:par>
-                          <p:cTn id="20" fill="hold">
-                            <p:stCondLst>
-                              <p:cond delay="0"/>
-                            </p:stCondLst>
-                            <p:childTnLst>
-                              <p:par>
-                                <p:cTn id="21" presetID="34" presetClass="entr" presetSubtype="0" fill="hold" grpId="0" nodeType="clickEffect">
-                                  <p:stCondLst>
-                                    <p:cond delay="0"/>
-                                  </p:stCondLst>
-                                  <p:childTnLst>
-                                    <p:set>
-                                      <p:cBhvr>
-                                        <p:cTn id="22" dur="1" fill="hold">
-                                          <p:stCondLst>
-                                            <p:cond delay="0"/>
-                                          </p:stCondLst>
-                                        </p:cTn>
-                                        <p:tgtEl>
-                                          <p:spTgt spid="10"/>
-                                        </p:tgtEl>
-                                        <p:attrNameLst>
-                                          <p:attrName>style.visibility</p:attrName>
-                                        </p:attrNameLst>
-                                      </p:cBhvr>
-                                      <p:to>
-                                        <p:strVal val="visible"/>
-                                      </p:to>
-                                    </p:set>
-                                    <p:anim from="(-#ppt_w/2)" to="(#ppt_x)" calcmode="lin" valueType="num">
-                                      <p:cBhvr>
-                                        <p:cTn id="23" dur="600" fill="hold">
-                                          <p:stCondLst>
-                                            <p:cond delay="0"/>
-                                          </p:stCondLst>
-                                        </p:cTn>
-                                        <p:tgtEl>
-                                          <p:spTgt spid="10"/>
-                                        </p:tgtEl>
-                                        <p:attrNameLst>
-                                          <p:attrName>ppt_x</p:attrName>
-                                        </p:attrNameLst>
-                                      </p:cBhvr>
-                                    </p:anim>
-                                    <p:anim from="0" to="-1.0" calcmode="lin" valueType="num">
-                                      <p:cBhvr>
-                                        <p:cTn id="24" dur="200" decel="50000" autoRev="1" fill="hold">
-                                          <p:stCondLst>
-                                            <p:cond delay="600"/>
-                                          </p:stCondLst>
-                                        </p:cTn>
-                                        <p:tgtEl>
-                                          <p:spTgt spid="10"/>
-                                        </p:tgtEl>
-                                        <p:attrNameLst>
-                                          <p:attrName>xshear</p:attrName>
-                                        </p:attrNameLst>
-                                      </p:cBhvr>
-                                    </p:anim>
-                                    <p:animScale>
-                                      <p:cBhvr>
-                                        <p:cTn id="25" dur="200" decel="100000" autoRev="1" fill="hold">
-                                          <p:stCondLst>
-                                            <p:cond delay="600"/>
-                                          </p:stCondLst>
-                                        </p:cTn>
-                                        <p:tgtEl>
-                                          <p:spTgt spid="10"/>
-                                        </p:tgtEl>
-                                      </p:cBhvr>
-                                      <p:from x="100000" y="100000"/>
-                                      <p:to x="80000" y="100000"/>
-                                    </p:animScale>
-                                    <p:anim by="(#ppt_h/3+#ppt_w*0.1)" calcmode="lin" valueType="num">
-                                      <p:cBhvr additive="sum">
-                                        <p:cTn id="26" dur="200" decel="100000" autoRev="1" fill="hold">
-                                          <p:stCondLst>
-                                            <p:cond delay="600"/>
-                                          </p:stCondLst>
-                                        </p:cTn>
-                                        <p:tgtEl>
-                                          <p:spTgt spid="10"/>
-                                        </p:tgtEl>
-                                        <p:attrNameLst>
-                                          <p:attrName>ppt_x</p:attrName>
-                                        </p:attrNameLst>
-                                      </p:cBhvr>
-                                    </p:anim>
-                                  </p:childTnLst>
-                                </p:cTn>
-                              </p:par>
-                            </p:childTnLst>
-                          </p:cTn>
-                        </p:par>
-                      </p:childTnLst>
-                    </p:cTn>
-                  </p:par>
-                  <p:par>
-                    <p:cTn id="27" fill="hold">
-                      <p:stCondLst>
-                        <p:cond delay="indefinite"/>
-                      </p:stCondLst>
-                      <p:childTnLst>
-                        <p:par>
-                          <p:cTn id="28" fill="hold">
-                            <p:stCondLst>
-                              <p:cond delay="0"/>
-                            </p:stCondLst>
-                            <p:childTnLst>
-                              <p:par>
-                                <p:cTn id="29" presetID="34" presetClass="entr" presetSubtype="0" fill="hold" grpId="1" nodeType="clickEffect">
-                                  <p:stCondLst>
-                                    <p:cond delay="0"/>
-                                  </p:stCondLst>
-                                  <p:childTnLst>
-                                    <p:set>
-                                      <p:cBhvr>
-                                        <p:cTn id="30" dur="1" fill="hold">
-                                          <p:stCondLst>
-                                            <p:cond delay="0"/>
-                                          </p:stCondLst>
-                                        </p:cTn>
-                                        <p:tgtEl>
-                                          <p:spTgt spid="12"/>
-                                        </p:tgtEl>
-                                        <p:attrNameLst>
-                                          <p:attrName>style.visibility</p:attrName>
-                                        </p:attrNameLst>
-                                      </p:cBhvr>
-                                      <p:to>
-                                        <p:strVal val="visible"/>
-                                      </p:to>
-                                    </p:set>
-                                    <p:anim from="(-#ppt_w/2)" to="(#ppt_x)" calcmode="lin" valueType="num">
-                                      <p:cBhvr>
-                                        <p:cTn id="31" dur="600" fill="hold">
-                                          <p:stCondLst>
-                                            <p:cond delay="0"/>
-                                          </p:stCondLst>
-                                        </p:cTn>
-                                        <p:tgtEl>
-                                          <p:spTgt spid="12"/>
-                                        </p:tgtEl>
-                                        <p:attrNameLst>
-                                          <p:attrName>ppt_x</p:attrName>
-                                        </p:attrNameLst>
-                                      </p:cBhvr>
-                                    </p:anim>
-                                    <p:anim from="0" to="-1.0" calcmode="lin" valueType="num">
-                                      <p:cBhvr>
-                                        <p:cTn id="32" dur="200" decel="50000" autoRev="1" fill="hold">
-                                          <p:stCondLst>
-                                            <p:cond delay="600"/>
-                                          </p:stCondLst>
-                                        </p:cTn>
-                                        <p:tgtEl>
-                                          <p:spTgt spid="12"/>
-                                        </p:tgtEl>
-                                        <p:attrNameLst>
-                                          <p:attrName>xshear</p:attrName>
-                                        </p:attrNameLst>
-                                      </p:cBhvr>
-                                    </p:anim>
-                                    <p:animScale>
-                                      <p:cBhvr>
-                                        <p:cTn id="33" dur="200" decel="100000" autoRev="1" fill="hold">
-                                          <p:stCondLst>
-                                            <p:cond delay="600"/>
-                                          </p:stCondLst>
-                                        </p:cTn>
-                                        <p:tgtEl>
-                                          <p:spTgt spid="12"/>
-                                        </p:tgtEl>
-                                      </p:cBhvr>
-                                      <p:from x="100000" y="100000"/>
-                                      <p:to x="80000" y="100000"/>
-                                    </p:animScale>
-                                    <p:anim by="(#ppt_h/3+#ppt_w*0.1)" calcmode="lin" valueType="num">
-                                      <p:cBhvr additive="sum">
-                                        <p:cTn id="34" dur="200" decel="100000" autoRev="1" fill="hold">
-                                          <p:stCondLst>
-                                            <p:cond delay="600"/>
-                                          </p:stCondLst>
-                                        </p:cTn>
-                                        <p:tgtEl>
-                                          <p:spTgt spid="12"/>
-                                        </p:tgtEl>
-                                        <p:attrNameLst>
-                                          <p:attrName>ppt_x</p:attrName>
-                                        </p:attrNameLst>
-                                      </p:cBhvr>
-                                    </p:anim>
-                                  </p:childTnLst>
-                                </p:cTn>
-                              </p:par>
-                            </p:childTnLst>
-                          </p:cTn>
-                        </p:par>
-                      </p:childTnLst>
-                    </p:cTn>
-                  </p:par>
-                </p:childTnLst>
-              </p:cTn>
-              <p:prevCondLst>
-                <p:cond evt="onPrev" delay="0">
-                  <p:tgtEl>
-                    <p:sldTgt/>
-                  </p:tgtEl>
-                </p:cond>
-              </p:prevCondLst>
-              <p:nextCondLst>
-                <p:cond evt="onNext" delay="0">
-                  <p:tgtEl>
-                    <p:sldTgt/>
-                  </p:tgtEl>
-                </p:cond>
-              </p:nextCondLst>
-            </p:seq>
-          </p:childTnLst>
-        </p:cTn>
-      </p:par>
-    </p:tnLst>
-    <p:bldLst>
-      <p:bldP spid="6" grpId="0"/>
-      <p:bldP spid="8" grpId="0"/>
-      <p:bldP spid="10" grpId="0"/>
-      <p:bldP spid="12" grpId="1"/>
-    </p:bldLst>
-  </p:timing>
 </p:sld>
 </file>
 
@@ -14365,951 +8087,6 @@
 </p:sld>
 </file>
 
-<file path=ppt/slides/slide9.xml><?xml version="1.0" encoding="utf-8"?>
-<p:sld xmlns:a="http://schemas.openxmlformats.org/drawingml/2006/main" xmlns:r="http://schemas.openxmlformats.org/officeDocument/2006/relationships" xmlns:p="http://schemas.openxmlformats.org/presentationml/2006/main">
-  <p:cSld>
-    <p:spTree>
-      <p:nvGrpSpPr>
-        <p:cNvPr id="1" name=""/>
-        <p:cNvGrpSpPr/>
-        <p:nvPr/>
-      </p:nvGrpSpPr>
-      <p:grpSpPr>
-        <a:xfrm>
-          <a:off x="0" y="0"/>
-          <a:ext cx="0" cy="0"/>
-          <a:chOff x="0" y="0"/>
-          <a:chExt cx="0" cy="0"/>
-        </a:xfrm>
-      </p:grpSpPr>
-      <p:sp>
-        <p:nvSpPr>
-          <p:cNvPr id="2" name="Title 1">
-            <a:extLst>
-              <a:ext uri="{FF2B5EF4-FFF2-40B4-BE49-F238E27FC236}">
-                <a16:creationId xmlns:a16="http://schemas.microsoft.com/office/drawing/2014/main" id="{D617AB41-6AD1-9EF2-7F95-46A904399681}"/>
-              </a:ext>
-            </a:extLst>
-          </p:cNvPr>
-          <p:cNvSpPr>
-            <a:spLocks noGrp="1"/>
-          </p:cNvSpPr>
-          <p:nvPr>
-            <p:ph type="title"/>
-          </p:nvPr>
-        </p:nvSpPr>
-        <p:spPr/>
-        <p:txBody>
-          <a:bodyPr>
-            <a:noAutofit/>
-          </a:bodyPr>
-          <a:lstStyle/>
-          <a:p>
-            <a:r>
-              <a:rPr lang="en-US">
-                <a:solidFill>
-                  <a:srgbClr val="1F3864"/>
-                </a:solidFill>
-              </a:rPr>
-              <a:t>Significance tests</a:t>
-            </a:r>
-          </a:p>
-        </p:txBody>
-      </p:sp>
-      <p:sp>
-        <p:nvSpPr>
-          <p:cNvPr id="4" name="Slide Number Placeholder 3">
-            <a:extLst>
-              <a:ext uri="{FF2B5EF4-FFF2-40B4-BE49-F238E27FC236}">
-                <a16:creationId xmlns:a16="http://schemas.microsoft.com/office/drawing/2014/main" id="{97D44AE5-98B5-B840-6B8A-D345C7C2E2F0}"/>
-              </a:ext>
-            </a:extLst>
-          </p:cNvPr>
-          <p:cNvSpPr>
-            <a:spLocks noGrp="1"/>
-          </p:cNvSpPr>
-          <p:nvPr>
-            <p:ph type="sldNum" sz="quarter" idx="12"/>
-          </p:nvPr>
-        </p:nvSpPr>
-        <p:spPr/>
-        <p:txBody>
-          <a:bodyPr/>
-          <a:lstStyle/>
-          <a:p>
-            <a:fld id="{A80A81DD-F10A-4B1C-963A-0ABBB4865886}" type="slidenum">
-              <a:rPr lang="en-US" sz="1600" smtClean="0"/>
-              <a:t>9</a:t>
-            </a:fld>
-            <a:endParaRPr lang="en-US" sz="1600"/>
-          </a:p>
-        </p:txBody>
-      </p:sp>
-      <p:sp>
-        <p:nvSpPr>
-          <p:cNvPr id="5" name="TextBox 4">
-            <a:extLst>
-              <a:ext uri="{FF2B5EF4-FFF2-40B4-BE49-F238E27FC236}">
-                <a16:creationId xmlns:a16="http://schemas.microsoft.com/office/drawing/2014/main" id="{A34AAE17-27CE-D7A3-C663-11BB48ACBF5B}"/>
-              </a:ext>
-            </a:extLst>
-          </p:cNvPr>
-          <p:cNvSpPr txBox="1"/>
-          <p:nvPr/>
-        </p:nvSpPr>
-        <p:spPr>
-          <a:xfrm>
-            <a:off x="762000" y="1879600"/>
-            <a:ext cx="10668000" cy="345440"/>
-          </a:xfrm>
-          <a:prstGeom prst="rect">
-            <a:avLst/>
-          </a:prstGeom>
-          <a:noFill/>
-        </p:spPr>
-        <p:txBody>
-          <a:bodyPr vert="horz" wrap="square" rtlCol="0">
-            <a:spAutoFit/>
-          </a:bodyPr>
-          <a:lstStyle/>
-          <a:p>
-            <a:pPr marL="304800" indent="-304800"/>
-            <a:r>
-              <a:rPr lang="en-US" sz="1600">
-                <a:solidFill>
-                  <a:srgbClr val="000000"/>
-                </a:solidFill>
-              </a:rPr>
-              <a:t>statistically significant</a:t>
-            </a:r>
-          </a:p>
-        </p:txBody>
-      </p:sp>
-      <p:sp>
-        <p:nvSpPr>
-          <p:cNvPr id="6" name="TextBox 5">
-            <a:extLst>
-              <a:ext uri="{FF2B5EF4-FFF2-40B4-BE49-F238E27FC236}">
-                <a16:creationId xmlns:a16="http://schemas.microsoft.com/office/drawing/2014/main" id="{E410A0F8-5E1E-9A1D-B64C-50827EE6C9B2}"/>
-              </a:ext>
-            </a:extLst>
-          </p:cNvPr>
-          <p:cNvSpPr txBox="1"/>
-          <p:nvPr/>
-        </p:nvSpPr>
-        <p:spPr>
-          <a:xfrm>
-            <a:off x="1117600" y="2225040"/>
-            <a:ext cx="10312400" cy="338554"/>
-          </a:xfrm>
-          <a:prstGeom prst="rect">
-            <a:avLst/>
-          </a:prstGeom>
-          <a:noFill/>
-        </p:spPr>
-        <p:txBody>
-          <a:bodyPr vert="horz" wrap="square" rtlCol="0">
-            <a:spAutoFit/>
-          </a:bodyPr>
-          <a:lstStyle/>
-          <a:p>
-            <a:r>
-              <a:rPr lang="en-US" sz="1600" b="1">
-                <a:solidFill>
-                  <a:srgbClr val="C00000"/>
-                </a:solidFill>
-              </a:rPr>
-              <a:t>decidedly not due to ordinary variation:  not chance, not a coincidence</a:t>
-            </a:r>
-          </a:p>
-        </p:txBody>
-      </p:sp>
-      <p:sp>
-        <p:nvSpPr>
-          <p:cNvPr id="7" name="TextBox 6">
-            <a:extLst>
-              <a:ext uri="{FF2B5EF4-FFF2-40B4-BE49-F238E27FC236}">
-                <a16:creationId xmlns:a16="http://schemas.microsoft.com/office/drawing/2014/main" id="{47D3CD95-D52E-5227-B663-7C0A72677B6E}"/>
-              </a:ext>
-            </a:extLst>
-          </p:cNvPr>
-          <p:cNvSpPr txBox="1"/>
-          <p:nvPr/>
-        </p:nvSpPr>
-        <p:spPr>
-          <a:xfrm>
-            <a:off x="762000" y="2741394"/>
-            <a:ext cx="10668000" cy="345440"/>
-          </a:xfrm>
-          <a:prstGeom prst="rect">
-            <a:avLst/>
-          </a:prstGeom>
-          <a:noFill/>
-        </p:spPr>
-        <p:txBody>
-          <a:bodyPr vert="horz" wrap="square" rtlCol="0">
-            <a:spAutoFit/>
-          </a:bodyPr>
-          <a:lstStyle/>
-          <a:p>
-            <a:pPr marL="304800" indent="-304800"/>
-            <a:r>
-              <a:rPr lang="en-US" sz="1600">
-                <a:solidFill>
-                  <a:srgbClr val="000000"/>
-                </a:solidFill>
-              </a:rPr>
-              <a:t>significance test</a:t>
-            </a:r>
-          </a:p>
-        </p:txBody>
-      </p:sp>
-      <p:sp>
-        <p:nvSpPr>
-          <p:cNvPr id="8" name="TextBox 7">
-            <a:extLst>
-              <a:ext uri="{FF2B5EF4-FFF2-40B4-BE49-F238E27FC236}">
-                <a16:creationId xmlns:a16="http://schemas.microsoft.com/office/drawing/2014/main" id="{1CE3E601-601D-C6B1-8265-C079CB8C9269}"/>
-              </a:ext>
-            </a:extLst>
-          </p:cNvPr>
-          <p:cNvSpPr txBox="1"/>
-          <p:nvPr/>
-        </p:nvSpPr>
-        <p:spPr>
-          <a:xfrm>
-            <a:off x="1117600" y="3086834"/>
-            <a:ext cx="10312400" cy="338554"/>
-          </a:xfrm>
-          <a:prstGeom prst="rect">
-            <a:avLst/>
-          </a:prstGeom>
-          <a:noFill/>
-        </p:spPr>
-        <p:txBody>
-          <a:bodyPr vert="horz" wrap="square" rtlCol="0">
-            <a:spAutoFit/>
-          </a:bodyPr>
-          <a:lstStyle/>
-          <a:p>
-            <a:r>
-              <a:rPr lang="en-US" sz="1600" b="1">
-                <a:solidFill>
-                  <a:srgbClr val="C00000"/>
-                </a:solidFill>
-              </a:rPr>
-              <a:t>uses data to decide whether a result is statistically significant</a:t>
-            </a:r>
-          </a:p>
-        </p:txBody>
-      </p:sp>
-      <p:sp>
-        <p:nvSpPr>
-          <p:cNvPr id="9" name="TextBox 8">
-            <a:extLst>
-              <a:ext uri="{FF2B5EF4-FFF2-40B4-BE49-F238E27FC236}">
-                <a16:creationId xmlns:a16="http://schemas.microsoft.com/office/drawing/2014/main" id="{FB002BF4-8037-2F73-E27A-7A453477E389}"/>
-              </a:ext>
-            </a:extLst>
-          </p:cNvPr>
-          <p:cNvSpPr txBox="1"/>
-          <p:nvPr/>
-        </p:nvSpPr>
-        <p:spPr>
-          <a:xfrm>
-            <a:off x="762000" y="3603188"/>
-            <a:ext cx="10668000" cy="345440"/>
-          </a:xfrm>
-          <a:prstGeom prst="rect">
-            <a:avLst/>
-          </a:prstGeom>
-          <a:noFill/>
-        </p:spPr>
-        <p:txBody>
-          <a:bodyPr vert="horz" wrap="square" rtlCol="0">
-            <a:spAutoFit/>
-          </a:bodyPr>
-          <a:lstStyle/>
-          <a:p>
-            <a:pPr marL="304800" indent="-304800"/>
-            <a:r>
-              <a:rPr lang="en-US" sz="1600">
-                <a:solidFill>
-                  <a:srgbClr val="000000"/>
-                </a:solidFill>
-              </a:rPr>
-              <a:t>null hypothesis H</a:t>
-            </a:r>
-            <a:r>
-              <a:rPr lang="en-US" sz="1600" baseline="-25000">
-                <a:solidFill>
-                  <a:srgbClr val="000000"/>
-                </a:solidFill>
-              </a:rPr>
-              <a:t>0</a:t>
-            </a:r>
-          </a:p>
-        </p:txBody>
-      </p:sp>
-      <p:sp>
-        <p:nvSpPr>
-          <p:cNvPr id="10" name="TextBox 9">
-            <a:extLst>
-              <a:ext uri="{FF2B5EF4-FFF2-40B4-BE49-F238E27FC236}">
-                <a16:creationId xmlns:a16="http://schemas.microsoft.com/office/drawing/2014/main" id="{10F3B3E3-D27C-E008-C93E-ED70BD2A4754}"/>
-              </a:ext>
-            </a:extLst>
-          </p:cNvPr>
-          <p:cNvSpPr txBox="1"/>
-          <p:nvPr/>
-        </p:nvSpPr>
-        <p:spPr>
-          <a:xfrm>
-            <a:off x="1117600" y="3948628"/>
-            <a:ext cx="10312400" cy="338554"/>
-          </a:xfrm>
-          <a:prstGeom prst="rect">
-            <a:avLst/>
-          </a:prstGeom>
-          <a:noFill/>
-        </p:spPr>
-        <p:txBody>
-          <a:bodyPr vert="horz" wrap="square" rtlCol="0">
-            <a:spAutoFit/>
-          </a:bodyPr>
-          <a:lstStyle/>
-          <a:p>
-            <a:r>
-              <a:rPr lang="en-US" sz="1600" b="1">
-                <a:solidFill>
-                  <a:srgbClr val="C00000"/>
-                </a:solidFill>
-              </a:rPr>
-              <a:t>“no effect”:  nothing interesting is happening, e.g. they are just guessing</a:t>
-            </a:r>
-          </a:p>
-        </p:txBody>
-      </p:sp>
-      <p:sp>
-        <p:nvSpPr>
-          <p:cNvPr id="3" name="Title rule">
-            <a:extLst>
-              <a:ext uri="{FF2B5EF4-FFF2-40B4-BE49-F238E27FC236}">
-                <a16:creationId xmlns:a16="http://schemas.microsoft.com/office/drawing/2014/main" id="{B469CAAB-2B69-6863-7C28-0C5959E5734B}"/>
-              </a:ext>
-            </a:extLst>
-          </p:cNvPr>
-          <p:cNvSpPr/>
-          <p:nvPr/>
-        </p:nvSpPr>
-        <p:spPr>
-          <a:xfrm>
-            <a:off x="838200" y="1600200"/>
-            <a:ext cx="10515600" cy="38100"/>
-          </a:xfrm>
-          <a:prstGeom prst="rect">
-            <a:avLst/>
-          </a:prstGeom>
-          <a:solidFill>
-            <a:srgbClr val="4472C4"/>
-          </a:solidFill>
-          <a:ln w="12700" cap="flat" cmpd="sng" algn="ctr">
-            <a:noFill/>
-            <a:prstDash val="solid"/>
-            <a:miter lim="800000"/>
-          </a:ln>
-          <a:effectLst/>
-          <a:extLst>
-            <a:ext uri="{91240B29-F687-4F45-9708-019B960494DF}">
-              <a14:hiddenLine xmlns:a14="http://schemas.microsoft.com/office/drawing/2010/main" w="12700" cap="flat" cmpd="sng" algn="ctr">
-                <a:solidFill>
-                  <a:schemeClr val="accent1">
-                    <a:shade val="15000"/>
-                  </a:schemeClr>
-                </a:solidFill>
-                <a:prstDash val="solid"/>
-                <a:miter lim="800000"/>
-              </a14:hiddenLine>
-            </a:ext>
-          </a:extLst>
-        </p:spPr>
-        <p:style>
-          <a:lnRef idx="2">
-            <a:schemeClr val="accent1">
-              <a:shade val="15000"/>
-            </a:schemeClr>
-          </a:lnRef>
-          <a:fillRef idx="1">
-            <a:schemeClr val="accent1"/>
-          </a:fillRef>
-          <a:effectRef idx="0">
-            <a:schemeClr val="accent1"/>
-          </a:effectRef>
-          <a:fontRef idx="minor">
-            <a:schemeClr val="lt1"/>
-          </a:fontRef>
-        </p:style>
-        <p:txBody>
-          <a:bodyPr rtlCol="0" anchor="ctr"/>
-          <a:lstStyle/>
-          <a:p>
-            <a:pPr algn="ctr"/>
-            <a:endParaRPr lang="en-US"/>
-          </a:p>
-        </p:txBody>
-      </p:sp>
-      <p:sp>
-        <p:nvSpPr>
-          <p:cNvPr id="11" name="TextBox 10">
-            <a:extLst>
-              <a:ext uri="{FF2B5EF4-FFF2-40B4-BE49-F238E27FC236}">
-                <a16:creationId xmlns:a16="http://schemas.microsoft.com/office/drawing/2014/main" id="{7E252B31-0A80-8297-9AB5-9AED735ACDE2}"/>
-              </a:ext>
-            </a:extLst>
-          </p:cNvPr>
-          <p:cNvSpPr txBox="1"/>
-          <p:nvPr/>
-        </p:nvSpPr>
-        <p:spPr>
-          <a:xfrm>
-            <a:off x="762000" y="4464982"/>
-            <a:ext cx="10668000" cy="345440"/>
-          </a:xfrm>
-          <a:prstGeom prst="rect">
-            <a:avLst/>
-          </a:prstGeom>
-          <a:noFill/>
-        </p:spPr>
-        <p:txBody>
-          <a:bodyPr vert="horz" wrap="square" rtlCol="0">
-            <a:spAutoFit/>
-          </a:bodyPr>
-          <a:lstStyle/>
-          <a:p>
-            <a:pPr marL="304800" indent="-304800"/>
-            <a:r>
-              <a:rPr lang="en-US" sz="1600">
-                <a:solidFill>
-                  <a:srgbClr val="000000"/>
-                </a:solidFill>
-              </a:rPr>
-              <a:t>alternative hypothesis H</a:t>
-            </a:r>
-            <a:r>
-              <a:rPr lang="en-US" sz="1600" baseline="-25000">
-                <a:solidFill>
-                  <a:srgbClr val="000000"/>
-                </a:solidFill>
-              </a:rPr>
-              <a:t>A</a:t>
-            </a:r>
-          </a:p>
-        </p:txBody>
-      </p:sp>
-      <p:sp>
-        <p:nvSpPr>
-          <p:cNvPr id="12" name="TextBox 11">
-            <a:extLst>
-              <a:ext uri="{FF2B5EF4-FFF2-40B4-BE49-F238E27FC236}">
-                <a16:creationId xmlns:a16="http://schemas.microsoft.com/office/drawing/2014/main" id="{A1980B2D-2D53-A814-88AF-46C2FDF3E298}"/>
-              </a:ext>
-            </a:extLst>
-          </p:cNvPr>
-          <p:cNvSpPr txBox="1"/>
-          <p:nvPr/>
-        </p:nvSpPr>
-        <p:spPr>
-          <a:xfrm>
-            <a:off x="1117600" y="4810422"/>
-            <a:ext cx="10312400" cy="338554"/>
-          </a:xfrm>
-          <a:prstGeom prst="rect">
-            <a:avLst/>
-          </a:prstGeom>
-          <a:noFill/>
-        </p:spPr>
-        <p:txBody>
-          <a:bodyPr vert="horz" wrap="square" rtlCol="0">
-            <a:spAutoFit/>
-          </a:bodyPr>
-          <a:lstStyle/>
-          <a:p>
-            <a:r>
-              <a:rPr lang="en-US" sz="1600" b="1">
-                <a:solidFill>
-                  <a:srgbClr val="C00000"/>
-                </a:solidFill>
-              </a:rPr>
-              <a:t>“an effect”:  what we suspect, e.g. they can taste the difference</a:t>
-            </a:r>
-          </a:p>
-        </p:txBody>
-      </p:sp>
-    </p:spTree>
-    <p:extLst>
-      <p:ext uri="{BB962C8B-B14F-4D97-AF65-F5344CB8AC3E}">
-        <p14:creationId xmlns:p14="http://schemas.microsoft.com/office/powerpoint/2010/main" val="3884269920"/>
-      </p:ext>
-    </p:extLst>
-  </p:cSld>
-  <p:clrMapOvr>
-    <a:masterClrMapping/>
-  </p:clrMapOvr>
-  <p:timing>
-    <p:tnLst>
-      <p:par>
-        <p:cTn id="1" dur="indefinite" restart="never" nodeType="tmRoot">
-          <p:childTnLst>
-            <p:seq concurrent="1" nextAc="seek">
-              <p:cTn id="2" dur="indefinite" nodeType="mainSeq">
-                <p:childTnLst>
-                  <p:par>
-                    <p:cTn id="3" fill="hold">
-                      <p:stCondLst>
-                        <p:cond delay="indefinite"/>
-                      </p:stCondLst>
-                      <p:childTnLst>
-                        <p:par>
-                          <p:cTn id="4" fill="hold">
-                            <p:stCondLst>
-                              <p:cond delay="0"/>
-                            </p:stCondLst>
-                            <p:childTnLst>
-                              <p:par>
-                                <p:cTn id="5" presetID="34" presetClass="entr" presetSubtype="0" fill="hold" grpId="0" nodeType="clickEffect">
-                                  <p:stCondLst>
-                                    <p:cond delay="0"/>
-                                  </p:stCondLst>
-                                  <p:childTnLst>
-                                    <p:set>
-                                      <p:cBhvr>
-                                        <p:cTn id="6" dur="1" fill="hold">
-                                          <p:stCondLst>
-                                            <p:cond delay="0"/>
-                                          </p:stCondLst>
-                                        </p:cTn>
-                                        <p:tgtEl>
-                                          <p:spTgt spid="6"/>
-                                        </p:tgtEl>
-                                        <p:attrNameLst>
-                                          <p:attrName>style.visibility</p:attrName>
-                                        </p:attrNameLst>
-                                      </p:cBhvr>
-                                      <p:to>
-                                        <p:strVal val="visible"/>
-                                      </p:to>
-                                    </p:set>
-                                    <p:anim from="(-#ppt_w/2)" to="(#ppt_x)" calcmode="lin" valueType="num">
-                                      <p:cBhvr>
-                                        <p:cTn id="7" dur="600" fill="hold">
-                                          <p:stCondLst>
-                                            <p:cond delay="0"/>
-                                          </p:stCondLst>
-                                        </p:cTn>
-                                        <p:tgtEl>
-                                          <p:spTgt spid="6"/>
-                                        </p:tgtEl>
-                                        <p:attrNameLst>
-                                          <p:attrName>ppt_x</p:attrName>
-                                        </p:attrNameLst>
-                                      </p:cBhvr>
-                                    </p:anim>
-                                    <p:anim from="0" to="-1.0" calcmode="lin" valueType="num">
-                                      <p:cBhvr>
-                                        <p:cTn id="8" dur="200" decel="50000" autoRev="1" fill="hold">
-                                          <p:stCondLst>
-                                            <p:cond delay="600"/>
-                                          </p:stCondLst>
-                                        </p:cTn>
-                                        <p:tgtEl>
-                                          <p:spTgt spid="6"/>
-                                        </p:tgtEl>
-                                        <p:attrNameLst>
-                                          <p:attrName>xshear</p:attrName>
-                                        </p:attrNameLst>
-                                      </p:cBhvr>
-                                    </p:anim>
-                                    <p:animScale>
-                                      <p:cBhvr>
-                                        <p:cTn id="9" dur="200" decel="100000" autoRev="1" fill="hold">
-                                          <p:stCondLst>
-                                            <p:cond delay="600"/>
-                                          </p:stCondLst>
-                                        </p:cTn>
-                                        <p:tgtEl>
-                                          <p:spTgt spid="6"/>
-                                        </p:tgtEl>
-                                      </p:cBhvr>
-                                      <p:from x="100000" y="100000"/>
-                                      <p:to x="80000" y="100000"/>
-                                    </p:animScale>
-                                    <p:anim by="(#ppt_h/3+#ppt_w*0.1)" calcmode="lin" valueType="num">
-                                      <p:cBhvr additive="sum">
-                                        <p:cTn id="10" dur="200" decel="100000" autoRev="1" fill="hold">
-                                          <p:stCondLst>
-                                            <p:cond delay="600"/>
-                                          </p:stCondLst>
-                                        </p:cTn>
-                                        <p:tgtEl>
-                                          <p:spTgt spid="6"/>
-                                        </p:tgtEl>
-                                        <p:attrNameLst>
-                                          <p:attrName>ppt_x</p:attrName>
-                                        </p:attrNameLst>
-                                      </p:cBhvr>
-                                    </p:anim>
-                                  </p:childTnLst>
-                                </p:cTn>
-                              </p:par>
-                            </p:childTnLst>
-                          </p:cTn>
-                        </p:par>
-                      </p:childTnLst>
-                    </p:cTn>
-                  </p:par>
-                  <p:par>
-                    <p:cTn id="11" fill="hold">
-                      <p:stCondLst>
-                        <p:cond delay="indefinite"/>
-                      </p:stCondLst>
-                      <p:childTnLst>
-                        <p:par>
-                          <p:cTn id="12" fill="hold">
-                            <p:stCondLst>
-                              <p:cond delay="0"/>
-                            </p:stCondLst>
-                            <p:childTnLst>
-                              <p:par>
-                                <p:cTn id="13" presetID="34" presetClass="entr" presetSubtype="0" fill="hold" grpId="0" nodeType="clickEffect">
-                                  <p:stCondLst>
-                                    <p:cond delay="0"/>
-                                  </p:stCondLst>
-                                  <p:childTnLst>
-                                    <p:set>
-                                      <p:cBhvr>
-                                        <p:cTn id="14" dur="1" fill="hold">
-                                          <p:stCondLst>
-                                            <p:cond delay="0"/>
-                                          </p:stCondLst>
-                                        </p:cTn>
-                                        <p:tgtEl>
-                                          <p:spTgt spid="8"/>
-                                        </p:tgtEl>
-                                        <p:attrNameLst>
-                                          <p:attrName>style.visibility</p:attrName>
-                                        </p:attrNameLst>
-                                      </p:cBhvr>
-                                      <p:to>
-                                        <p:strVal val="visible"/>
-                                      </p:to>
-                                    </p:set>
-                                    <p:anim from="(-#ppt_w/2)" to="(#ppt_x)" calcmode="lin" valueType="num">
-                                      <p:cBhvr>
-                                        <p:cTn id="15" dur="600" fill="hold">
-                                          <p:stCondLst>
-                                            <p:cond delay="0"/>
-                                          </p:stCondLst>
-                                        </p:cTn>
-                                        <p:tgtEl>
-                                          <p:spTgt spid="8"/>
-                                        </p:tgtEl>
-                                        <p:attrNameLst>
-                                          <p:attrName>ppt_x</p:attrName>
-                                        </p:attrNameLst>
-                                      </p:cBhvr>
-                                    </p:anim>
-                                    <p:anim from="0" to="-1.0" calcmode="lin" valueType="num">
-                                      <p:cBhvr>
-                                        <p:cTn id="16" dur="200" decel="50000" autoRev="1" fill="hold">
-                                          <p:stCondLst>
-                                            <p:cond delay="600"/>
-                                          </p:stCondLst>
-                                        </p:cTn>
-                                        <p:tgtEl>
-                                          <p:spTgt spid="8"/>
-                                        </p:tgtEl>
-                                        <p:attrNameLst>
-                                          <p:attrName>xshear</p:attrName>
-                                        </p:attrNameLst>
-                                      </p:cBhvr>
-                                    </p:anim>
-                                    <p:animScale>
-                                      <p:cBhvr>
-                                        <p:cTn id="17" dur="200" decel="100000" autoRev="1" fill="hold">
-                                          <p:stCondLst>
-                                            <p:cond delay="600"/>
-                                          </p:stCondLst>
-                                        </p:cTn>
-                                        <p:tgtEl>
-                                          <p:spTgt spid="8"/>
-                                        </p:tgtEl>
-                                      </p:cBhvr>
-                                      <p:from x="100000" y="100000"/>
-                                      <p:to x="80000" y="100000"/>
-                                    </p:animScale>
-                                    <p:anim by="(#ppt_h/3+#ppt_w*0.1)" calcmode="lin" valueType="num">
-                                      <p:cBhvr additive="sum">
-                                        <p:cTn id="18" dur="200" decel="100000" autoRev="1" fill="hold">
-                                          <p:stCondLst>
-                                            <p:cond delay="600"/>
-                                          </p:stCondLst>
-                                        </p:cTn>
-                                        <p:tgtEl>
-                                          <p:spTgt spid="8"/>
-                                        </p:tgtEl>
-                                        <p:attrNameLst>
-                                          <p:attrName>ppt_x</p:attrName>
-                                        </p:attrNameLst>
-                                      </p:cBhvr>
-                                    </p:anim>
-                                  </p:childTnLst>
-                                </p:cTn>
-                              </p:par>
-                            </p:childTnLst>
-                          </p:cTn>
-                        </p:par>
-                      </p:childTnLst>
-                    </p:cTn>
-                  </p:par>
-                  <p:par>
-                    <p:cTn id="19" fill="hold">
-                      <p:stCondLst>
-                        <p:cond delay="indefinite"/>
-                      </p:stCondLst>
-                      <p:childTnLst>
-                        <p:par>
-                          <p:cTn id="20" fill="hold">
-                            <p:stCondLst>
-                              <p:cond delay="0"/>
-                            </p:stCondLst>
-                            <p:childTnLst>
-                              <p:par>
-                                <p:cTn id="21" presetID="34" presetClass="entr" presetSubtype="0" fill="hold" grpId="0" nodeType="clickEffect">
-                                  <p:stCondLst>
-                                    <p:cond delay="0"/>
-                                  </p:stCondLst>
-                                  <p:childTnLst>
-                                    <p:set>
-                                      <p:cBhvr>
-                                        <p:cTn id="22" dur="1" fill="hold">
-                                          <p:stCondLst>
-                                            <p:cond delay="0"/>
-                                          </p:stCondLst>
-                                        </p:cTn>
-                                        <p:tgtEl>
-                                          <p:spTgt spid="10"/>
-                                        </p:tgtEl>
-                                        <p:attrNameLst>
-                                          <p:attrName>style.visibility</p:attrName>
-                                        </p:attrNameLst>
-                                      </p:cBhvr>
-                                      <p:to>
-                                        <p:strVal val="visible"/>
-                                      </p:to>
-                                    </p:set>
-                                    <p:anim from="(-#ppt_w/2)" to="(#ppt_x)" calcmode="lin" valueType="num">
-                                      <p:cBhvr>
-                                        <p:cTn id="23" dur="600" fill="hold">
-                                          <p:stCondLst>
-                                            <p:cond delay="0"/>
-                                          </p:stCondLst>
-                                        </p:cTn>
-                                        <p:tgtEl>
-                                          <p:spTgt spid="10"/>
-                                        </p:tgtEl>
-                                        <p:attrNameLst>
-                                          <p:attrName>ppt_x</p:attrName>
-                                        </p:attrNameLst>
-                                      </p:cBhvr>
-                                    </p:anim>
-                                    <p:anim from="0" to="-1.0" calcmode="lin" valueType="num">
-                                      <p:cBhvr>
-                                        <p:cTn id="24" dur="200" decel="50000" autoRev="1" fill="hold">
-                                          <p:stCondLst>
-                                            <p:cond delay="600"/>
-                                          </p:stCondLst>
-                                        </p:cTn>
-                                        <p:tgtEl>
-                                          <p:spTgt spid="10"/>
-                                        </p:tgtEl>
-                                        <p:attrNameLst>
-                                          <p:attrName>xshear</p:attrName>
-                                        </p:attrNameLst>
-                                      </p:cBhvr>
-                                    </p:anim>
-                                    <p:animScale>
-                                      <p:cBhvr>
-                                        <p:cTn id="25" dur="200" decel="100000" autoRev="1" fill="hold">
-                                          <p:stCondLst>
-                                            <p:cond delay="600"/>
-                                          </p:stCondLst>
-                                        </p:cTn>
-                                        <p:tgtEl>
-                                          <p:spTgt spid="10"/>
-                                        </p:tgtEl>
-                                      </p:cBhvr>
-                                      <p:from x="100000" y="100000"/>
-                                      <p:to x="80000" y="100000"/>
-                                    </p:animScale>
-                                    <p:anim by="(#ppt_h/3+#ppt_w*0.1)" calcmode="lin" valueType="num">
-                                      <p:cBhvr additive="sum">
-                                        <p:cTn id="26" dur="200" decel="100000" autoRev="1" fill="hold">
-                                          <p:stCondLst>
-                                            <p:cond delay="600"/>
-                                          </p:stCondLst>
-                                        </p:cTn>
-                                        <p:tgtEl>
-                                          <p:spTgt spid="10"/>
-                                        </p:tgtEl>
-                                        <p:attrNameLst>
-                                          <p:attrName>ppt_x</p:attrName>
-                                        </p:attrNameLst>
-                                      </p:cBhvr>
-                                    </p:anim>
-                                  </p:childTnLst>
-                                </p:cTn>
-                              </p:par>
-                            </p:childTnLst>
-                          </p:cTn>
-                        </p:par>
-                      </p:childTnLst>
-                    </p:cTn>
-                  </p:par>
-                  <p:par>
-                    <p:cTn id="27" fill="hold">
-                      <p:stCondLst>
-                        <p:cond delay="indefinite"/>
-                      </p:stCondLst>
-                      <p:childTnLst>
-                        <p:par>
-                          <p:cTn id="28" fill="hold">
-                            <p:stCondLst>
-                              <p:cond delay="0"/>
-                            </p:stCondLst>
-                            <p:childTnLst>
-                              <p:par>
-                                <p:cTn id="29" presetID="34" presetClass="entr" presetSubtype="0" fill="hold" grpId="1" nodeType="clickEffect">
-                                  <p:stCondLst>
-                                    <p:cond delay="0"/>
-                                  </p:stCondLst>
-                                  <p:childTnLst>
-                                    <p:set>
-                                      <p:cBhvr>
-                                        <p:cTn id="30" dur="1" fill="hold">
-                                          <p:stCondLst>
-                                            <p:cond delay="0"/>
-                                          </p:stCondLst>
-                                        </p:cTn>
-                                        <p:tgtEl>
-                                          <p:spTgt spid="12"/>
-                                        </p:tgtEl>
-                                        <p:attrNameLst>
-                                          <p:attrName>style.visibility</p:attrName>
-                                        </p:attrNameLst>
-                                      </p:cBhvr>
-                                      <p:to>
-                                        <p:strVal val="visible"/>
-                                      </p:to>
-                                    </p:set>
-                                    <p:anim from="(-#ppt_w/2)" to="(#ppt_x)" calcmode="lin" valueType="num">
-                                      <p:cBhvr>
-                                        <p:cTn id="31" dur="600" fill="hold">
-                                          <p:stCondLst>
-                                            <p:cond delay="0"/>
-                                          </p:stCondLst>
-                                        </p:cTn>
-                                        <p:tgtEl>
-                                          <p:spTgt spid="12"/>
-                                        </p:tgtEl>
-                                        <p:attrNameLst>
-                                          <p:attrName>ppt_x</p:attrName>
-                                        </p:attrNameLst>
-                                      </p:cBhvr>
-                                    </p:anim>
-                                    <p:anim from="0" to="-1.0" calcmode="lin" valueType="num">
-                                      <p:cBhvr>
-                                        <p:cTn id="32" dur="200" decel="50000" autoRev="1" fill="hold">
-                                          <p:stCondLst>
-                                            <p:cond delay="600"/>
-                                          </p:stCondLst>
-                                        </p:cTn>
-                                        <p:tgtEl>
-                                          <p:spTgt spid="12"/>
-                                        </p:tgtEl>
-                                        <p:attrNameLst>
-                                          <p:attrName>xshear</p:attrName>
-                                        </p:attrNameLst>
-                                      </p:cBhvr>
-                                    </p:anim>
-                                    <p:animScale>
-                                      <p:cBhvr>
-                                        <p:cTn id="33" dur="200" decel="100000" autoRev="1" fill="hold">
-                                          <p:stCondLst>
-                                            <p:cond delay="600"/>
-                                          </p:stCondLst>
-                                        </p:cTn>
-                                        <p:tgtEl>
-                                          <p:spTgt spid="12"/>
-                                        </p:tgtEl>
-                                      </p:cBhvr>
-                                      <p:from x="100000" y="100000"/>
-                                      <p:to x="80000" y="100000"/>
-                                    </p:animScale>
-                                    <p:anim by="(#ppt_h/3+#ppt_w*0.1)" calcmode="lin" valueType="num">
-                                      <p:cBhvr additive="sum">
-                                        <p:cTn id="34" dur="200" decel="100000" autoRev="1" fill="hold">
-                                          <p:stCondLst>
-                                            <p:cond delay="600"/>
-                                          </p:stCondLst>
-                                        </p:cTn>
-                                        <p:tgtEl>
-                                          <p:spTgt spid="12"/>
-                                        </p:tgtEl>
-                                        <p:attrNameLst>
-                                          <p:attrName>ppt_x</p:attrName>
-                                        </p:attrNameLst>
-                                      </p:cBhvr>
-                                    </p:anim>
-                                  </p:childTnLst>
-                                </p:cTn>
-                              </p:par>
-                            </p:childTnLst>
-                          </p:cTn>
-                        </p:par>
-                      </p:childTnLst>
-                    </p:cTn>
-                  </p:par>
-                </p:childTnLst>
-              </p:cTn>
-              <p:prevCondLst>
-                <p:cond evt="onPrev" delay="0">
-                  <p:tgtEl>
-                    <p:sldTgt/>
-                  </p:tgtEl>
-                </p:cond>
-              </p:prevCondLst>
-              <p:nextCondLst>
-                <p:cond evt="onNext" delay="0">
-                  <p:tgtEl>
-                    <p:sldTgt/>
-                  </p:tgtEl>
-                </p:cond>
-              </p:nextCondLst>
-            </p:seq>
-          </p:childTnLst>
-        </p:cTn>
-      </p:par>
-    </p:tnLst>
-    <p:bldLst>
-      <p:bldP spid="6" grpId="0"/>
-      <p:bldP spid="8" grpId="0"/>
-      <p:bldP spid="10" grpId="0"/>
-      <p:bldP spid="12" grpId="1"/>
-    </p:bldLst>
-  </p:timing>
-</p:sld>
-</file>
-
 <file path=ppt/theme/theme1.xml><?xml version="1.0" encoding="utf-8"?>
 <a:theme xmlns:a="http://schemas.openxmlformats.org/drawingml/2006/main" name="Office Theme">
   <a:themeElements>
